--- a/public/WeThink-Company-Profile-2025.pptx
+++ b/public/WeThink-Company-Profile-2025.pptx
@@ -1930,17 +1930,12 @@
         </p:nvSpPr>
         <p:spPr>
           <a:xfrm>
-            <a:off x="3808476" y="1143000"/>
-            <a:ext cx="4572000" cy="4572000"/>
-          </a:xfrm>
-          <a:prstGeom prst="ellipse">
-            <a:avLst/>
-          </a:prstGeom>
-          <a:solidFill>
-            <a:srgbClr val="5B21B6">
-              <a:alpha val="10000"/>
-            </a:srgbClr>
-          </a:solidFill>
+            <a:off x="0" y="0"/>
+            <a:ext cx="5394960" cy="6858000"/>
+          </a:xfrm>
+          <a:prstGeom prst="rect">
+            <a:avLst/>
+          </a:prstGeom>
           <a:ln w="12700">
             <a:solidFill>
               <a:srgbClr val="333333">
@@ -1953,18 +1948,93 @@
       </p:sp>
       <p:sp>
         <p:nvSpPr>
-          <p:cNvPr id="6" name="Shape 4"/>
-          <p:cNvSpPr/>
-          <p:nvPr/>
-        </p:nvSpPr>
-        <p:spPr>
-          <a:xfrm>
-            <a:off x="0" y="0"/>
-            <a:ext cx="5394960" cy="6858000"/>
-          </a:xfrm>
-          <a:prstGeom prst="rect">
-            <a:avLst/>
-          </a:prstGeom>
+          <p:cNvPr id="6" name="Text 4"/>
+          <p:cNvSpPr/>
+          <p:nvPr/>
+        </p:nvSpPr>
+        <p:spPr>
+          <a:xfrm>
+            <a:off x="457200" y="1645920"/>
+            <a:ext cx="4572000" cy="1005840"/>
+          </a:xfrm>
+          <a:prstGeom prst="rect">
+            <a:avLst/>
+          </a:prstGeom>
+          <a:noFill/>
+          <a:ln/>
+        </p:spPr>
+        <p:txBody>
+          <a:bodyPr wrap="square" rtlCol="0" anchor="ctr"/>
+          <a:lstStyle/>
+          <a:p>
+            <a:pPr indent="0" marL="0">
+              <a:buNone/>
+            </a:pPr>
+            <a:r>
+              <a:rPr lang="en-US" sz="7200" b="1" dirty="0">
+                <a:solidFill>
+                  <a:srgbClr val="FFFFFF"/>
+                </a:solidFill>
+              </a:rPr>
+              <a:t>We</a:t>
+            </a:r>
+            <a:endParaRPr lang="en-US" sz="7200" dirty="0"/>
+          </a:p>
+        </p:txBody>
+      </p:sp>
+      <p:sp>
+        <p:nvSpPr>
+          <p:cNvPr id="7" name="Text 5"/>
+          <p:cNvSpPr/>
+          <p:nvPr/>
+        </p:nvSpPr>
+        <p:spPr>
+          <a:xfrm>
+            <a:off x="457200" y="2578608"/>
+            <a:ext cx="4572000" cy="1005840"/>
+          </a:xfrm>
+          <a:prstGeom prst="rect">
+            <a:avLst/>
+          </a:prstGeom>
+          <a:noFill/>
+          <a:ln/>
+        </p:spPr>
+        <p:txBody>
+          <a:bodyPr wrap="square" rtlCol="0" anchor="ctr"/>
+          <a:lstStyle/>
+          <a:p>
+            <a:pPr indent="0" marL="0">
+              <a:buNone/>
+            </a:pPr>
+            <a:r>
+              <a:rPr lang="en-US" sz="7200" b="1" dirty="0">
+                <a:solidFill>
+                  <a:srgbClr val="C4B5FD"/>
+                </a:solidFill>
+              </a:rPr>
+              <a:t>Think</a:t>
+            </a:r>
+            <a:endParaRPr lang="en-US" sz="7200" dirty="0"/>
+          </a:p>
+        </p:txBody>
+      </p:sp>
+      <p:sp>
+        <p:nvSpPr>
+          <p:cNvPr id="8" name="Shape 6"/>
+          <p:cNvSpPr/>
+          <p:nvPr/>
+        </p:nvSpPr>
+        <p:spPr>
+          <a:xfrm>
+            <a:off x="457200" y="3712464"/>
+            <a:ext cx="1828800" cy="45720"/>
+          </a:xfrm>
+          <a:prstGeom prst="rect">
+            <a:avLst/>
+          </a:prstGeom>
+          <a:solidFill>
+            <a:srgbClr val="D8B4FE"/>
+          </a:solidFill>
           <a:ln w="12700">
             <a:solidFill>
               <a:srgbClr val="333333">
@@ -1977,92 +2047,92 @@
       </p:sp>
       <p:sp>
         <p:nvSpPr>
-          <p:cNvPr id="7" name="Text 5"/>
-          <p:cNvSpPr/>
-          <p:nvPr/>
-        </p:nvSpPr>
-        <p:spPr>
-          <a:xfrm>
-            <a:off x="457200" y="1645920"/>
-            <a:ext cx="4572000" cy="1097280"/>
-          </a:xfrm>
-          <a:prstGeom prst="rect">
-            <a:avLst/>
-          </a:prstGeom>
-          <a:noFill/>
-          <a:ln/>
-        </p:spPr>
-        <p:txBody>
-          <a:bodyPr wrap="square" rtlCol="0" anchor="ctr"/>
-          <a:lstStyle/>
-          <a:p>
-            <a:pPr indent="0" marL="0">
-              <a:buNone/>
-            </a:pPr>
-            <a:r>
-              <a:rPr lang="en-US" sz="7200" b="1" dirty="0">
-                <a:solidFill>
-                  <a:srgbClr val="FFFFFF"/>
-                </a:solidFill>
-              </a:rPr>
-              <a:t>We</a:t>
-            </a:r>
-            <a:endParaRPr lang="en-US" sz="7200" dirty="0"/>
-          </a:p>
-        </p:txBody>
-      </p:sp>
-      <p:sp>
-        <p:nvSpPr>
-          <p:cNvPr id="8" name="Text 6"/>
-          <p:cNvSpPr/>
-          <p:nvPr/>
-        </p:nvSpPr>
-        <p:spPr>
-          <a:xfrm>
-            <a:off x="457200" y="2560320"/>
-            <a:ext cx="4572000" cy="1097280"/>
-          </a:xfrm>
-          <a:prstGeom prst="rect">
-            <a:avLst/>
-          </a:prstGeom>
-          <a:noFill/>
-          <a:ln/>
-        </p:spPr>
-        <p:txBody>
-          <a:bodyPr wrap="square" rtlCol="0" anchor="ctr"/>
-          <a:lstStyle/>
-          <a:p>
-            <a:pPr indent="0" marL="0">
-              <a:buNone/>
-            </a:pPr>
-            <a:r>
-              <a:rPr lang="en-US" sz="7200" b="1" dirty="0">
-                <a:solidFill>
-                  <a:srgbClr val="C4B5FD"/>
-                </a:solidFill>
-              </a:rPr>
-              <a:t>Think</a:t>
-            </a:r>
-            <a:endParaRPr lang="en-US" sz="7200" dirty="0"/>
-          </a:p>
-        </p:txBody>
-      </p:sp>
-      <p:sp>
-        <p:nvSpPr>
-          <p:cNvPr id="9" name="Shape 7"/>
-          <p:cNvSpPr/>
-          <p:nvPr/>
-        </p:nvSpPr>
-        <p:spPr>
-          <a:xfrm>
-            <a:off x="457200" y="3749040"/>
-            <a:ext cx="1828800" cy="45720"/>
-          </a:xfrm>
-          <a:prstGeom prst="rect">
-            <a:avLst/>
-          </a:prstGeom>
-          <a:solidFill>
-            <a:srgbClr val="A78BFA"/>
+          <p:cNvPr id="9" name="Text 7"/>
+          <p:cNvSpPr/>
+          <p:nvPr/>
+        </p:nvSpPr>
+        <p:spPr>
+          <a:xfrm>
+            <a:off x="457200" y="3858768"/>
+            <a:ext cx="4572000" cy="329184"/>
+          </a:xfrm>
+          <a:prstGeom prst="rect">
+            <a:avLst/>
+          </a:prstGeom>
+          <a:noFill/>
+          <a:ln/>
+        </p:spPr>
+        <p:txBody>
+          <a:bodyPr wrap="square" rtlCol="0" anchor="ctr"/>
+          <a:lstStyle/>
+          <a:p>
+            <a:pPr indent="0" marL="0">
+              <a:buNone/>
+            </a:pPr>
+            <a:r>
+              <a:rPr lang="en-US" sz="1200" i="1" dirty="0">
+                <a:solidFill>
+                  <a:srgbClr val="E2E8F0"/>
+                </a:solidFill>
+              </a:rPr>
+              <a:t>Engineered for the Digital Age.</a:t>
+            </a:r>
+            <a:endParaRPr lang="en-US" sz="1200" dirty="0"/>
+          </a:p>
+        </p:txBody>
+      </p:sp>
+      <p:sp>
+        <p:nvSpPr>
+          <p:cNvPr id="10" name="Text 8"/>
+          <p:cNvSpPr/>
+          <p:nvPr/>
+        </p:nvSpPr>
+        <p:spPr>
+          <a:xfrm>
+            <a:off x="457200" y="4242816"/>
+            <a:ext cx="4572000" cy="256032"/>
+          </a:xfrm>
+          <a:prstGeom prst="rect">
+            <a:avLst/>
+          </a:prstGeom>
+          <a:noFill/>
+          <a:ln/>
+        </p:spPr>
+        <p:txBody>
+          <a:bodyPr wrap="square" rtlCol="0" anchor="ctr"/>
+          <a:lstStyle/>
+          <a:p>
+            <a:pPr indent="0" marL="0">
+              <a:buNone/>
+            </a:pPr>
+            <a:r>
+              <a:rPr lang="en-US" sz="950" dirty="0">
+                <a:solidFill>
+                  <a:srgbClr val="D8B4FE"/>
+                </a:solidFill>
+              </a:rPr>
+              <a:t>Abu Dhabi, UAE  ·  Est. 2019  ·  wethink.ae</a:t>
+            </a:r>
+            <a:endParaRPr lang="en-US" sz="950" dirty="0"/>
+          </a:p>
+        </p:txBody>
+      </p:sp>
+      <p:sp>
+        <p:nvSpPr>
+          <p:cNvPr id="11" name="Shape 9"/>
+          <p:cNvSpPr/>
+          <p:nvPr/>
+        </p:nvSpPr>
+        <p:spPr>
+          <a:xfrm>
+            <a:off x="457200" y="4828032"/>
+            <a:ext cx="73152" cy="73152"/>
+          </a:xfrm>
+          <a:prstGeom prst="ellipse">
+            <a:avLst/>
+          </a:prstGeom>
+          <a:solidFill>
+            <a:srgbClr val="D8B4FE"/>
           </a:solidFill>
           <a:ln w="12700">
             <a:solidFill>
@@ -2076,50 +2146,14 @@
       </p:sp>
       <p:sp>
         <p:nvSpPr>
-          <p:cNvPr id="10" name="Text 8"/>
-          <p:cNvSpPr/>
-          <p:nvPr/>
-        </p:nvSpPr>
-        <p:spPr>
-          <a:xfrm>
-            <a:off x="457200" y="3886200"/>
-            <a:ext cx="4572000" cy="320040"/>
-          </a:xfrm>
-          <a:prstGeom prst="rect">
-            <a:avLst/>
-          </a:prstGeom>
-          <a:noFill/>
-          <a:ln/>
-        </p:spPr>
-        <p:txBody>
-          <a:bodyPr wrap="square" rtlCol="0" anchor="ctr"/>
-          <a:lstStyle/>
-          <a:p>
-            <a:pPr indent="0" marL="0">
-              <a:buNone/>
-            </a:pPr>
-            <a:r>
-              <a:rPr lang="en-US" sz="1200" i="1" dirty="0">
-                <a:solidFill>
-                  <a:srgbClr val="C4B5FD"/>
-                </a:solidFill>
-              </a:rPr>
-              <a:t>Engineered for the Digital Age.</a:t>
-            </a:r>
-            <a:endParaRPr lang="en-US" sz="1200" dirty="0"/>
-          </a:p>
-        </p:txBody>
-      </p:sp>
-      <p:sp>
-        <p:nvSpPr>
-          <p:cNvPr id="11" name="Text 9"/>
-          <p:cNvSpPr/>
-          <p:nvPr/>
-        </p:nvSpPr>
-        <p:spPr>
-          <a:xfrm>
-            <a:off x="457200" y="4279392"/>
-            <a:ext cx="4572000" cy="256032"/>
+          <p:cNvPr id="12" name="Text 10"/>
+          <p:cNvSpPr/>
+          <p:nvPr/>
+        </p:nvSpPr>
+        <p:spPr>
+          <a:xfrm>
+            <a:off x="621792" y="4773168"/>
+            <a:ext cx="4389120" cy="256032"/>
           </a:xfrm>
           <a:prstGeom prst="rect">
             <a:avLst/>
@@ -2137,10 +2171,10 @@
             <a:r>
               <a:rPr lang="en-US" sz="950" dirty="0">
                 <a:solidFill>
-                  <a:srgbClr val="8B5CF6"/>
-                </a:solidFill>
-              </a:rPr>
-              <a:t>Abu Dhabi, UAE  ·  Est. 2019  ·  wethink.ae</a:t>
+                  <a:srgbClr val="E2E8F0"/>
+                </a:solidFill>
+              </a:rPr>
+              <a:t>IT Consulting</a:t>
             </a:r>
             <a:endParaRPr lang="en-US" sz="950" dirty="0"/>
           </a:p>
@@ -2148,278 +2182,20 @@
       </p:sp>
       <p:sp>
         <p:nvSpPr>
-          <p:cNvPr id="12" name="Text 10"/>
-          <p:cNvSpPr/>
-          <p:nvPr/>
-        </p:nvSpPr>
-        <p:spPr>
-          <a:xfrm>
-            <a:off x="457200" y="4754880"/>
-            <a:ext cx="4572000" cy="256032"/>
-          </a:xfrm>
-          <a:prstGeom prst="rect">
-            <a:avLst/>
-          </a:prstGeom>
-          <a:noFill/>
-          <a:ln/>
-        </p:spPr>
-        <p:txBody>
-          <a:bodyPr wrap="square" rtlCol="0" anchor="ctr"/>
-          <a:lstStyle/>
-          <a:p>
-            <a:pPr indent="0" marL="0">
-              <a:buNone/>
-            </a:pPr>
-            <a:r>
-              <a:rPr lang="en-US" sz="900" dirty="0">
-                <a:solidFill>
-                  <a:srgbClr val="7C6DAF"/>
-                </a:solidFill>
-              </a:rPr>
-              <a:t>IT Consulting</a:t>
-            </a:r>
-            <a:endParaRPr lang="en-US" sz="900" dirty="0"/>
-          </a:p>
-        </p:txBody>
-      </p:sp>
-      <p:sp>
-        <p:nvSpPr>
-          <p:cNvPr id="13" name="Text 11"/>
-          <p:cNvSpPr/>
-          <p:nvPr/>
-        </p:nvSpPr>
-        <p:spPr>
-          <a:xfrm>
-            <a:off x="457200" y="5029200"/>
-            <a:ext cx="4572000" cy="256032"/>
-          </a:xfrm>
-          <a:prstGeom prst="rect">
-            <a:avLst/>
-          </a:prstGeom>
-          <a:noFill/>
-          <a:ln/>
-        </p:spPr>
-        <p:txBody>
-          <a:bodyPr wrap="square" rtlCol="0" anchor="ctr"/>
-          <a:lstStyle/>
-          <a:p>
-            <a:pPr indent="0" marL="0">
-              <a:buNone/>
-            </a:pPr>
-            <a:r>
-              <a:rPr lang="en-US" sz="900" dirty="0">
-                <a:solidFill>
-                  <a:srgbClr val="7C6DAF"/>
-                </a:solidFill>
-              </a:rPr>
-              <a:t>Cloud Strategy</a:t>
-            </a:r>
-            <a:endParaRPr lang="en-US" sz="900" dirty="0"/>
-          </a:p>
-        </p:txBody>
-      </p:sp>
-      <p:sp>
-        <p:nvSpPr>
-          <p:cNvPr id="14" name="Text 12"/>
-          <p:cNvSpPr/>
-          <p:nvPr/>
-        </p:nvSpPr>
-        <p:spPr>
-          <a:xfrm>
-            <a:off x="457200" y="5303520"/>
-            <a:ext cx="4572000" cy="256032"/>
-          </a:xfrm>
-          <a:prstGeom prst="rect">
-            <a:avLst/>
-          </a:prstGeom>
-          <a:noFill/>
-          <a:ln/>
-        </p:spPr>
-        <p:txBody>
-          <a:bodyPr wrap="square" rtlCol="0" anchor="ctr"/>
-          <a:lstStyle/>
-          <a:p>
-            <a:pPr indent="0" marL="0">
-              <a:buNone/>
-            </a:pPr>
-            <a:r>
-              <a:rPr lang="en-US" sz="900" dirty="0">
-                <a:solidFill>
-                  <a:srgbClr val="7C6DAF"/>
-                </a:solidFill>
-              </a:rPr>
-              <a:t>Cybersecurity</a:t>
-            </a:r>
-            <a:endParaRPr lang="en-US" sz="900" dirty="0"/>
-          </a:p>
-        </p:txBody>
-      </p:sp>
-      <p:sp>
-        <p:nvSpPr>
-          <p:cNvPr id="15" name="Text 13"/>
-          <p:cNvSpPr/>
-          <p:nvPr/>
-        </p:nvSpPr>
-        <p:spPr>
-          <a:xfrm>
-            <a:off x="457200" y="5577840"/>
-            <a:ext cx="4572000" cy="256032"/>
-          </a:xfrm>
-          <a:prstGeom prst="rect">
-            <a:avLst/>
-          </a:prstGeom>
-          <a:noFill/>
-          <a:ln/>
-        </p:spPr>
-        <p:txBody>
-          <a:bodyPr wrap="square" rtlCol="0" anchor="ctr"/>
-          <a:lstStyle/>
-          <a:p>
-            <a:pPr indent="0" marL="0">
-              <a:buNone/>
-            </a:pPr>
-            <a:r>
-              <a:rPr lang="en-US" sz="900" dirty="0">
-                <a:solidFill>
-                  <a:srgbClr val="7C6DAF"/>
-                </a:solidFill>
-              </a:rPr>
-              <a:t>Custom Software</a:t>
-            </a:r>
-            <a:endParaRPr lang="en-US" sz="900" dirty="0"/>
-          </a:p>
-        </p:txBody>
-      </p:sp>
-      <p:sp>
-        <p:nvSpPr>
-          <p:cNvPr id="16" name="Text 14"/>
-          <p:cNvSpPr/>
-          <p:nvPr/>
-        </p:nvSpPr>
-        <p:spPr>
-          <a:xfrm>
-            <a:off x="5760720" y="1188720"/>
-            <a:ext cx="5943600" cy="3200400"/>
-          </a:xfrm>
-          <a:prstGeom prst="rect">
-            <a:avLst/>
-          </a:prstGeom>
-          <a:noFill/>
-          <a:ln/>
-        </p:spPr>
-        <p:txBody>
-          <a:bodyPr wrap="square" rtlCol="0" anchor="ctr"/>
-          <a:lstStyle/>
-          <a:p>
-            <a:pPr indent="0" marL="0">
-              <a:lnSpc>
-                <a:spcPct val="120000"/>
-              </a:lnSpc>
-              <a:buNone/>
-            </a:pPr>
-            <a:r>
-              <a:rPr lang="en-US" sz="4200" b="1" dirty="0">
-                <a:solidFill>
-                  <a:srgbClr val="FFFFFF"/>
-                </a:solidFill>
-              </a:rPr>
-              <a:t>Transforming</a:t>
-            </a:r>
-            <a:endParaRPr lang="en-US" sz="4200" dirty="0"/>
-          </a:p>
-          <a:p>
-            <a:pPr indent="0" marL="0">
-              <a:lnSpc>
-                <a:spcPct val="120000"/>
-              </a:lnSpc>
-              <a:buNone/>
-            </a:pPr>
-            <a:r>
-              <a:rPr lang="en-US" sz="4200" b="1" dirty="0">
-                <a:solidFill>
-                  <a:srgbClr val="FFFFFF"/>
-                </a:solidFill>
-              </a:rPr>
-              <a:t>Enterprises</a:t>
-            </a:r>
-            <a:endParaRPr lang="en-US" sz="4200" dirty="0"/>
-          </a:p>
-          <a:p>
-            <a:pPr indent="0" marL="0">
-              <a:lnSpc>
-                <a:spcPct val="120000"/>
-              </a:lnSpc>
-              <a:buNone/>
-            </a:pPr>
-            <a:r>
-              <a:rPr lang="en-US" sz="4200" b="1" dirty="0">
-                <a:solidFill>
-                  <a:srgbClr val="FFFFFF"/>
-                </a:solidFill>
-              </a:rPr>
-              <a:t>Across the Gulf.</a:t>
-            </a:r>
-            <a:endParaRPr lang="en-US" sz="4200" dirty="0"/>
-          </a:p>
-        </p:txBody>
-      </p:sp>
-      <p:sp>
-        <p:nvSpPr>
-          <p:cNvPr id="17" name="Text 15"/>
-          <p:cNvSpPr/>
-          <p:nvPr/>
-        </p:nvSpPr>
-        <p:spPr>
-          <a:xfrm>
-            <a:off x="5760720" y="4434840"/>
-            <a:ext cx="5943600" cy="1005840"/>
-          </a:xfrm>
-          <a:prstGeom prst="rect">
-            <a:avLst/>
-          </a:prstGeom>
-          <a:noFill/>
-          <a:ln/>
-        </p:spPr>
-        <p:txBody>
-          <a:bodyPr wrap="square" rtlCol="0" anchor="ctr"/>
-          <a:lstStyle/>
-          <a:p>
-            <a:pPr indent="0" marL="0">
-              <a:lnSpc>
-                <a:spcPct val="160000"/>
-              </a:lnSpc>
-              <a:buNone/>
-            </a:pPr>
-            <a:r>
-              <a:rPr lang="en-US" sz="1100" dirty="0">
-                <a:solidFill>
-                  <a:srgbClr val="94A3B8"/>
-                </a:solidFill>
-              </a:rPr>
-              <a:t>WeThink delivers end-to-end technology consulting, cloud architecture, cybersecurity, and bespoke software — helping UAE and Gulf enterprises compete and thrive in an accelerating digital world.</a:t>
-            </a:r>
-            <a:endParaRPr lang="en-US" sz="1100" dirty="0"/>
-          </a:p>
-        </p:txBody>
-      </p:sp>
-      <p:sp>
-        <p:nvSpPr>
-          <p:cNvPr id="18" name="Shape 16"/>
-          <p:cNvSpPr/>
-          <p:nvPr/>
-        </p:nvSpPr>
-        <p:spPr>
-          <a:xfrm>
-            <a:off x="0" y="6565392"/>
-            <a:ext cx="12192000" cy="292608"/>
-          </a:xfrm>
-          <a:prstGeom prst="rect">
-            <a:avLst/>
-          </a:prstGeom>
-          <a:solidFill>
-            <a:srgbClr val="7C3AED">
-              <a:alpha val="30000"/>
-            </a:srgbClr>
+          <p:cNvPr id="13" name="Shape 11"/>
+          <p:cNvSpPr/>
+          <p:nvPr/>
+        </p:nvSpPr>
+        <p:spPr>
+          <a:xfrm>
+            <a:off x="457200" y="5120640"/>
+            <a:ext cx="73152" cy="73152"/>
+          </a:xfrm>
+          <a:prstGeom prst="ellipse">
+            <a:avLst/>
+          </a:prstGeom>
+          <a:solidFill>
+            <a:srgbClr val="D8B4FE"/>
           </a:solidFill>
           <a:ln w="12700">
             <a:solidFill>
@@ -2433,7 +2209,281 @@
       </p:sp>
       <p:sp>
         <p:nvSpPr>
+          <p:cNvPr id="14" name="Text 12"/>
+          <p:cNvSpPr/>
+          <p:nvPr/>
+        </p:nvSpPr>
+        <p:spPr>
+          <a:xfrm>
+            <a:off x="621792" y="5065776"/>
+            <a:ext cx="4389120" cy="256032"/>
+          </a:xfrm>
+          <a:prstGeom prst="rect">
+            <a:avLst/>
+          </a:prstGeom>
+          <a:noFill/>
+          <a:ln/>
+        </p:spPr>
+        <p:txBody>
+          <a:bodyPr wrap="square" rtlCol="0" anchor="ctr"/>
+          <a:lstStyle/>
+          <a:p>
+            <a:pPr indent="0" marL="0">
+              <a:buNone/>
+            </a:pPr>
+            <a:r>
+              <a:rPr lang="en-US" sz="950" dirty="0">
+                <a:solidFill>
+                  <a:srgbClr val="E2E8F0"/>
+                </a:solidFill>
+              </a:rPr>
+              <a:t>Cloud Strategy</a:t>
+            </a:r>
+            <a:endParaRPr lang="en-US" sz="950" dirty="0"/>
+          </a:p>
+        </p:txBody>
+      </p:sp>
+      <p:sp>
+        <p:nvSpPr>
+          <p:cNvPr id="15" name="Shape 13"/>
+          <p:cNvSpPr/>
+          <p:nvPr/>
+        </p:nvSpPr>
+        <p:spPr>
+          <a:xfrm>
+            <a:off x="457200" y="5413248"/>
+            <a:ext cx="73152" cy="73152"/>
+          </a:xfrm>
+          <a:prstGeom prst="ellipse">
+            <a:avLst/>
+          </a:prstGeom>
+          <a:solidFill>
+            <a:srgbClr val="D8B4FE"/>
+          </a:solidFill>
+          <a:ln w="12700">
+            <a:solidFill>
+              <a:srgbClr val="333333">
+                <a:alpha val="0"/>
+              </a:srgbClr>
+            </a:solidFill>
+            <a:prstDash val="solid"/>
+          </a:ln>
+        </p:spPr>
+      </p:sp>
+      <p:sp>
+        <p:nvSpPr>
+          <p:cNvPr id="16" name="Text 14"/>
+          <p:cNvSpPr/>
+          <p:nvPr/>
+        </p:nvSpPr>
+        <p:spPr>
+          <a:xfrm>
+            <a:off x="621792" y="5358384"/>
+            <a:ext cx="4389120" cy="256032"/>
+          </a:xfrm>
+          <a:prstGeom prst="rect">
+            <a:avLst/>
+          </a:prstGeom>
+          <a:noFill/>
+          <a:ln/>
+        </p:spPr>
+        <p:txBody>
+          <a:bodyPr wrap="square" rtlCol="0" anchor="ctr"/>
+          <a:lstStyle/>
+          <a:p>
+            <a:pPr indent="0" marL="0">
+              <a:buNone/>
+            </a:pPr>
+            <a:r>
+              <a:rPr lang="en-US" sz="950" dirty="0">
+                <a:solidFill>
+                  <a:srgbClr val="E2E8F0"/>
+                </a:solidFill>
+              </a:rPr>
+              <a:t>Cybersecurity</a:t>
+            </a:r>
+            <a:endParaRPr lang="en-US" sz="950" dirty="0"/>
+          </a:p>
+        </p:txBody>
+      </p:sp>
+      <p:sp>
+        <p:nvSpPr>
+          <p:cNvPr id="17" name="Shape 15"/>
+          <p:cNvSpPr/>
+          <p:nvPr/>
+        </p:nvSpPr>
+        <p:spPr>
+          <a:xfrm>
+            <a:off x="457200" y="5705856"/>
+            <a:ext cx="73152" cy="73152"/>
+          </a:xfrm>
+          <a:prstGeom prst="ellipse">
+            <a:avLst/>
+          </a:prstGeom>
+          <a:solidFill>
+            <a:srgbClr val="D8B4FE"/>
+          </a:solidFill>
+          <a:ln w="12700">
+            <a:solidFill>
+              <a:srgbClr val="333333">
+                <a:alpha val="0"/>
+              </a:srgbClr>
+            </a:solidFill>
+            <a:prstDash val="solid"/>
+          </a:ln>
+        </p:spPr>
+      </p:sp>
+      <p:sp>
+        <p:nvSpPr>
+          <p:cNvPr id="18" name="Text 16"/>
+          <p:cNvSpPr/>
+          <p:nvPr/>
+        </p:nvSpPr>
+        <p:spPr>
+          <a:xfrm>
+            <a:off x="621792" y="5650992"/>
+            <a:ext cx="4389120" cy="256032"/>
+          </a:xfrm>
+          <a:prstGeom prst="rect">
+            <a:avLst/>
+          </a:prstGeom>
+          <a:noFill/>
+          <a:ln/>
+        </p:spPr>
+        <p:txBody>
+          <a:bodyPr wrap="square" rtlCol="0" anchor="ctr"/>
+          <a:lstStyle/>
+          <a:p>
+            <a:pPr indent="0" marL="0">
+              <a:buNone/>
+            </a:pPr>
+            <a:r>
+              <a:rPr lang="en-US" sz="950" dirty="0">
+                <a:solidFill>
+                  <a:srgbClr val="E2E8F0"/>
+                </a:solidFill>
+              </a:rPr>
+              <a:t>Custom Software</a:t>
+            </a:r>
+            <a:endParaRPr lang="en-US" sz="950" dirty="0"/>
+          </a:p>
+        </p:txBody>
+      </p:sp>
+      <p:sp>
+        <p:nvSpPr>
           <p:cNvPr id="19" name="Text 17"/>
+          <p:cNvSpPr/>
+          <p:nvPr/>
+        </p:nvSpPr>
+        <p:spPr>
+          <a:xfrm>
+            <a:off x="5760720" y="1188720"/>
+            <a:ext cx="5943600" cy="3108960"/>
+          </a:xfrm>
+          <a:prstGeom prst="rect">
+            <a:avLst/>
+          </a:prstGeom>
+          <a:noFill/>
+          <a:ln/>
+        </p:spPr>
+        <p:txBody>
+          <a:bodyPr wrap="square" rtlCol="0" anchor="ctr"/>
+          <a:lstStyle/>
+          <a:p>
+            <a:pPr indent="0" marL="0">
+              <a:lnSpc>
+                <a:spcPct val="120000"/>
+              </a:lnSpc>
+              <a:buNone/>
+            </a:pPr>
+            <a:r>
+              <a:rPr lang="en-US" sz="4200" b="1" dirty="0">
+                <a:solidFill>
+                  <a:srgbClr val="FFFFFF"/>
+                </a:solidFill>
+              </a:rPr>
+              <a:t>Transforming</a:t>
+            </a:r>
+            <a:endParaRPr lang="en-US" sz="4200" dirty="0"/>
+          </a:p>
+          <a:p>
+            <a:pPr indent="0" marL="0">
+              <a:lnSpc>
+                <a:spcPct val="120000"/>
+              </a:lnSpc>
+              <a:buNone/>
+            </a:pPr>
+            <a:r>
+              <a:rPr lang="en-US" sz="4200" b="1" dirty="0">
+                <a:solidFill>
+                  <a:srgbClr val="FFFFFF"/>
+                </a:solidFill>
+              </a:rPr>
+              <a:t>Enterprises</a:t>
+            </a:r>
+            <a:endParaRPr lang="en-US" sz="4200" dirty="0"/>
+          </a:p>
+          <a:p>
+            <a:pPr indent="0" marL="0">
+              <a:lnSpc>
+                <a:spcPct val="120000"/>
+              </a:lnSpc>
+              <a:buNone/>
+            </a:pPr>
+            <a:r>
+              <a:rPr lang="en-US" sz="4200" b="1" dirty="0">
+                <a:solidFill>
+                  <a:srgbClr val="FFFFFF"/>
+                </a:solidFill>
+              </a:rPr>
+              <a:t>Across the Gulf.</a:t>
+            </a:r>
+            <a:endParaRPr lang="en-US" sz="4200" dirty="0"/>
+          </a:p>
+        </p:txBody>
+      </p:sp>
+      <p:sp>
+        <p:nvSpPr>
+          <p:cNvPr id="20" name="Text 18"/>
+          <p:cNvSpPr/>
+          <p:nvPr/>
+        </p:nvSpPr>
+        <p:spPr>
+          <a:xfrm>
+            <a:off x="5760720" y="4407408"/>
+            <a:ext cx="5943600" cy="1005840"/>
+          </a:xfrm>
+          <a:prstGeom prst="rect">
+            <a:avLst/>
+          </a:prstGeom>
+          <a:noFill/>
+          <a:ln/>
+        </p:spPr>
+        <p:txBody>
+          <a:bodyPr wrap="square" rtlCol="0" anchor="ctr"/>
+          <a:lstStyle/>
+          <a:p>
+            <a:pPr indent="0" marL="0">
+              <a:lnSpc>
+                <a:spcPct val="160000"/>
+              </a:lnSpc>
+              <a:buNone/>
+            </a:pPr>
+            <a:r>
+              <a:rPr lang="en-US" sz="1100" dirty="0">
+                <a:solidFill>
+                  <a:srgbClr val="E2E8F0"/>
+                </a:solidFill>
+              </a:rPr>
+              <a:t>WeThink delivers end-to-end technology consulting, cloud architecture, cybersecurity, and bespoke software — helping UAE and Gulf enterprises compete and thrive in an accelerating digital world.</a:t>
+            </a:r>
+            <a:endParaRPr lang="en-US" sz="1100" dirty="0"/>
+          </a:p>
+        </p:txBody>
+      </p:sp>
+      <p:sp>
+        <p:nvSpPr>
+          <p:cNvPr id="21" name="Shape 19"/>
           <p:cNvSpPr/>
           <p:nvPr/>
         </p:nvSpPr>
@@ -2445,6 +2495,35 @@
           <a:prstGeom prst="rect">
             <a:avLst/>
           </a:prstGeom>
+          <a:solidFill>
+            <a:srgbClr val="3B0764">
+              <a:alpha val="60000"/>
+            </a:srgbClr>
+          </a:solidFill>
+          <a:ln w="12700">
+            <a:solidFill>
+              <a:srgbClr val="333333">
+                <a:alpha val="0"/>
+              </a:srgbClr>
+            </a:solidFill>
+            <a:prstDash val="solid"/>
+          </a:ln>
+        </p:spPr>
+      </p:sp>
+      <p:sp>
+        <p:nvSpPr>
+          <p:cNvPr id="22" name="Text 20"/>
+          <p:cNvSpPr/>
+          <p:nvPr/>
+        </p:nvSpPr>
+        <p:spPr>
+          <a:xfrm>
+            <a:off x="0" y="6565392"/>
+            <a:ext cx="12192000" cy="292608"/>
+          </a:xfrm>
+          <a:prstGeom prst="rect">
+            <a:avLst/>
+          </a:prstGeom>
           <a:noFill/>
           <a:ln/>
         </p:spPr>
@@ -2456,14 +2535,14 @@
               <a:buNone/>
             </a:pPr>
             <a:r>
-              <a:rPr lang="en-US" sz="800" dirty="0">
-                <a:solidFill>
-                  <a:srgbClr val="A78BFA"/>
-                </a:solidFill>
-              </a:rPr>
-              <a:t>Company Profile  2025  ·  Confidential</a:t>
-            </a:r>
-            <a:endParaRPr lang="en-US" sz="800" dirty="0"/>
+              <a:rPr lang="en-US" sz="750" dirty="0">
+                <a:solidFill>
+                  <a:srgbClr val="C4B5FD"/>
+                </a:solidFill>
+              </a:rPr>
+              <a:t>WeThink Technology Consulting  ·  Abu Dhabi, UAE  ·  wethink.ae  ·  © 2025</a:t>
+            </a:r>
+            <a:endParaRPr lang="en-US" sz="750" dirty="0"/>
           </a:p>
         </p:txBody>
       </p:sp>
@@ -2626,7 +2705,7 @@
             <a:r>
               <a:rPr lang="en-US" sz="3000" b="1" dirty="0">
                 <a:solidFill>
-                  <a:srgbClr val="1A0A2E"/>
+                  <a:srgbClr val="111827"/>
                 </a:solidFill>
               </a:rPr>
               <a:t>Why Choose WeThink</a:t>
@@ -2662,7 +2741,7 @@
             <a:r>
               <a:rPr lang="en-US" sz="1000" dirty="0">
                 <a:solidFill>
-                  <a:srgbClr val="64748B"/>
+                  <a:srgbClr val="4B5563"/>
                 </a:solidFill>
               </a:rPr>
               <a:t>Four qualities that set us apart — and keep our clients coming back.</a:t>
@@ -2695,7 +2774,7 @@
           <a:ln w="12700">
             <a:solidFill>
               <a:srgbClr val="7C3AED">
-                <a:alpha val="35000"/>
+                <a:alpha val="38000"/>
               </a:srgbClr>
             </a:solidFill>
             <a:prstDash val="solid"/>
@@ -2704,45 +2783,7 @@
       </p:sp>
       <p:sp>
         <p:nvSpPr>
-          <p:cNvPr id="9" name="Text 7"/>
-          <p:cNvSpPr/>
-          <p:nvPr/>
-        </p:nvSpPr>
-        <p:spPr>
-          <a:xfrm>
-            <a:off x="5458968" y="1371600"/>
-            <a:ext cx="530352" cy="475488"/>
-          </a:xfrm>
-          <a:prstGeom prst="rect">
-            <a:avLst/>
-          </a:prstGeom>
-          <a:noFill/>
-          <a:ln/>
-        </p:spPr>
-        <p:txBody>
-          <a:bodyPr wrap="square" rtlCol="0" anchor="ctr"/>
-          <a:lstStyle/>
-          <a:p>
-            <a:pPr algn="r" indent="0" marL="0">
-              <a:buNone/>
-            </a:pPr>
-            <a:r>
-              <a:rPr lang="en-US" sz="3200" b="1" dirty="0">
-                <a:solidFill>
-                  <a:srgbClr val="7C3AED">
-                    <a:alpha val="20000"/>
-                  </a:srgbClr>
-                </a:solidFill>
-              </a:rPr>
-              <a:t>01</a:t>
-            </a:r>
-            <a:endParaRPr lang="en-US" sz="3200" dirty="0"/>
-          </a:p>
-        </p:txBody>
-      </p:sp>
-      <p:sp>
-        <p:nvSpPr>
-          <p:cNvPr id="10" name="Shape 8"/>
+          <p:cNvPr id="9" name="Shape 7"/>
           <p:cNvSpPr/>
           <p:nvPr/>
         </p:nvSpPr>
@@ -2769,6 +2810,44 @@
       </p:sp>
       <p:sp>
         <p:nvSpPr>
+          <p:cNvPr id="10" name="Text 8"/>
+          <p:cNvSpPr/>
+          <p:nvPr/>
+        </p:nvSpPr>
+        <p:spPr>
+          <a:xfrm>
+            <a:off x="5458968" y="1371600"/>
+            <a:ext cx="530352" cy="475488"/>
+          </a:xfrm>
+          <a:prstGeom prst="rect">
+            <a:avLst/>
+          </a:prstGeom>
+          <a:noFill/>
+          <a:ln/>
+        </p:spPr>
+        <p:txBody>
+          <a:bodyPr wrap="square" rtlCol="0" anchor="ctr"/>
+          <a:lstStyle/>
+          <a:p>
+            <a:pPr algn="r" indent="0" marL="0">
+              <a:buNone/>
+            </a:pPr>
+            <a:r>
+              <a:rPr lang="en-US" sz="3200" b="1" dirty="0">
+                <a:solidFill>
+                  <a:srgbClr val="7C3AED">
+                    <a:alpha val="25000"/>
+                  </a:srgbClr>
+                </a:solidFill>
+              </a:rPr>
+              <a:t>01</a:t>
+            </a:r>
+            <a:endParaRPr lang="en-US" sz="3200" dirty="0"/>
+          </a:p>
+        </p:txBody>
+      </p:sp>
+      <p:sp>
+        <p:nvSpPr>
           <p:cNvPr id="11" name="Text 9"/>
           <p:cNvSpPr/>
           <p:nvPr/>
@@ -2776,7 +2855,7 @@
         <p:spPr>
           <a:xfrm>
             <a:off x="685800" y="1444752"/>
-            <a:ext cx="4837176" cy="329184"/>
+            <a:ext cx="4837176" cy="347472"/>
           </a:xfrm>
           <a:prstGeom prst="rect">
             <a:avLst/>
@@ -2794,7 +2873,7 @@
             <a:r>
               <a:rPr lang="en-US" sz="1400" b="1" dirty="0">
                 <a:solidFill>
-                  <a:srgbClr val="1A0A2E"/>
+                  <a:srgbClr val="111827"/>
                 </a:solidFill>
               </a:rPr>
               <a:t>UAE-Native Expertise</a:t>
@@ -2833,10 +2912,10 @@
             <a:r>
               <a:rPr lang="en-US" sz="950" dirty="0">
                 <a:solidFill>
-                  <a:srgbClr val="64748B"/>
-                </a:solidFill>
-              </a:rPr>
-              <a:t>Deep understanding of local regulations, UAE Vision 2031, NESA standards, and Gulf market dynamics — applied alongside global technology best practice. We know how business gets done here.</a:t>
+                  <a:srgbClr val="1F2937"/>
+                </a:solidFill>
+              </a:rPr>
+              <a:t>Deep understanding of UAE regulations, Vision 2031, NESA standards, and Gulf market dynamics — applied alongside global technology best practice. We know how business gets done here.</a:t>
             </a:r>
             <a:endParaRPr lang="en-US" sz="950" dirty="0"/>
           </a:p>
@@ -2866,7 +2945,7 @@
           <a:ln w="12700">
             <a:solidFill>
               <a:srgbClr val="0EA5E9">
-                <a:alpha val="35000"/>
+                <a:alpha val="38000"/>
               </a:srgbClr>
             </a:solidFill>
             <a:prstDash val="solid"/>
@@ -2875,45 +2954,7 @@
       </p:sp>
       <p:sp>
         <p:nvSpPr>
-          <p:cNvPr id="14" name="Text 12"/>
-          <p:cNvSpPr/>
-          <p:nvPr/>
-        </p:nvSpPr>
-        <p:spPr>
-          <a:xfrm>
-            <a:off x="11119104" y="1371600"/>
-            <a:ext cx="530352" cy="475488"/>
-          </a:xfrm>
-          <a:prstGeom prst="rect">
-            <a:avLst/>
-          </a:prstGeom>
-          <a:noFill/>
-          <a:ln/>
-        </p:spPr>
-        <p:txBody>
-          <a:bodyPr wrap="square" rtlCol="0" anchor="ctr"/>
-          <a:lstStyle/>
-          <a:p>
-            <a:pPr algn="r" indent="0" marL="0">
-              <a:buNone/>
-            </a:pPr>
-            <a:r>
-              <a:rPr lang="en-US" sz="3200" b="1" dirty="0">
-                <a:solidFill>
-                  <a:srgbClr val="0EA5E9">
-                    <a:alpha val="20000"/>
-                  </a:srgbClr>
-                </a:solidFill>
-              </a:rPr>
-              <a:t>02</a:t>
-            </a:r>
-            <a:endParaRPr lang="en-US" sz="3200" dirty="0"/>
-          </a:p>
-        </p:txBody>
-      </p:sp>
-      <p:sp>
-        <p:nvSpPr>
-          <p:cNvPr id="15" name="Shape 13"/>
+          <p:cNvPr id="14" name="Shape 12"/>
           <p:cNvSpPr/>
           <p:nvPr/>
         </p:nvSpPr>
@@ -2940,6 +2981,44 @@
       </p:sp>
       <p:sp>
         <p:nvSpPr>
+          <p:cNvPr id="15" name="Text 13"/>
+          <p:cNvSpPr/>
+          <p:nvPr/>
+        </p:nvSpPr>
+        <p:spPr>
+          <a:xfrm>
+            <a:off x="11119104" y="1371600"/>
+            <a:ext cx="530352" cy="475488"/>
+          </a:xfrm>
+          <a:prstGeom prst="rect">
+            <a:avLst/>
+          </a:prstGeom>
+          <a:noFill/>
+          <a:ln/>
+        </p:spPr>
+        <p:txBody>
+          <a:bodyPr wrap="square" rtlCol="0" anchor="ctr"/>
+          <a:lstStyle/>
+          <a:p>
+            <a:pPr algn="r" indent="0" marL="0">
+              <a:buNone/>
+            </a:pPr>
+            <a:r>
+              <a:rPr lang="en-US" sz="3200" b="1" dirty="0">
+                <a:solidFill>
+                  <a:srgbClr val="0EA5E9">
+                    <a:alpha val="25000"/>
+                  </a:srgbClr>
+                </a:solidFill>
+              </a:rPr>
+              <a:t>02</a:t>
+            </a:r>
+            <a:endParaRPr lang="en-US" sz="3200" dirty="0"/>
+          </a:p>
+        </p:txBody>
+      </p:sp>
+      <p:sp>
+        <p:nvSpPr>
           <p:cNvPr id="16" name="Text 14"/>
           <p:cNvSpPr/>
           <p:nvPr/>
@@ -2947,7 +3026,7 @@
         <p:spPr>
           <a:xfrm>
             <a:off x="6345936" y="1444752"/>
-            <a:ext cx="4837176" cy="329184"/>
+            <a:ext cx="4837176" cy="347472"/>
           </a:xfrm>
           <a:prstGeom prst="rect">
             <a:avLst/>
@@ -2965,7 +3044,7 @@
             <a:r>
               <a:rPr lang="en-US" sz="1400" b="1" dirty="0">
                 <a:solidFill>
-                  <a:srgbClr val="1A0A2E"/>
+                  <a:srgbClr val="111827"/>
                 </a:solidFill>
               </a:rPr>
               <a:t>End-to-End Ownership</a:t>
@@ -3004,7 +3083,7 @@
             <a:r>
               <a:rPr lang="en-US" sz="950" dirty="0">
                 <a:solidFill>
-                  <a:srgbClr val="64748B"/>
+                  <a:srgbClr val="1F2937"/>
                 </a:solidFill>
               </a:rPr>
               <a:t>We don't hand off deliverables and disappear. We own the outcome from initial strategy through design, build, and post-launch operations — ensuring every project actually succeeds in production.</a:t>
@@ -3037,7 +3116,7 @@
           <a:ln w="12700">
             <a:solidFill>
               <a:srgbClr val="059669">
-                <a:alpha val="35000"/>
+                <a:alpha val="38000"/>
               </a:srgbClr>
             </a:solidFill>
             <a:prstDash val="solid"/>
@@ -3046,45 +3125,7 @@
       </p:sp>
       <p:sp>
         <p:nvSpPr>
-          <p:cNvPr id="19" name="Text 17"/>
-          <p:cNvSpPr/>
-          <p:nvPr/>
-        </p:nvSpPr>
-        <p:spPr>
-          <a:xfrm>
-            <a:off x="5458968" y="3822192"/>
-            <a:ext cx="530352" cy="475488"/>
-          </a:xfrm>
-          <a:prstGeom prst="rect">
-            <a:avLst/>
-          </a:prstGeom>
-          <a:noFill/>
-          <a:ln/>
-        </p:spPr>
-        <p:txBody>
-          <a:bodyPr wrap="square" rtlCol="0" anchor="ctr"/>
-          <a:lstStyle/>
-          <a:p>
-            <a:pPr algn="r" indent="0" marL="0">
-              <a:buNone/>
-            </a:pPr>
-            <a:r>
-              <a:rPr lang="en-US" sz="3200" b="1" dirty="0">
-                <a:solidFill>
-                  <a:srgbClr val="059669">
-                    <a:alpha val="20000"/>
-                  </a:srgbClr>
-                </a:solidFill>
-              </a:rPr>
-              <a:t>03</a:t>
-            </a:r>
-            <a:endParaRPr lang="en-US" sz="3200" dirty="0"/>
-          </a:p>
-        </p:txBody>
-      </p:sp>
-      <p:sp>
-        <p:nvSpPr>
-          <p:cNvPr id="20" name="Shape 18"/>
+          <p:cNvPr id="19" name="Shape 17"/>
           <p:cNvSpPr/>
           <p:nvPr/>
         </p:nvSpPr>
@@ -3111,6 +3152,44 @@
       </p:sp>
       <p:sp>
         <p:nvSpPr>
+          <p:cNvPr id="20" name="Text 18"/>
+          <p:cNvSpPr/>
+          <p:nvPr/>
+        </p:nvSpPr>
+        <p:spPr>
+          <a:xfrm>
+            <a:off x="5458968" y="3822192"/>
+            <a:ext cx="530352" cy="475488"/>
+          </a:xfrm>
+          <a:prstGeom prst="rect">
+            <a:avLst/>
+          </a:prstGeom>
+          <a:noFill/>
+          <a:ln/>
+        </p:spPr>
+        <p:txBody>
+          <a:bodyPr wrap="square" rtlCol="0" anchor="ctr"/>
+          <a:lstStyle/>
+          <a:p>
+            <a:pPr algn="r" indent="0" marL="0">
+              <a:buNone/>
+            </a:pPr>
+            <a:r>
+              <a:rPr lang="en-US" sz="3200" b="1" dirty="0">
+                <a:solidFill>
+                  <a:srgbClr val="059669">
+                    <a:alpha val="25000"/>
+                  </a:srgbClr>
+                </a:solidFill>
+              </a:rPr>
+              <a:t>03</a:t>
+            </a:r>
+            <a:endParaRPr lang="en-US" sz="3200" dirty="0"/>
+          </a:p>
+        </p:txBody>
+      </p:sp>
+      <p:sp>
+        <p:nvSpPr>
           <p:cNvPr id="21" name="Text 19"/>
           <p:cNvSpPr/>
           <p:nvPr/>
@@ -3118,7 +3197,7 @@
         <p:spPr>
           <a:xfrm>
             <a:off x="685800" y="3895344"/>
-            <a:ext cx="4837176" cy="329184"/>
+            <a:ext cx="4837176" cy="347472"/>
           </a:xfrm>
           <a:prstGeom prst="rect">
             <a:avLst/>
@@ -3136,7 +3215,7 @@
             <a:r>
               <a:rPr lang="en-US" sz="1400" b="1" dirty="0">
                 <a:solidFill>
-                  <a:srgbClr val="1A0A2E"/>
+                  <a:srgbClr val="111827"/>
                 </a:solidFill>
               </a:rPr>
               <a:t>Certified Professionals</a:t>
@@ -3175,10 +3254,10 @@
             <a:r>
               <a:rPr lang="en-US" sz="950" dirty="0">
                 <a:solidFill>
-                  <a:srgbClr val="64748B"/>
-                </a:solidFill>
-              </a:rPr>
-              <a:t>Our team holds certifications across AWS, Azure, GCP, PMP, CISSP, ISO 27001, and more. Clients benefit from proven, credentialed expertise — not junior consultants on the job for the first time.</a:t>
+                  <a:srgbClr val="1F2937"/>
+                </a:solidFill>
+              </a:rPr>
+              <a:t>Our team holds certifications across AWS, Azure, GCP, PMP, CISSP, and ISO 27001. Clients benefit from proven, credentialed expertise — not junior consultants on the job for the first time.</a:t>
             </a:r>
             <a:endParaRPr lang="en-US" sz="950" dirty="0"/>
           </a:p>
@@ -3208,7 +3287,7 @@
           <a:ln w="12700">
             <a:solidFill>
               <a:srgbClr val="F59E0B">
-                <a:alpha val="35000"/>
+                <a:alpha val="38000"/>
               </a:srgbClr>
             </a:solidFill>
             <a:prstDash val="solid"/>
@@ -3217,45 +3296,7 @@
       </p:sp>
       <p:sp>
         <p:nvSpPr>
-          <p:cNvPr id="24" name="Text 22"/>
-          <p:cNvSpPr/>
-          <p:nvPr/>
-        </p:nvSpPr>
-        <p:spPr>
-          <a:xfrm>
-            <a:off x="11119104" y="3822192"/>
-            <a:ext cx="530352" cy="475488"/>
-          </a:xfrm>
-          <a:prstGeom prst="rect">
-            <a:avLst/>
-          </a:prstGeom>
-          <a:noFill/>
-          <a:ln/>
-        </p:spPr>
-        <p:txBody>
-          <a:bodyPr wrap="square" rtlCol="0" anchor="ctr"/>
-          <a:lstStyle/>
-          <a:p>
-            <a:pPr algn="r" indent="0" marL="0">
-              <a:buNone/>
-            </a:pPr>
-            <a:r>
-              <a:rPr lang="en-US" sz="3200" b="1" dirty="0">
-                <a:solidFill>
-                  <a:srgbClr val="F59E0B">
-                    <a:alpha val="20000"/>
-                  </a:srgbClr>
-                </a:solidFill>
-              </a:rPr>
-              <a:t>04</a:t>
-            </a:r>
-            <a:endParaRPr lang="en-US" sz="3200" dirty="0"/>
-          </a:p>
-        </p:txBody>
-      </p:sp>
-      <p:sp>
-        <p:nvSpPr>
-          <p:cNvPr id="25" name="Shape 23"/>
+          <p:cNvPr id="24" name="Shape 22"/>
           <p:cNvSpPr/>
           <p:nvPr/>
         </p:nvSpPr>
@@ -3282,6 +3323,44 @@
       </p:sp>
       <p:sp>
         <p:nvSpPr>
+          <p:cNvPr id="25" name="Text 23"/>
+          <p:cNvSpPr/>
+          <p:nvPr/>
+        </p:nvSpPr>
+        <p:spPr>
+          <a:xfrm>
+            <a:off x="11119104" y="3822192"/>
+            <a:ext cx="530352" cy="475488"/>
+          </a:xfrm>
+          <a:prstGeom prst="rect">
+            <a:avLst/>
+          </a:prstGeom>
+          <a:noFill/>
+          <a:ln/>
+        </p:spPr>
+        <p:txBody>
+          <a:bodyPr wrap="square" rtlCol="0" anchor="ctr"/>
+          <a:lstStyle/>
+          <a:p>
+            <a:pPr algn="r" indent="0" marL="0">
+              <a:buNone/>
+            </a:pPr>
+            <a:r>
+              <a:rPr lang="en-US" sz="3200" b="1" dirty="0">
+                <a:solidFill>
+                  <a:srgbClr val="F59E0B">
+                    <a:alpha val="25000"/>
+                  </a:srgbClr>
+                </a:solidFill>
+              </a:rPr>
+              <a:t>04</a:t>
+            </a:r>
+            <a:endParaRPr lang="en-US" sz="3200" dirty="0"/>
+          </a:p>
+        </p:txBody>
+      </p:sp>
+      <p:sp>
+        <p:nvSpPr>
           <p:cNvPr id="26" name="Text 24"/>
           <p:cNvSpPr/>
           <p:nvPr/>
@@ -3289,7 +3368,7 @@
         <p:spPr>
           <a:xfrm>
             <a:off x="6345936" y="3895344"/>
-            <a:ext cx="4837176" cy="329184"/>
+            <a:ext cx="4837176" cy="347472"/>
           </a:xfrm>
           <a:prstGeom prst="rect">
             <a:avLst/>
@@ -3307,7 +3386,7 @@
             <a:r>
               <a:rPr lang="en-US" sz="1400" b="1" dirty="0">
                 <a:solidFill>
-                  <a:srgbClr val="1A0A2E"/>
+                  <a:srgbClr val="111827"/>
                 </a:solidFill>
               </a:rPr>
               <a:t>Proven Track Record</a:t>
@@ -3346,10 +3425,10 @@
             <a:r>
               <a:rPr lang="en-US" sz="950" dirty="0">
                 <a:solidFill>
-                  <a:srgbClr val="64748B"/>
-                </a:solidFill>
-              </a:rPr>
-              <a:t>5,000+ projects delivered, 1,000+ clients served, and a portfolio spanning UAE federal government, leading banks, energy operators, and fast-growing startups. Our results speak for themselves.</a:t>
+                  <a:srgbClr val="1F2937"/>
+                </a:solidFill>
+              </a:rPr>
+              <a:t>5,000+ projects delivered, 1,000+ clients served, spanning UAE federal government, leading banks, energy operators, and fast-growing startups. Our results speak for themselves.</a:t>
             </a:r>
             <a:endParaRPr lang="en-US" sz="950" dirty="0"/>
           </a:p>
@@ -3409,9 +3488,9 @@
               <a:buNone/>
             </a:pPr>
             <a:r>
-              <a:rPr lang="en-US" sz="750" dirty="0">
-                <a:solidFill>
-                  <a:srgbClr val="7C3AED"/>
+              <a:rPr lang="en-US" sz="750" b="1" dirty="0">
+                <a:solidFill>
+                  <a:srgbClr val="5B21B6"/>
                 </a:solidFill>
               </a:rPr>
               <a:t>WeThink Technology Consulting  ·  Abu Dhabi, UAE  ·  wethink.ae  ·  © 2025</a:t>
@@ -3559,7 +3638,7 @@
             <a:avLst/>
           </a:prstGeom>
           <a:solidFill>
-            <a:srgbClr val="A78BFA"/>
+            <a:srgbClr val="C4B5FD"/>
           </a:solidFill>
           <a:ln w="12700">
             <a:solidFill>
@@ -3598,7 +3677,7 @@
             <a:r>
               <a:rPr lang="en-US" sz="750" b="1" spc="200" kern="0" dirty="0">
                 <a:solidFill>
-                  <a:srgbClr val="A78BFA"/>
+                  <a:srgbClr val="C4B5FD"/>
                 </a:solidFill>
               </a:rPr>
               <a:t>BY THE NUMBERS</a:t>
@@ -3670,7 +3749,7 @@
             <a:r>
               <a:rPr lang="en-US" sz="4400" b="1" dirty="0">
                 <a:solidFill>
-                  <a:srgbClr val="A78BFA"/>
+                  <a:srgbClr val="C4B5FD"/>
                 </a:solidFill>
               </a:rPr>
               <a:t>Define Us</a:t>
@@ -3688,22 +3767,22 @@
         <p:spPr>
           <a:xfrm>
             <a:off x="662940" y="1828800"/>
-            <a:ext cx="2084832" cy="1417320"/>
+            <a:ext cx="2084832" cy="1444752"/>
           </a:xfrm>
           <a:prstGeom prst="rect">
             <a:avLst>
-              <a:gd name="adj" fmla="val 7742"/>
+              <a:gd name="adj" fmla="val 7595"/>
             </a:avLst>
           </a:prstGeom>
           <a:solidFill>
-            <a:srgbClr val="7C3AED">
-              <a:alpha val="20000"/>
+            <a:srgbClr val="A78BFA">
+              <a:alpha val="22000"/>
             </a:srgbClr>
           </a:solidFill>
           <a:ln w="12700">
             <a:solidFill>
-              <a:srgbClr val="7C3AED">
-                <a:alpha val="50000"/>
+              <a:srgbClr val="A78BFA">
+                <a:alpha val="55000"/>
               </a:srgbClr>
             </a:solidFill>
             <a:prstDash val="solid"/>
@@ -3719,7 +3798,7 @@
         <p:spPr>
           <a:xfrm>
             <a:off x="662940" y="1901952"/>
-            <a:ext cx="2084832" cy="685800"/>
+            <a:ext cx="2084832" cy="713232"/>
           </a:xfrm>
           <a:prstGeom prst="rect">
             <a:avLst/>
@@ -3737,7 +3816,7 @@
             <a:r>
               <a:rPr lang="en-US" sz="3400" b="1" dirty="0">
                 <a:solidFill>
-                  <a:srgbClr val="7C3AED"/>
+                  <a:srgbClr val="FFFFFF"/>
                 </a:solidFill>
               </a:rPr>
               <a:t>5+</a:t>
@@ -3754,8 +3833,8 @@
         </p:nvSpPr>
         <p:spPr>
           <a:xfrm>
-            <a:off x="662940" y="2560320"/>
-            <a:ext cx="2084832" cy="548640"/>
+            <a:off x="662940" y="2615184"/>
+            <a:ext cx="2084832" cy="530352"/>
           </a:xfrm>
           <a:prstGeom prst="rect">
             <a:avLst/>
@@ -3773,7 +3852,7 @@
             <a:r>
               <a:rPr lang="en-US" sz="900" dirty="0">
                 <a:solidFill>
-                  <a:srgbClr val="94A3B8"/>
+                  <a:srgbClr val="CBD5E1"/>
                 </a:solidFill>
               </a:rPr>
               <a:t>Years of Excellence</a:t>
@@ -3791,22 +3870,22 @@
         <p:spPr>
           <a:xfrm>
             <a:off x="2857500" y="1828800"/>
-            <a:ext cx="2084832" cy="1417320"/>
+            <a:ext cx="2084832" cy="1444752"/>
           </a:xfrm>
           <a:prstGeom prst="rect">
             <a:avLst>
-              <a:gd name="adj" fmla="val 7742"/>
+              <a:gd name="adj" fmla="val 7595"/>
             </a:avLst>
           </a:prstGeom>
           <a:solidFill>
-            <a:srgbClr val="4F46E5">
-              <a:alpha val="20000"/>
+            <a:srgbClr val="818CF8">
+              <a:alpha val="22000"/>
             </a:srgbClr>
           </a:solidFill>
           <a:ln w="12700">
             <a:solidFill>
-              <a:srgbClr val="4F46E5">
-                <a:alpha val="50000"/>
+              <a:srgbClr val="818CF8">
+                <a:alpha val="55000"/>
               </a:srgbClr>
             </a:solidFill>
             <a:prstDash val="solid"/>
@@ -3822,7 +3901,7 @@
         <p:spPr>
           <a:xfrm>
             <a:off x="2857500" y="1901952"/>
-            <a:ext cx="2084832" cy="685800"/>
+            <a:ext cx="2084832" cy="713232"/>
           </a:xfrm>
           <a:prstGeom prst="rect">
             <a:avLst/>
@@ -3840,7 +3919,7 @@
             <a:r>
               <a:rPr lang="en-US" sz="3400" b="1" dirty="0">
                 <a:solidFill>
-                  <a:srgbClr val="4F46E5"/>
+                  <a:srgbClr val="FFFFFF"/>
                 </a:solidFill>
               </a:rPr>
               <a:t>5,000+</a:t>
@@ -3857,8 +3936,8 @@
         </p:nvSpPr>
         <p:spPr>
           <a:xfrm>
-            <a:off x="2857500" y="2560320"/>
-            <a:ext cx="2084832" cy="548640"/>
+            <a:off x="2857500" y="2615184"/>
+            <a:ext cx="2084832" cy="530352"/>
           </a:xfrm>
           <a:prstGeom prst="rect">
             <a:avLst/>
@@ -3876,7 +3955,7 @@
             <a:r>
               <a:rPr lang="en-US" sz="900" dirty="0">
                 <a:solidFill>
-                  <a:srgbClr val="94A3B8"/>
+                  <a:srgbClr val="CBD5E1"/>
                 </a:solidFill>
               </a:rPr>
               <a:t>Projects Delivered</a:t>
@@ -3894,22 +3973,22 @@
         <p:spPr>
           <a:xfrm>
             <a:off x="5052060" y="1828800"/>
-            <a:ext cx="2084832" cy="1417320"/>
+            <a:ext cx="2084832" cy="1444752"/>
           </a:xfrm>
           <a:prstGeom prst="rect">
             <a:avLst>
-              <a:gd name="adj" fmla="val 7742"/>
+              <a:gd name="adj" fmla="val 7595"/>
             </a:avLst>
           </a:prstGeom>
           <a:solidFill>
-            <a:srgbClr val="0EA5E9">
-              <a:alpha val="20000"/>
+            <a:srgbClr val="38BDF8">
+              <a:alpha val="22000"/>
             </a:srgbClr>
           </a:solidFill>
           <a:ln w="12700">
             <a:solidFill>
-              <a:srgbClr val="0EA5E9">
-                <a:alpha val="50000"/>
+              <a:srgbClr val="38BDF8">
+                <a:alpha val="55000"/>
               </a:srgbClr>
             </a:solidFill>
             <a:prstDash val="solid"/>
@@ -3925,7 +4004,7 @@
         <p:spPr>
           <a:xfrm>
             <a:off x="5052060" y="1901952"/>
-            <a:ext cx="2084832" cy="685800"/>
+            <a:ext cx="2084832" cy="713232"/>
           </a:xfrm>
           <a:prstGeom prst="rect">
             <a:avLst/>
@@ -3943,7 +4022,7 @@
             <a:r>
               <a:rPr lang="en-US" sz="3400" b="1" dirty="0">
                 <a:solidFill>
-                  <a:srgbClr val="0EA5E9"/>
+                  <a:srgbClr val="FFFFFF"/>
                 </a:solidFill>
               </a:rPr>
               <a:t>1,000+</a:t>
@@ -3960,8 +4039,8 @@
         </p:nvSpPr>
         <p:spPr>
           <a:xfrm>
-            <a:off x="5052060" y="2560320"/>
-            <a:ext cx="2084832" cy="548640"/>
+            <a:off x="5052060" y="2615184"/>
+            <a:ext cx="2084832" cy="530352"/>
           </a:xfrm>
           <a:prstGeom prst="rect">
             <a:avLst/>
@@ -3979,7 +4058,7 @@
             <a:r>
               <a:rPr lang="en-US" sz="900" dirty="0">
                 <a:solidFill>
-                  <a:srgbClr val="94A3B8"/>
+                  <a:srgbClr val="CBD5E1"/>
                 </a:solidFill>
               </a:rPr>
               <a:t>Clients Served</a:t>
@@ -3997,22 +4076,22 @@
         <p:spPr>
           <a:xfrm>
             <a:off x="7246620" y="1828800"/>
-            <a:ext cx="2084832" cy="1417320"/>
+            <a:ext cx="2084832" cy="1444752"/>
           </a:xfrm>
           <a:prstGeom prst="rect">
             <a:avLst>
-              <a:gd name="adj" fmla="val 7742"/>
+              <a:gd name="adj" fmla="val 7595"/>
             </a:avLst>
           </a:prstGeom>
           <a:solidFill>
-            <a:srgbClr val="059669">
-              <a:alpha val="20000"/>
+            <a:srgbClr val="34D399">
+              <a:alpha val="22000"/>
             </a:srgbClr>
           </a:solidFill>
           <a:ln w="12700">
             <a:solidFill>
-              <a:srgbClr val="059669">
-                <a:alpha val="50000"/>
+              <a:srgbClr val="34D399">
+                <a:alpha val="55000"/>
               </a:srgbClr>
             </a:solidFill>
             <a:prstDash val="solid"/>
@@ -4028,7 +4107,7 @@
         <p:spPr>
           <a:xfrm>
             <a:off x="7246620" y="1901952"/>
-            <a:ext cx="2084832" cy="685800"/>
+            <a:ext cx="2084832" cy="713232"/>
           </a:xfrm>
           <a:prstGeom prst="rect">
             <a:avLst/>
@@ -4046,7 +4125,7 @@
             <a:r>
               <a:rPr lang="en-US" sz="3400" b="1" dirty="0">
                 <a:solidFill>
-                  <a:srgbClr val="059669"/>
+                  <a:srgbClr val="FFFFFF"/>
                 </a:solidFill>
               </a:rPr>
               <a:t>99.98%</a:t>
@@ -4063,8 +4142,8 @@
         </p:nvSpPr>
         <p:spPr>
           <a:xfrm>
-            <a:off x="7246620" y="2560320"/>
-            <a:ext cx="2084832" cy="548640"/>
+            <a:off x="7246620" y="2615184"/>
+            <a:ext cx="2084832" cy="530352"/>
           </a:xfrm>
           <a:prstGeom prst="rect">
             <a:avLst/>
@@ -4082,7 +4161,7 @@
             <a:r>
               <a:rPr lang="en-US" sz="900" dirty="0">
                 <a:solidFill>
-                  <a:srgbClr val="94A3B8"/>
+                  <a:srgbClr val="CBD5E1"/>
                 </a:solidFill>
               </a:rPr>
               <a:t>Average Uptime SLA</a:t>
@@ -4100,22 +4179,22 @@
         <p:spPr>
           <a:xfrm>
             <a:off x="9441180" y="1828800"/>
-            <a:ext cx="2084832" cy="1417320"/>
+            <a:ext cx="2084832" cy="1444752"/>
           </a:xfrm>
           <a:prstGeom prst="rect">
             <a:avLst>
-              <a:gd name="adj" fmla="val 7742"/>
+              <a:gd name="adj" fmla="val 7595"/>
             </a:avLst>
           </a:prstGeom>
           <a:solidFill>
-            <a:srgbClr val="F59E0B">
-              <a:alpha val="20000"/>
+            <a:srgbClr val="FBB124">
+              <a:alpha val="22000"/>
             </a:srgbClr>
           </a:solidFill>
           <a:ln w="12700">
             <a:solidFill>
-              <a:srgbClr val="F59E0B">
-                <a:alpha val="50000"/>
+              <a:srgbClr val="FBB124">
+                <a:alpha val="55000"/>
               </a:srgbClr>
             </a:solidFill>
             <a:prstDash val="solid"/>
@@ -4131,7 +4210,7 @@
         <p:spPr>
           <a:xfrm>
             <a:off x="9441180" y="1901952"/>
-            <a:ext cx="2084832" cy="685800"/>
+            <a:ext cx="2084832" cy="713232"/>
           </a:xfrm>
           <a:prstGeom prst="rect">
             <a:avLst/>
@@ -4149,7 +4228,7 @@
             <a:r>
               <a:rPr lang="en-US" sz="3400" b="1" dirty="0">
                 <a:solidFill>
-                  <a:srgbClr val="F59E0B"/>
+                  <a:srgbClr val="FFFFFF"/>
                 </a:solidFill>
               </a:rPr>
               <a:t>8</a:t>
@@ -4166,8 +4245,8 @@
         </p:nvSpPr>
         <p:spPr>
           <a:xfrm>
-            <a:off x="9441180" y="2560320"/>
-            <a:ext cx="2084832" cy="548640"/>
+            <a:off x="9441180" y="2615184"/>
+            <a:ext cx="2084832" cy="530352"/>
           </a:xfrm>
           <a:prstGeom prst="rect">
             <a:avLst/>
@@ -4185,7 +4264,7 @@
             <a:r>
               <a:rPr lang="en-US" sz="900" dirty="0">
                 <a:solidFill>
-                  <a:srgbClr val="94A3B8"/>
+                  <a:srgbClr val="CBD5E1"/>
                 </a:solidFill>
               </a:rPr>
               <a:t>Core Service Areas</a:t>
@@ -4202,7 +4281,7 @@
         </p:nvSpPr>
         <p:spPr>
           <a:xfrm>
-            <a:off x="502920" y="3429000"/>
+            <a:off x="502920" y="3456432"/>
             <a:ext cx="11183112" cy="36576"/>
           </a:xfrm>
           <a:prstGeom prst="rect">
@@ -4231,7 +4310,7 @@
         </p:nvSpPr>
         <p:spPr>
           <a:xfrm>
-            <a:off x="502920" y="3529584"/>
+            <a:off x="502920" y="3566160"/>
             <a:ext cx="11183112" cy="347472"/>
           </a:xfrm>
           <a:prstGeom prst="rect">
@@ -4267,14 +4346,14 @@
         </p:nvSpPr>
         <p:spPr>
           <a:xfrm>
-            <a:off x="502920" y="4014216"/>
+            <a:off x="502920" y="4050792"/>
             <a:ext cx="91440" cy="91440"/>
           </a:xfrm>
           <a:prstGeom prst="ellipse">
             <a:avLst/>
           </a:prstGeom>
           <a:solidFill>
-            <a:srgbClr val="7C3AED"/>
+            <a:srgbClr val="A78BFA"/>
           </a:solidFill>
           <a:ln w="12700">
             <a:solidFill>
@@ -4294,31 +4373,31 @@
         </p:nvSpPr>
         <p:spPr>
           <a:xfrm>
-            <a:off x="685800" y="3950208"/>
-            <a:ext cx="5303520" cy="411480"/>
-          </a:xfrm>
-          <a:prstGeom prst="rect">
-            <a:avLst/>
-          </a:prstGeom>
-          <a:noFill/>
-          <a:ln/>
-        </p:spPr>
-        <p:txBody>
-          <a:bodyPr wrap="square" rtlCol="0" anchor="ctr"/>
-          <a:lstStyle/>
-          <a:p>
-            <a:pPr indent="0" marL="0">
-              <a:buNone/>
-            </a:pPr>
-            <a:r>
-              <a:rPr lang="en-US" sz="900" dirty="0">
-                <a:solidFill>
-                  <a:srgbClr val="94A3B8"/>
+            <a:off x="685800" y="3986784"/>
+            <a:ext cx="5303520" cy="420624"/>
+          </a:xfrm>
+          <a:prstGeom prst="rect">
+            <a:avLst/>
+          </a:prstGeom>
+          <a:noFill/>
+          <a:ln/>
+        </p:spPr>
+        <p:txBody>
+          <a:bodyPr wrap="square" rtlCol="0" anchor="ctr"/>
+          <a:lstStyle/>
+          <a:p>
+            <a:pPr indent="0" marL="0">
+              <a:buNone/>
+            </a:pPr>
+            <a:r>
+              <a:rPr lang="en-US" sz="950" dirty="0">
+                <a:solidFill>
+                  <a:srgbClr val="E2E8F0"/>
                 </a:solidFill>
               </a:rPr>
               <a:t>ISO 27001 certification programmes completed in under 9 months</a:t>
             </a:r>
-            <a:endParaRPr lang="en-US" sz="900" dirty="0"/>
+            <a:endParaRPr lang="en-US" sz="950" dirty="0"/>
           </a:p>
         </p:txBody>
       </p:sp>
@@ -4330,14 +4409,14 @@
         </p:nvSpPr>
         <p:spPr>
           <a:xfrm>
-            <a:off x="6185916" y="4014216"/>
+            <a:off x="6185916" y="4050792"/>
             <a:ext cx="91440" cy="91440"/>
           </a:xfrm>
           <a:prstGeom prst="ellipse">
             <a:avLst/>
           </a:prstGeom>
           <a:solidFill>
-            <a:srgbClr val="0EA5E9"/>
+            <a:srgbClr val="38BDF8"/>
           </a:solidFill>
           <a:ln w="12700">
             <a:solidFill>
@@ -4357,31 +4436,31 @@
         </p:nvSpPr>
         <p:spPr>
           <a:xfrm>
-            <a:off x="6368796" y="3950208"/>
-            <a:ext cx="5303520" cy="411480"/>
-          </a:xfrm>
-          <a:prstGeom prst="rect">
-            <a:avLst/>
-          </a:prstGeom>
-          <a:noFill/>
-          <a:ln/>
-        </p:spPr>
-        <p:txBody>
-          <a:bodyPr wrap="square" rtlCol="0" anchor="ctr"/>
-          <a:lstStyle/>
-          <a:p>
-            <a:pPr indent="0" marL="0">
-              <a:buNone/>
-            </a:pPr>
-            <a:r>
-              <a:rPr lang="en-US" sz="900" dirty="0">
-                <a:solidFill>
-                  <a:srgbClr val="94A3B8"/>
-                </a:solidFill>
-              </a:rPr>
-              <a:t>Zero-downtime cloud migrations delivered across multiple financial sector clients</a:t>
-            </a:r>
-            <a:endParaRPr lang="en-US" sz="900" dirty="0"/>
+            <a:off x="6368796" y="3986784"/>
+            <a:ext cx="5303520" cy="420624"/>
+          </a:xfrm>
+          <a:prstGeom prst="rect">
+            <a:avLst/>
+          </a:prstGeom>
+          <a:noFill/>
+          <a:ln/>
+        </p:spPr>
+        <p:txBody>
+          <a:bodyPr wrap="square" rtlCol="0" anchor="ctr"/>
+          <a:lstStyle/>
+          <a:p>
+            <a:pPr indent="0" marL="0">
+              <a:buNone/>
+            </a:pPr>
+            <a:r>
+              <a:rPr lang="en-US" sz="950" dirty="0">
+                <a:solidFill>
+                  <a:srgbClr val="E2E8F0"/>
+                </a:solidFill>
+              </a:rPr>
+              <a:t>Zero-downtime cloud migrations delivered across financial sector clients</a:t>
+            </a:r>
+            <a:endParaRPr lang="en-US" sz="950" dirty="0"/>
           </a:p>
         </p:txBody>
       </p:sp>
@@ -4393,14 +4472,14 @@
         </p:nvSpPr>
         <p:spPr>
           <a:xfrm>
-            <a:off x="502920" y="4489704"/>
+            <a:off x="502920" y="4526280"/>
             <a:ext cx="91440" cy="91440"/>
           </a:xfrm>
           <a:prstGeom prst="ellipse">
             <a:avLst/>
           </a:prstGeom>
           <a:solidFill>
-            <a:srgbClr val="059669"/>
+            <a:srgbClr val="34D399"/>
           </a:solidFill>
           <a:ln w="12700">
             <a:solidFill>
@@ -4420,31 +4499,31 @@
         </p:nvSpPr>
         <p:spPr>
           <a:xfrm>
-            <a:off x="685800" y="4425696"/>
-            <a:ext cx="5303520" cy="411480"/>
-          </a:xfrm>
-          <a:prstGeom prst="rect">
-            <a:avLst/>
-          </a:prstGeom>
-          <a:noFill/>
-          <a:ln/>
-        </p:spPr>
-        <p:txBody>
-          <a:bodyPr wrap="square" rtlCol="0" anchor="ctr"/>
-          <a:lstStyle/>
-          <a:p>
-            <a:pPr indent="0" marL="0">
-              <a:buNone/>
-            </a:pPr>
-            <a:r>
-              <a:rPr lang="en-US" sz="900" dirty="0">
-                <a:solidFill>
-                  <a:srgbClr val="94A3B8"/>
+            <a:off x="685800" y="4462272"/>
+            <a:ext cx="5303520" cy="420624"/>
+          </a:xfrm>
+          <a:prstGeom prst="rect">
+            <a:avLst/>
+          </a:prstGeom>
+          <a:noFill/>
+          <a:ln/>
+        </p:spPr>
+        <p:txBody>
+          <a:bodyPr wrap="square" rtlCol="0" anchor="ctr"/>
+          <a:lstStyle/>
+          <a:p>
+            <a:pPr indent="0" marL="0">
+              <a:buNone/>
+            </a:pPr>
+            <a:r>
+              <a:rPr lang="en-US" sz="950" dirty="0">
+                <a:solidFill>
+                  <a:srgbClr val="E2E8F0"/>
                 </a:solidFill>
               </a:rPr>
               <a:t>Trusted technology partner for UAE Federal and Emirate Government entities</a:t>
             </a:r>
-            <a:endParaRPr lang="en-US" sz="900" dirty="0"/>
+            <a:endParaRPr lang="en-US" sz="950" dirty="0"/>
           </a:p>
         </p:txBody>
       </p:sp>
@@ -4456,14 +4535,14 @@
         </p:nvSpPr>
         <p:spPr>
           <a:xfrm>
-            <a:off x="6185916" y="4489704"/>
+            <a:off x="6185916" y="4526280"/>
             <a:ext cx="91440" cy="91440"/>
           </a:xfrm>
           <a:prstGeom prst="ellipse">
             <a:avLst/>
           </a:prstGeom>
           <a:solidFill>
-            <a:srgbClr val="F59E0B"/>
+            <a:srgbClr val="FBB124"/>
           </a:solidFill>
           <a:ln w="12700">
             <a:solidFill>
@@ -4483,31 +4562,31 @@
         </p:nvSpPr>
         <p:spPr>
           <a:xfrm>
-            <a:off x="6368796" y="4425696"/>
-            <a:ext cx="5303520" cy="411480"/>
-          </a:xfrm>
-          <a:prstGeom prst="rect">
-            <a:avLst/>
-          </a:prstGeom>
-          <a:noFill/>
-          <a:ln/>
-        </p:spPr>
-        <p:txBody>
-          <a:bodyPr wrap="square" rtlCol="0" anchor="ctr"/>
-          <a:lstStyle/>
-          <a:p>
-            <a:pPr indent="0" marL="0">
-              <a:buNone/>
-            </a:pPr>
-            <a:r>
-              <a:rPr lang="en-US" sz="900" dirty="0">
-                <a:solidFill>
-                  <a:srgbClr val="94A3B8"/>
+            <a:off x="6368796" y="4462272"/>
+            <a:ext cx="5303520" cy="420624"/>
+          </a:xfrm>
+          <a:prstGeom prst="rect">
+            <a:avLst/>
+          </a:prstGeom>
+          <a:noFill/>
+          <a:ln/>
+        </p:spPr>
+        <p:txBody>
+          <a:bodyPr wrap="square" rtlCol="0" anchor="ctr"/>
+          <a:lstStyle/>
+          <a:p>
+            <a:pPr indent="0" marL="0">
+              <a:buNone/>
+            </a:pPr>
+            <a:r>
+              <a:rPr lang="en-US" sz="950" dirty="0">
+                <a:solidFill>
+                  <a:srgbClr val="E2E8F0"/>
                 </a:solidFill>
               </a:rPr>
               <a:t>Custom platforms serving 18,000+ daily active users across UAE university campuses</a:t>
             </a:r>
-            <a:endParaRPr lang="en-US" sz="900" dirty="0"/>
+            <a:endParaRPr lang="en-US" sz="950" dirty="0"/>
           </a:p>
         </p:txBody>
       </p:sp>
@@ -4519,14 +4598,14 @@
         </p:nvSpPr>
         <p:spPr>
           <a:xfrm>
-            <a:off x="502920" y="4965192"/>
+            <a:off x="502920" y="5001768"/>
             <a:ext cx="91440" cy="91440"/>
           </a:xfrm>
           <a:prstGeom prst="ellipse">
             <a:avLst/>
           </a:prstGeom>
           <a:solidFill>
-            <a:srgbClr val="4F46E5"/>
+            <a:srgbClr val="818CF8"/>
           </a:solidFill>
           <a:ln w="12700">
             <a:solidFill>
@@ -4546,31 +4625,31 @@
         </p:nvSpPr>
         <p:spPr>
           <a:xfrm>
-            <a:off x="685800" y="4901184"/>
-            <a:ext cx="5303520" cy="411480"/>
-          </a:xfrm>
-          <a:prstGeom prst="rect">
-            <a:avLst/>
-          </a:prstGeom>
-          <a:noFill/>
-          <a:ln/>
-        </p:spPr>
-        <p:txBody>
-          <a:bodyPr wrap="square" rtlCol="0" anchor="ctr"/>
-          <a:lstStyle/>
-          <a:p>
-            <a:pPr indent="0" marL="0">
-              <a:buNone/>
-            </a:pPr>
-            <a:r>
-              <a:rPr lang="en-US" sz="900" dirty="0">
-                <a:solidFill>
-                  <a:srgbClr val="94A3B8"/>
+            <a:off x="685800" y="4937760"/>
+            <a:ext cx="5303520" cy="420624"/>
+          </a:xfrm>
+          <a:prstGeom prst="rect">
+            <a:avLst/>
+          </a:prstGeom>
+          <a:noFill/>
+          <a:ln/>
+        </p:spPr>
+        <p:txBody>
+          <a:bodyPr wrap="square" rtlCol="0" anchor="ctr"/>
+          <a:lstStyle/>
+          <a:p>
+            <a:pPr indent="0" marL="0">
+              <a:buNone/>
+            </a:pPr>
+            <a:r>
+              <a:rPr lang="en-US" sz="950" dirty="0">
+                <a:solidFill>
+                  <a:srgbClr val="E2E8F0"/>
                 </a:solidFill>
               </a:rPr>
               <a:t>Real-time BI platforms deployed across 80+ retail locations in the Gulf region</a:t>
             </a:r>
-            <a:endParaRPr lang="en-US" sz="900" dirty="0"/>
+            <a:endParaRPr lang="en-US" sz="950" dirty="0"/>
           </a:p>
         </p:txBody>
       </p:sp>
@@ -4582,14 +4661,14 @@
         </p:nvSpPr>
         <p:spPr>
           <a:xfrm>
-            <a:off x="6185916" y="4965192"/>
+            <a:off x="6185916" y="5001768"/>
             <a:ext cx="91440" cy="91440"/>
           </a:xfrm>
           <a:prstGeom prst="ellipse">
             <a:avLst/>
           </a:prstGeom>
           <a:solidFill>
-            <a:srgbClr val="E11D48"/>
+            <a:srgbClr val="F87171"/>
           </a:solidFill>
           <a:ln w="12700">
             <a:solidFill>
@@ -4609,31 +4688,31 @@
         </p:nvSpPr>
         <p:spPr>
           <a:xfrm>
-            <a:off x="6368796" y="4901184"/>
-            <a:ext cx="5303520" cy="411480"/>
-          </a:xfrm>
-          <a:prstGeom prst="rect">
-            <a:avLst/>
-          </a:prstGeom>
-          <a:noFill/>
-          <a:ln/>
-        </p:spPr>
-        <p:txBody>
-          <a:bodyPr wrap="square" rtlCol="0" anchor="ctr"/>
-          <a:lstStyle/>
-          <a:p>
-            <a:pPr indent="0" marL="0">
-              <a:buNone/>
-            </a:pPr>
-            <a:r>
-              <a:rPr lang="en-US" sz="900" dirty="0">
-                <a:solidFill>
-                  <a:srgbClr val="94A3B8"/>
+            <a:off x="6368796" y="4937760"/>
+            <a:ext cx="5303520" cy="420624"/>
+          </a:xfrm>
+          <a:prstGeom prst="rect">
+            <a:avLst/>
+          </a:prstGeom>
+          <a:noFill/>
+          <a:ln/>
+        </p:spPr>
+        <p:txBody>
+          <a:bodyPr wrap="square" rtlCol="0" anchor="ctr"/>
+          <a:lstStyle/>
+          <a:p>
+            <a:pPr indent="0" marL="0">
+              <a:buNone/>
+            </a:pPr>
+            <a:r>
+              <a:rPr lang="en-US" sz="950" dirty="0">
+                <a:solidFill>
+                  <a:srgbClr val="E2E8F0"/>
                 </a:solidFill>
               </a:rPr>
               <a:t>AI-powered SaaS HR platform reaching 5,000 active users within 6 months of launch</a:t>
             </a:r>
-            <a:endParaRPr lang="en-US" sz="900" dirty="0"/>
+            <a:endParaRPr lang="en-US" sz="950" dirty="0"/>
           </a:p>
         </p:txBody>
       </p:sp>
@@ -4652,8 +4731,8 @@
             <a:avLst/>
           </a:prstGeom>
           <a:solidFill>
-            <a:srgbClr val="7C3AED">
-              <a:alpha val="30000"/>
+            <a:srgbClr val="3B0764">
+              <a:alpha val="60000"/>
             </a:srgbClr>
           </a:solidFill>
           <a:ln w="12700">
@@ -4691,14 +4770,14 @@
               <a:buNone/>
             </a:pPr>
             <a:r>
-              <a:rPr lang="en-US" sz="800" dirty="0">
-                <a:solidFill>
-                  <a:srgbClr val="A78BFA"/>
-                </a:solidFill>
-              </a:rPr>
-              <a:t>wethink.ae  ·  Abu Dhabi, UAE</a:t>
-            </a:r>
-            <a:endParaRPr lang="en-US" sz="800" dirty="0"/>
+              <a:rPr lang="en-US" sz="750" dirty="0">
+                <a:solidFill>
+                  <a:srgbClr val="C4B5FD"/>
+                </a:solidFill>
+              </a:rPr>
+              <a:t>WeThink Technology Consulting  ·  Abu Dhabi, UAE  ·  wethink.ae  ·  © 2025</a:t>
+            </a:r>
+            <a:endParaRPr lang="en-US" sz="750" dirty="0"/>
           </a:p>
         </p:txBody>
       </p:sp>
@@ -4926,7 +5005,7 @@
             <a:r>
               <a:rPr lang="en-US" sz="1100" i="1" dirty="0">
                 <a:solidFill>
-                  <a:srgbClr val="C4B5FD"/>
+                  <a:srgbClr val="E2E8F0"/>
                 </a:solidFill>
               </a:rPr>
               <a:t>We'd love to hear about your next project.</a:t>
@@ -4943,7 +5022,7 @@
         </p:nvSpPr>
         <p:spPr>
           <a:xfrm>
-            <a:off x="438912" y="4736592"/>
+            <a:off x="438912" y="4773168"/>
             <a:ext cx="4297680" cy="274320"/>
           </a:xfrm>
           <a:prstGeom prst="rect">
@@ -4962,7 +5041,7 @@
             <a:r>
               <a:rPr lang="en-US" sz="1000" dirty="0">
                 <a:solidFill>
-                  <a:srgbClr val="8B5CF6"/>
+                  <a:srgbClr val="D8B4FE"/>
                 </a:solidFill>
               </a:rPr>
               <a:t>Reach out and let's start a conversation.</a:t>
@@ -5034,7 +5113,7 @@
             <a:r>
               <a:rPr lang="en-US" sz="1300" b="1" dirty="0">
                 <a:solidFill>
-                  <a:srgbClr val="A78BFA"/>
+                  <a:srgbClr val="C4B5FD"/>
                 </a:solidFill>
               </a:rPr>
               <a:t>WeThink Technology Consulting</a:t>
@@ -5052,22 +5131,22 @@
         <p:spPr>
           <a:xfrm>
             <a:off x="5486400" y="1536192"/>
-            <a:ext cx="6199632" cy="713232"/>
+            <a:ext cx="6199632" cy="749808"/>
           </a:xfrm>
           <a:prstGeom prst="rect">
             <a:avLst>
-              <a:gd name="adj" fmla="val 11538"/>
+              <a:gd name="adj" fmla="val 10976"/>
             </a:avLst>
           </a:prstGeom>
           <a:solidFill>
             <a:srgbClr val="FFFFFF">
-              <a:alpha val="10000"/>
+              <a:alpha val="12000"/>
             </a:srgbClr>
           </a:solidFill>
           <a:ln w="12700">
             <a:solidFill>
-              <a:srgbClr val="7C3AED">
-                <a:alpha val="35000"/>
+              <a:srgbClr val="A78BFA">
+                <a:alpha val="45000"/>
               </a:srgbClr>
             </a:solidFill>
             <a:prstDash val="solid"/>
@@ -5083,13 +5162,13 @@
         <p:spPr>
           <a:xfrm>
             <a:off x="5486400" y="1536192"/>
-            <a:ext cx="36576" cy="713232"/>
-          </a:xfrm>
-          <a:prstGeom prst="rect">
-            <a:avLst/>
-          </a:prstGeom>
-          <a:solidFill>
-            <a:srgbClr val="7C3AED"/>
+            <a:ext cx="36576" cy="749808"/>
+          </a:xfrm>
+          <a:prstGeom prst="rect">
+            <a:avLst/>
+          </a:prstGeom>
+          <a:solidFill>
+            <a:srgbClr val="A78BFA"/>
           </a:solidFill>
           <a:ln w="12700">
             <a:solidFill>
@@ -5109,7 +5188,7 @@
         </p:nvSpPr>
         <p:spPr>
           <a:xfrm>
-            <a:off x="5632704" y="1618488"/>
+            <a:off x="5632704" y="1627632"/>
             <a:ext cx="5852160" cy="182880"/>
           </a:xfrm>
           <a:prstGeom prst="rect">
@@ -5128,7 +5207,7 @@
             <a:r>
               <a:rPr lang="en-US" sz="750" b="1" spc="150" kern="0" dirty="0">
                 <a:solidFill>
-                  <a:srgbClr val="7C3AED"/>
+                  <a:srgbClr val="D8B4FE"/>
                 </a:solidFill>
               </a:rPr>
               <a:t>WEBSITE</a:t>
@@ -5145,8 +5224,8 @@
         </p:nvSpPr>
         <p:spPr>
           <a:xfrm>
-            <a:off x="5632704" y="1828800"/>
-            <a:ext cx="5852160" cy="320040"/>
+            <a:off x="5632704" y="1847088"/>
+            <a:ext cx="5852160" cy="329184"/>
           </a:xfrm>
           <a:prstGeom prst="rect">
             <a:avLst/>
@@ -5181,23 +5260,23 @@
         </p:nvSpPr>
         <p:spPr>
           <a:xfrm>
-            <a:off x="5486400" y="2404872"/>
-            <a:ext cx="6199632" cy="713232"/>
+            <a:off x="5486400" y="2423160"/>
+            <a:ext cx="6199632" cy="749808"/>
           </a:xfrm>
           <a:prstGeom prst="rect">
             <a:avLst>
-              <a:gd name="adj" fmla="val 11538"/>
+              <a:gd name="adj" fmla="val 10976"/>
             </a:avLst>
           </a:prstGeom>
           <a:solidFill>
             <a:srgbClr val="FFFFFF">
-              <a:alpha val="10000"/>
+              <a:alpha val="12000"/>
             </a:srgbClr>
           </a:solidFill>
           <a:ln w="12700">
             <a:solidFill>
-              <a:srgbClr val="7C3AED">
-                <a:alpha val="35000"/>
+              <a:srgbClr val="A78BFA">
+                <a:alpha val="45000"/>
               </a:srgbClr>
             </a:solidFill>
             <a:prstDash val="solid"/>
@@ -5212,14 +5291,14 @@
         </p:nvSpPr>
         <p:spPr>
           <a:xfrm>
-            <a:off x="5486400" y="2404872"/>
-            <a:ext cx="36576" cy="713232"/>
-          </a:xfrm>
-          <a:prstGeom prst="rect">
-            <a:avLst/>
-          </a:prstGeom>
-          <a:solidFill>
-            <a:srgbClr val="7C3AED"/>
+            <a:off x="5486400" y="2423160"/>
+            <a:ext cx="36576" cy="749808"/>
+          </a:xfrm>
+          <a:prstGeom prst="rect">
+            <a:avLst/>
+          </a:prstGeom>
+          <a:solidFill>
+            <a:srgbClr val="A78BFA"/>
           </a:solidFill>
           <a:ln w="12700">
             <a:solidFill>
@@ -5239,7 +5318,7 @@
         </p:nvSpPr>
         <p:spPr>
           <a:xfrm>
-            <a:off x="5632704" y="2487168"/>
+            <a:off x="5632704" y="2514600"/>
             <a:ext cx="5852160" cy="182880"/>
           </a:xfrm>
           <a:prstGeom prst="rect">
@@ -5258,7 +5337,7 @@
             <a:r>
               <a:rPr lang="en-US" sz="750" b="1" spc="150" kern="0" dirty="0">
                 <a:solidFill>
-                  <a:srgbClr val="7C3AED"/>
+                  <a:srgbClr val="D8B4FE"/>
                 </a:solidFill>
               </a:rPr>
               <a:t>EMAIL</a:t>
@@ -5275,8 +5354,8 @@
         </p:nvSpPr>
         <p:spPr>
           <a:xfrm>
-            <a:off x="5632704" y="2697480"/>
-            <a:ext cx="5852160" cy="320040"/>
+            <a:off x="5632704" y="2734056"/>
+            <a:ext cx="5852160" cy="329184"/>
           </a:xfrm>
           <a:prstGeom prst="rect">
             <a:avLst/>
@@ -5311,23 +5390,23 @@
         </p:nvSpPr>
         <p:spPr>
           <a:xfrm>
-            <a:off x="5486400" y="3273552"/>
-            <a:ext cx="6199632" cy="713232"/>
+            <a:off x="5486400" y="3310128"/>
+            <a:ext cx="6199632" cy="749808"/>
           </a:xfrm>
           <a:prstGeom prst="rect">
             <a:avLst>
-              <a:gd name="adj" fmla="val 11538"/>
+              <a:gd name="adj" fmla="val 10976"/>
             </a:avLst>
           </a:prstGeom>
           <a:solidFill>
             <a:srgbClr val="FFFFFF">
-              <a:alpha val="10000"/>
+              <a:alpha val="12000"/>
             </a:srgbClr>
           </a:solidFill>
           <a:ln w="12700">
             <a:solidFill>
-              <a:srgbClr val="7C3AED">
-                <a:alpha val="35000"/>
+              <a:srgbClr val="A78BFA">
+                <a:alpha val="45000"/>
               </a:srgbClr>
             </a:solidFill>
             <a:prstDash val="solid"/>
@@ -5342,14 +5421,14 @@
         </p:nvSpPr>
         <p:spPr>
           <a:xfrm>
-            <a:off x="5486400" y="3273552"/>
-            <a:ext cx="36576" cy="713232"/>
-          </a:xfrm>
-          <a:prstGeom prst="rect">
-            <a:avLst/>
-          </a:prstGeom>
-          <a:solidFill>
-            <a:srgbClr val="7C3AED"/>
+            <a:off x="5486400" y="3310128"/>
+            <a:ext cx="36576" cy="749808"/>
+          </a:xfrm>
+          <a:prstGeom prst="rect">
+            <a:avLst/>
+          </a:prstGeom>
+          <a:solidFill>
+            <a:srgbClr val="A78BFA"/>
           </a:solidFill>
           <a:ln w="12700">
             <a:solidFill>
@@ -5369,7 +5448,7 @@
         </p:nvSpPr>
         <p:spPr>
           <a:xfrm>
-            <a:off x="5632704" y="3355848"/>
+            <a:off x="5632704" y="3401568"/>
             <a:ext cx="5852160" cy="182880"/>
           </a:xfrm>
           <a:prstGeom prst="rect">
@@ -5388,7 +5467,7 @@
             <a:r>
               <a:rPr lang="en-US" sz="750" b="1" spc="150" kern="0" dirty="0">
                 <a:solidFill>
-                  <a:srgbClr val="7C3AED"/>
+                  <a:srgbClr val="D8B4FE"/>
                 </a:solidFill>
               </a:rPr>
               <a:t>LOCATION</a:t>
@@ -5405,8 +5484,8 @@
         </p:nvSpPr>
         <p:spPr>
           <a:xfrm>
-            <a:off x="5632704" y="3566160"/>
-            <a:ext cx="5852160" cy="320040"/>
+            <a:off x="5632704" y="3621024"/>
+            <a:ext cx="5852160" cy="329184"/>
           </a:xfrm>
           <a:prstGeom prst="rect">
             <a:avLst/>
@@ -5441,23 +5520,23 @@
         </p:nvSpPr>
         <p:spPr>
           <a:xfrm>
-            <a:off x="5486400" y="4142232"/>
-            <a:ext cx="6199632" cy="713232"/>
+            <a:off x="5486400" y="4197096"/>
+            <a:ext cx="6199632" cy="749808"/>
           </a:xfrm>
           <a:prstGeom prst="rect">
             <a:avLst>
-              <a:gd name="adj" fmla="val 11538"/>
+              <a:gd name="adj" fmla="val 10976"/>
             </a:avLst>
           </a:prstGeom>
           <a:solidFill>
             <a:srgbClr val="FFFFFF">
-              <a:alpha val="10000"/>
+              <a:alpha val="12000"/>
             </a:srgbClr>
           </a:solidFill>
           <a:ln w="12700">
             <a:solidFill>
-              <a:srgbClr val="7C3AED">
-                <a:alpha val="35000"/>
+              <a:srgbClr val="A78BFA">
+                <a:alpha val="45000"/>
               </a:srgbClr>
             </a:solidFill>
             <a:prstDash val="solid"/>
@@ -5472,14 +5551,14 @@
         </p:nvSpPr>
         <p:spPr>
           <a:xfrm>
-            <a:off x="5486400" y="4142232"/>
-            <a:ext cx="36576" cy="713232"/>
-          </a:xfrm>
-          <a:prstGeom prst="rect">
-            <a:avLst/>
-          </a:prstGeom>
-          <a:solidFill>
-            <a:srgbClr val="7C3AED"/>
+            <a:off x="5486400" y="4197096"/>
+            <a:ext cx="36576" cy="749808"/>
+          </a:xfrm>
+          <a:prstGeom prst="rect">
+            <a:avLst/>
+          </a:prstGeom>
+          <a:solidFill>
+            <a:srgbClr val="A78BFA"/>
           </a:solidFill>
           <a:ln w="12700">
             <a:solidFill>
@@ -5499,7 +5578,7 @@
         </p:nvSpPr>
         <p:spPr>
           <a:xfrm>
-            <a:off x="5632704" y="4224528"/>
+            <a:off x="5632704" y="4288536"/>
             <a:ext cx="5852160" cy="182880"/>
           </a:xfrm>
           <a:prstGeom prst="rect">
@@ -5518,7 +5597,7 @@
             <a:r>
               <a:rPr lang="en-US" sz="750" b="1" spc="150" kern="0" dirty="0">
                 <a:solidFill>
-                  <a:srgbClr val="7C3AED"/>
+                  <a:srgbClr val="D8B4FE"/>
                 </a:solidFill>
               </a:rPr>
               <a:t>ESTABLISHED</a:t>
@@ -5535,8 +5614,8 @@
         </p:nvSpPr>
         <p:spPr>
           <a:xfrm>
-            <a:off x="5632704" y="4434840"/>
-            <a:ext cx="5852160" cy="320040"/>
+            <a:off x="5632704" y="4507992"/>
+            <a:ext cx="5852160" cy="329184"/>
           </a:xfrm>
           <a:prstGeom prst="rect">
             <a:avLst/>
@@ -5571,7 +5650,7 @@
         </p:nvSpPr>
         <p:spPr>
           <a:xfrm>
-            <a:off x="5486400" y="5175504"/>
+            <a:off x="5486400" y="5230368"/>
             <a:ext cx="914400" cy="201168"/>
           </a:xfrm>
           <a:prstGeom prst="rect">
@@ -5590,7 +5669,7 @@
             <a:r>
               <a:rPr lang="en-US" sz="750" b="1" spc="150" kern="0" dirty="0">
                 <a:solidFill>
-                  <a:srgbClr val="8B5CF6"/>
+                  <a:srgbClr val="A78BFA"/>
                 </a:solidFill>
               </a:rPr>
               <a:t>SERVICES</a:t>
@@ -5607,8 +5686,8 @@
         </p:nvSpPr>
         <p:spPr>
           <a:xfrm>
-            <a:off x="6510528" y="5175504"/>
-            <a:ext cx="5175504" cy="201168"/>
+            <a:off x="6492240" y="5230368"/>
+            <a:ext cx="5193792" cy="201168"/>
           </a:xfrm>
           <a:prstGeom prst="rect">
             <a:avLst/>
@@ -5626,7 +5705,7 @@
             <a:r>
               <a:rPr lang="en-US" sz="850" dirty="0">
                 <a:solidFill>
-                  <a:srgbClr val="94A3B8"/>
+                  <a:srgbClr val="CBD5E1"/>
                 </a:solidFill>
               </a:rPr>
               <a:t>IT Consulting  ·  Cloud Strategy  ·  Cybersecurity  ·  Custom Software  ·  Data Analytics  ·  Digital Transformation</a:t>
@@ -5643,7 +5722,7 @@
         </p:nvSpPr>
         <p:spPr>
           <a:xfrm>
-            <a:off x="5486400" y="5559552"/>
+            <a:off x="5486400" y="5614416"/>
             <a:ext cx="2926080" cy="548640"/>
           </a:xfrm>
           <a:prstGeom prst="rect">
@@ -5669,7 +5748,7 @@
         </p:nvSpPr>
         <p:spPr>
           <a:xfrm>
-            <a:off x="5486400" y="5559552"/>
+            <a:off x="5486400" y="5614416"/>
             <a:ext cx="2926080" cy="548640"/>
           </a:xfrm>
           <a:prstGeom prst="rect">
@@ -5712,8 +5791,8 @@
             <a:avLst/>
           </a:prstGeom>
           <a:solidFill>
-            <a:srgbClr val="7C3AED">
-              <a:alpha val="35000"/>
+            <a:srgbClr val="3B0764">
+              <a:alpha val="60000"/>
             </a:srgbClr>
           </a:solidFill>
           <a:ln w="12700">
@@ -5751,14 +5830,14 @@
               <a:buNone/>
             </a:pPr>
             <a:r>
-              <a:rPr lang="en-US" sz="800" dirty="0">
-                <a:solidFill>
-                  <a:srgbClr val="A78BFA"/>
+              <a:rPr lang="en-US" sz="750" dirty="0">
+                <a:solidFill>
+                  <a:srgbClr val="C4B5FD"/>
                 </a:solidFill>
               </a:rPr>
               <a:t>WeThink Technology Consulting  ·  Abu Dhabi, UAE  ·  wethink.ae  ·  © 2025</a:t>
             </a:r>
-            <a:endParaRPr lang="en-US" sz="800" dirty="0"/>
+            <a:endParaRPr lang="en-US" sz="750" dirty="0"/>
           </a:p>
         </p:txBody>
       </p:sp>
@@ -5921,7 +6000,7 @@
             <a:r>
               <a:rPr lang="en-US" sz="3000" b="1" dirty="0">
                 <a:solidFill>
-                  <a:srgbClr val="1A0A2E"/>
+                  <a:srgbClr val="111827"/>
                 </a:solidFill>
               </a:rPr>
               <a:t>Who We Are</a:t>
@@ -5957,7 +6036,7 @@
             <a:r>
               <a:rPr lang="en-US" sz="1000" dirty="0">
                 <a:solidFill>
-                  <a:srgbClr val="64748B"/>
+                  <a:srgbClr val="4B5563"/>
                 </a:solidFill>
               </a:rPr>
               <a:t>Founded in Abu Dhabi in 2019, WeThink is a technology consulting firm built for the ambitions of UAE and Gulf enterprises.</a:t>
@@ -5996,7 +6075,7 @@
             <a:r>
               <a:rPr lang="en-US" sz="1100" dirty="0">
                 <a:solidFill>
-                  <a:srgbClr val="64748B"/>
+                  <a:srgbClr val="1F2937"/>
                 </a:solidFill>
               </a:rPr>
               <a:t>We combine deep technical expertise with strategic advisory — delivering transformation programmes that create measurable, lasting impact.</a:t>
@@ -6022,7 +6101,7 @@
             <a:r>
               <a:rPr lang="en-US" sz="1100" dirty="0">
                 <a:solidFill>
-                  <a:srgbClr val="64748B"/>
+                  <a:srgbClr val="1F2937"/>
                 </a:solidFill>
               </a:rPr>
               <a:t>Our multidisciplinary team of engineers, architects, and consultants operates across government, financial services, energy, education, and retail sectors across the UAE and Gulf region.</a:t>
@@ -6048,7 +6127,7 @@
             <a:r>
               <a:rPr lang="en-US" sz="1100" dirty="0">
                 <a:solidFill>
-                  <a:srgbClr val="64748B"/>
+                  <a:srgbClr val="1F2937"/>
                 </a:solidFill>
               </a:rPr>
               <a:t>We speak the language of business and the language of technology — and we bridge the gap between the two.</a:t>
@@ -6081,7 +6160,7 @@
           <a:ln w="12700">
             <a:solidFill>
               <a:srgbClr val="7C3AED">
-                <a:alpha val="35000"/>
+                <a:alpha val="40000"/>
               </a:srgbClr>
             </a:solidFill>
             <a:prstDash val="solid"/>
@@ -6178,7 +6257,7 @@
             <a:r>
               <a:rPr lang="en-US" sz="1050" dirty="0">
                 <a:solidFill>
-                  <a:srgbClr val="1A0A2E"/>
+                  <a:srgbClr val="111827"/>
                 </a:solidFill>
               </a:rPr>
               <a:t>2019</a:t>
@@ -6211,7 +6290,7 @@
           <a:ln w="12700">
             <a:solidFill>
               <a:srgbClr val="4F46E5">
-                <a:alpha val="35000"/>
+                <a:alpha val="40000"/>
               </a:srgbClr>
             </a:solidFill>
             <a:prstDash val="solid"/>
@@ -6308,7 +6387,7 @@
             <a:r>
               <a:rPr lang="en-US" sz="1050" dirty="0">
                 <a:solidFill>
-                  <a:srgbClr val="1A0A2E"/>
+                  <a:srgbClr val="111827"/>
                 </a:solidFill>
               </a:rPr>
               <a:t>Abu Dhabi, UAE</a:t>
@@ -6341,7 +6420,7 @@
           <a:ln w="12700">
             <a:solidFill>
               <a:srgbClr val="0EA5E9">
-                <a:alpha val="35000"/>
+                <a:alpha val="40000"/>
               </a:srgbClr>
             </a:solidFill>
             <a:prstDash val="solid"/>
@@ -6438,7 +6517,7 @@
             <a:r>
               <a:rPr lang="en-US" sz="1050" dirty="0">
                 <a:solidFill>
-                  <a:srgbClr val="1A0A2E"/>
+                  <a:srgbClr val="111827"/>
                 </a:solidFill>
               </a:rPr>
               <a:t>Government · Finance · Energy · Education · Retail</a:t>
@@ -6471,7 +6550,7 @@
           <a:ln w="12700">
             <a:solidFill>
               <a:srgbClr val="059669">
-                <a:alpha val="35000"/>
+                <a:alpha val="40000"/>
               </a:srgbClr>
             </a:solidFill>
             <a:prstDash val="solid"/>
@@ -6568,7 +6647,7 @@
             <a:r>
               <a:rPr lang="en-US" sz="1050" dirty="0">
                 <a:solidFill>
-                  <a:srgbClr val="1A0A2E"/>
+                  <a:srgbClr val="111827"/>
                 </a:solidFill>
               </a:rPr>
               <a:t>Strategy · Build · Operate · Optimise</a:t>
@@ -6622,13 +6701,13 @@
           </a:prstGeom>
           <a:solidFill>
             <a:srgbClr val="7C3AED">
-              <a:alpha val="7000"/>
+              <a:alpha val="8000"/>
             </a:srgbClr>
           </a:solidFill>
           <a:ln w="12700">
             <a:solidFill>
               <a:srgbClr val="7C3AED">
-                <a:alpha val="28000"/>
+                <a:alpha val="32000"/>
               </a:srgbClr>
             </a:solidFill>
             <a:prstDash val="solid"/>
@@ -6643,8 +6722,8 @@
         </p:nvSpPr>
         <p:spPr>
           <a:xfrm>
-            <a:off x="594360" y="4133088"/>
-            <a:ext cx="457200" cy="548640"/>
+            <a:off x="594360" y="4114800"/>
+            <a:ext cx="457200" cy="594360"/>
           </a:xfrm>
           <a:prstGeom prst="rect">
             <a:avLst/>
@@ -6662,8 +6741,8 @@
             <a:r>
               <a:rPr lang="en-US" sz="5200" b="1" dirty="0">
                 <a:solidFill>
-                  <a:srgbClr val="7C3AED">
-                    <a:alpha val="65000"/>
+                  <a:srgbClr val="5B21B6">
+                    <a:alpha val="70000"/>
                   </a:srgbClr>
                 </a:solidFill>
               </a:rPr>
@@ -6703,7 +6782,7 @@
             <a:r>
               <a:rPr lang="en-US" sz="1050" i="1" dirty="0">
                 <a:solidFill>
-                  <a:srgbClr val="1A0A2E"/>
+                  <a:srgbClr val="111827"/>
                 </a:solidFill>
               </a:rPr>
               <a:t>"WeThink transformed our entire IT infrastructure in under 6 months. The team's depth of knowledge and project discipline is unlike anything we've experienced before."</a:t>
@@ -6739,7 +6818,7 @@
             <a:r>
               <a:rPr lang="en-US" sz="900" b="1" dirty="0">
                 <a:solidFill>
-                  <a:srgbClr val="7C3AED"/>
+                  <a:srgbClr val="5B21B6"/>
                 </a:solidFill>
               </a:rPr>
               <a:t>Ahmed Al Mansoori  ·  CTO, Abu Dhabi National Energy</a:t>
@@ -6802,9 +6881,9 @@
               <a:buNone/>
             </a:pPr>
             <a:r>
-              <a:rPr lang="en-US" sz="750" dirty="0">
-                <a:solidFill>
-                  <a:srgbClr val="7C3AED"/>
+              <a:rPr lang="en-US" sz="750" b="1" dirty="0">
+                <a:solidFill>
+                  <a:srgbClr val="5B21B6"/>
                 </a:solidFill>
               </a:rPr>
               <a:t>WeThink Technology Consulting  ·  Abu Dhabi, UAE  ·  wethink.ae  ·  © 2025</a:t>
@@ -6972,7 +7051,7 @@
             <a:r>
               <a:rPr lang="en-US" sz="3000" b="1" dirty="0">
                 <a:solidFill>
-                  <a:srgbClr val="1A0A2E"/>
+                  <a:srgbClr val="111827"/>
                 </a:solidFill>
               </a:rPr>
               <a:t>Mission, Vision &amp; Values</a:t>
@@ -6990,22 +7069,22 @@
         <p:spPr>
           <a:xfrm>
             <a:off x="502920" y="1261872"/>
-            <a:ext cx="5367894" cy="1298448"/>
+            <a:ext cx="5367894" cy="1316736"/>
           </a:xfrm>
           <a:prstGeom prst="rect">
             <a:avLst>
-              <a:gd name="adj" fmla="val 7042"/>
+              <a:gd name="adj" fmla="val 6944"/>
             </a:avLst>
           </a:prstGeom>
           <a:solidFill>
             <a:srgbClr val="7C3AED">
-              <a:alpha val="9000"/>
+              <a:alpha val="10000"/>
             </a:srgbClr>
           </a:solidFill>
           <a:ln w="12700">
             <a:solidFill>
               <a:srgbClr val="7C3AED">
-                <a:alpha val="35000"/>
+                <a:alpha val="40000"/>
               </a:srgbClr>
             </a:solidFill>
             <a:prstDash val="solid"/>
@@ -7039,7 +7118,7 @@
             <a:r>
               <a:rPr lang="en-US" sz="800" b="1" spc="200" kern="0" dirty="0">
                 <a:solidFill>
-                  <a:srgbClr val="7C3AED"/>
+                  <a:srgbClr val="5B21B6"/>
                 </a:solidFill>
               </a:rPr>
               <a:t>MISSION</a:t>
@@ -7057,7 +7136,7 @@
         <p:spPr>
           <a:xfrm>
             <a:off x="685800" y="1591056"/>
-            <a:ext cx="5093574" cy="804672"/>
+            <a:ext cx="5093574" cy="822960"/>
           </a:xfrm>
           <a:prstGeom prst="rect">
             <a:avLst/>
@@ -7078,7 +7157,7 @@
             <a:r>
               <a:rPr lang="en-US" sz="1050" i="1" dirty="0">
                 <a:solidFill>
-                  <a:srgbClr val="1A0A2E"/>
+                  <a:srgbClr val="111827"/>
                 </a:solidFill>
               </a:rPr>
               <a:t>To empower UAE and Gulf organisations with technology strategies and solutions that create lasting competitive advantage — delivered with clarity, speed, and integrity.</a:t>
@@ -7096,22 +7175,22 @@
         <p:spPr>
           <a:xfrm>
             <a:off x="6318138" y="1261872"/>
-            <a:ext cx="5367894" cy="1298448"/>
+            <a:ext cx="5367894" cy="1316736"/>
           </a:xfrm>
           <a:prstGeom prst="rect">
             <a:avLst>
-              <a:gd name="adj" fmla="val 7042"/>
+              <a:gd name="adj" fmla="val 6944"/>
             </a:avLst>
           </a:prstGeom>
           <a:solidFill>
             <a:srgbClr val="4F46E5">
-              <a:alpha val="9000"/>
+              <a:alpha val="10000"/>
             </a:srgbClr>
           </a:solidFill>
           <a:ln w="12700">
             <a:solidFill>
               <a:srgbClr val="4F46E5">
-                <a:alpha val="35000"/>
+                <a:alpha val="40000"/>
               </a:srgbClr>
             </a:solidFill>
             <a:prstDash val="solid"/>
@@ -7163,7 +7242,7 @@
         <p:spPr>
           <a:xfrm>
             <a:off x="6501018" y="1591056"/>
-            <a:ext cx="5093574" cy="804672"/>
+            <a:ext cx="5093574" cy="822960"/>
           </a:xfrm>
           <a:prstGeom prst="rect">
             <a:avLst/>
@@ -7184,7 +7263,7 @@
             <a:r>
               <a:rPr lang="en-US" sz="1050" i="1" dirty="0">
                 <a:solidFill>
-                  <a:srgbClr val="1A0A2E"/>
+                  <a:srgbClr val="111827"/>
                 </a:solidFill>
               </a:rPr>
               <a:t>To be the most trusted technology partner for enterprises across the Middle East — known for transformative outcomes, not just deliverables.</a:t>
@@ -7201,7 +7280,7 @@
         </p:nvSpPr>
         <p:spPr>
           <a:xfrm>
-            <a:off x="502920" y="2706624"/>
+            <a:off x="502920" y="2724912"/>
             <a:ext cx="11183112" cy="320040"/>
           </a:xfrm>
           <a:prstGeom prst="rect">
@@ -7220,7 +7299,7 @@
             <a:r>
               <a:rPr lang="en-US" sz="1700" b="1" dirty="0">
                 <a:solidFill>
-                  <a:srgbClr val="1A0A2E"/>
+                  <a:srgbClr val="111827"/>
                 </a:solidFill>
               </a:rPr>
               <a:t>Our Core Values</a:t>
@@ -7237,7 +7316,7 @@
         </p:nvSpPr>
         <p:spPr>
           <a:xfrm>
-            <a:off x="502920" y="3090672"/>
+            <a:off x="502920" y="3108960"/>
             <a:ext cx="5522976" cy="1298448"/>
           </a:xfrm>
           <a:prstGeom prst="rect">
@@ -7271,7 +7350,7 @@
         </p:nvSpPr>
         <p:spPr>
           <a:xfrm>
-            <a:off x="502920" y="3090672"/>
+            <a:off x="502920" y="3108960"/>
             <a:ext cx="41148" cy="1298448"/>
           </a:xfrm>
           <a:prstGeom prst="rect">
@@ -7298,7 +7377,7 @@
         </p:nvSpPr>
         <p:spPr>
           <a:xfrm>
-            <a:off x="667512" y="3218688"/>
+            <a:off x="667512" y="3236976"/>
             <a:ext cx="5266944" cy="256032"/>
           </a:xfrm>
           <a:prstGeom prst="rect">
@@ -7317,7 +7396,7 @@
             <a:r>
               <a:rPr lang="en-US" sz="1150" b="1" dirty="0">
                 <a:solidFill>
-                  <a:srgbClr val="1A0A2E"/>
+                  <a:srgbClr val="111827"/>
                 </a:solidFill>
               </a:rPr>
               <a:t>Client-First Delivery</a:t>
@@ -7334,7 +7413,7 @@
         </p:nvSpPr>
         <p:spPr>
           <a:xfrm>
-            <a:off x="667512" y="3493008"/>
+            <a:off x="667512" y="3511296"/>
             <a:ext cx="5266944" cy="795528"/>
           </a:xfrm>
           <a:prstGeom prst="rect">
@@ -7356,7 +7435,7 @@
             <a:r>
               <a:rPr lang="en-US" sz="950" dirty="0">
                 <a:solidFill>
-                  <a:srgbClr val="64748B"/>
+                  <a:srgbClr val="1F2937"/>
                 </a:solidFill>
               </a:rPr>
               <a:t>Every engagement is shaped around your goals, timeline, and definition of success — not ours.</a:t>
@@ -7373,7 +7452,7 @@
         </p:nvSpPr>
         <p:spPr>
           <a:xfrm>
-            <a:off x="6163056" y="3090672"/>
+            <a:off x="6163056" y="3108960"/>
             <a:ext cx="5522976" cy="1298448"/>
           </a:xfrm>
           <a:prstGeom prst="rect">
@@ -7407,7 +7486,7 @@
         </p:nvSpPr>
         <p:spPr>
           <a:xfrm>
-            <a:off x="6163056" y="3090672"/>
+            <a:off x="6163056" y="3108960"/>
             <a:ext cx="41148" cy="1298448"/>
           </a:xfrm>
           <a:prstGeom prst="rect">
@@ -7434,7 +7513,7 @@
         </p:nvSpPr>
         <p:spPr>
           <a:xfrm>
-            <a:off x="6327648" y="3218688"/>
+            <a:off x="6327648" y="3236976"/>
             <a:ext cx="5266944" cy="256032"/>
           </a:xfrm>
           <a:prstGeom prst="rect">
@@ -7453,7 +7532,7 @@
             <a:r>
               <a:rPr lang="en-US" sz="1150" b="1" dirty="0">
                 <a:solidFill>
-                  <a:srgbClr val="1A0A2E"/>
+                  <a:srgbClr val="111827"/>
                 </a:solidFill>
               </a:rPr>
               <a:t>Technical Excellence</a:t>
@@ -7470,7 +7549,7 @@
         </p:nvSpPr>
         <p:spPr>
           <a:xfrm>
-            <a:off x="6327648" y="3493008"/>
+            <a:off x="6327648" y="3511296"/>
             <a:ext cx="5266944" cy="795528"/>
           </a:xfrm>
           <a:prstGeom prst="rect">
@@ -7492,7 +7571,7 @@
             <a:r>
               <a:rPr lang="en-US" sz="950" dirty="0">
                 <a:solidFill>
-                  <a:srgbClr val="64748B"/>
+                  <a:srgbClr val="1F2937"/>
                 </a:solidFill>
               </a:rPr>
               <a:t>We hire specialists, not generalists, and hold every deliverable to the highest engineering standards.</a:t>
@@ -7509,7 +7588,7 @@
         </p:nvSpPr>
         <p:spPr>
           <a:xfrm>
-            <a:off x="502920" y="4517136"/>
+            <a:off x="502920" y="4535424"/>
             <a:ext cx="5522976" cy="1298448"/>
           </a:xfrm>
           <a:prstGeom prst="rect">
@@ -7543,7 +7622,7 @@
         </p:nvSpPr>
         <p:spPr>
           <a:xfrm>
-            <a:off x="502920" y="4517136"/>
+            <a:off x="502920" y="4535424"/>
             <a:ext cx="41148" cy="1298448"/>
           </a:xfrm>
           <a:prstGeom prst="rect">
@@ -7570,7 +7649,7 @@
         </p:nvSpPr>
         <p:spPr>
           <a:xfrm>
-            <a:off x="667512" y="4645152"/>
+            <a:off x="667512" y="4663440"/>
             <a:ext cx="5266944" cy="256032"/>
           </a:xfrm>
           <a:prstGeom prst="rect">
@@ -7589,7 +7668,7 @@
             <a:r>
               <a:rPr lang="en-US" sz="1150" b="1" dirty="0">
                 <a:solidFill>
-                  <a:srgbClr val="1A0A2E"/>
+                  <a:srgbClr val="111827"/>
                 </a:solidFill>
               </a:rPr>
               <a:t>Transparent Partnership</a:t>
@@ -7606,7 +7685,7 @@
         </p:nvSpPr>
         <p:spPr>
           <a:xfrm>
-            <a:off x="667512" y="4919472"/>
+            <a:off x="667512" y="4937760"/>
             <a:ext cx="5266944" cy="795528"/>
           </a:xfrm>
           <a:prstGeom prst="rect">
@@ -7628,7 +7707,7 @@
             <a:r>
               <a:rPr lang="en-US" sz="950" dirty="0">
                 <a:solidFill>
-                  <a:srgbClr val="64748B"/>
+                  <a:srgbClr val="1F2937"/>
                 </a:solidFill>
               </a:rPr>
               <a:t>Clear communication, honest assessments, and no surprises — we are your trusted advisor, not a vendor.</a:t>
@@ -7645,7 +7724,7 @@
         </p:nvSpPr>
         <p:spPr>
           <a:xfrm>
-            <a:off x="6163056" y="4517136"/>
+            <a:off x="6163056" y="4535424"/>
             <a:ext cx="5522976" cy="1298448"/>
           </a:xfrm>
           <a:prstGeom prst="rect">
@@ -7679,7 +7758,7 @@
         </p:nvSpPr>
         <p:spPr>
           <a:xfrm>
-            <a:off x="6163056" y="4517136"/>
+            <a:off x="6163056" y="4535424"/>
             <a:ext cx="41148" cy="1298448"/>
           </a:xfrm>
           <a:prstGeom prst="rect">
@@ -7706,7 +7785,7 @@
         </p:nvSpPr>
         <p:spPr>
           <a:xfrm>
-            <a:off x="6327648" y="4645152"/>
+            <a:off x="6327648" y="4663440"/>
             <a:ext cx="5266944" cy="256032"/>
           </a:xfrm>
           <a:prstGeom prst="rect">
@@ -7725,7 +7804,7 @@
             <a:r>
               <a:rPr lang="en-US" sz="1150" b="1" dirty="0">
                 <a:solidFill>
-                  <a:srgbClr val="1A0A2E"/>
+                  <a:srgbClr val="111827"/>
                 </a:solidFill>
               </a:rPr>
               <a:t>UAE-Rooted Expertise</a:t>
@@ -7742,7 +7821,7 @@
         </p:nvSpPr>
         <p:spPr>
           <a:xfrm>
-            <a:off x="6327648" y="4919472"/>
+            <a:off x="6327648" y="4937760"/>
             <a:ext cx="5266944" cy="795528"/>
           </a:xfrm>
           <a:prstGeom prst="rect">
@@ -7764,7 +7843,7 @@
             <a:r>
               <a:rPr lang="en-US" sz="950" dirty="0">
                 <a:solidFill>
-                  <a:srgbClr val="64748B"/>
+                  <a:srgbClr val="1F2937"/>
                 </a:solidFill>
               </a:rPr>
               <a:t>Deep knowledge of local regulations, Vision 2031 priorities, and Gulf market dynamics applied to global best practice.</a:t>
@@ -7827,9 +7906,9 @@
               <a:buNone/>
             </a:pPr>
             <a:r>
-              <a:rPr lang="en-US" sz="750" dirty="0">
-                <a:solidFill>
-                  <a:srgbClr val="7C3AED"/>
+              <a:rPr lang="en-US" sz="750" b="1" dirty="0">
+                <a:solidFill>
+                  <a:srgbClr val="5B21B6"/>
                 </a:solidFill>
               </a:rPr>
               <a:t>WeThink Technology Consulting  ·  Abu Dhabi, UAE  ·  wethink.ae  ·  © 2025</a:t>
@@ -7964,7 +8043,7 @@
                   <a:srgbClr val="7C3AED"/>
                 </a:solidFill>
               </a:rPr>
-              <a:t>SERVICES  1/2</a:t>
+              <a:t>SERVICES  1 OF 2</a:t>
             </a:r>
             <a:endParaRPr lang="en-US" sz="750" dirty="0"/>
           </a:p>
@@ -7997,7 +8076,7 @@
             <a:r>
               <a:rPr lang="en-US" sz="3000" b="1" dirty="0">
                 <a:solidFill>
-                  <a:srgbClr val="1A0A2E"/>
+                  <a:srgbClr val="111827"/>
                 </a:solidFill>
               </a:rPr>
               <a:t>Our Services</a:t>
@@ -8033,7 +8112,7 @@
             <a:r>
               <a:rPr lang="en-US" sz="1000" dirty="0">
                 <a:solidFill>
-                  <a:srgbClr val="64748B"/>
+                  <a:srgbClr val="4B5563"/>
                 </a:solidFill>
               </a:rPr>
               <a:t>End-to-end technology services — from strategy and consulting through to build and managed operations.</a:t>
@@ -8060,13 +8139,13 @@
           </a:prstGeom>
           <a:solidFill>
             <a:srgbClr val="7C3AED">
-              <a:alpha val="7000"/>
+              <a:alpha val="8000"/>
             </a:srgbClr>
           </a:solidFill>
           <a:ln w="12700">
             <a:solidFill>
               <a:srgbClr val="7C3AED">
-                <a:alpha val="32000"/>
+                <a:alpha val="38000"/>
               </a:srgbClr>
             </a:solidFill>
             <a:prstDash val="solid"/>
@@ -8109,7 +8188,7 @@
         <p:spPr>
           <a:xfrm>
             <a:off x="5431536" y="1353312"/>
-            <a:ext cx="548640" cy="457200"/>
+            <a:ext cx="548640" cy="475488"/>
           </a:xfrm>
           <a:prstGeom prst="rect">
             <a:avLst/>
@@ -8128,7 +8207,7 @@
               <a:rPr lang="en-US" sz="3200" b="1" dirty="0">
                 <a:solidFill>
                   <a:srgbClr val="7C3AED">
-                    <a:alpha val="18000"/>
+                    <a:alpha val="25000"/>
                   </a:srgbClr>
                 </a:solidFill>
               </a:rPr>
@@ -8146,8 +8225,8 @@
         </p:nvSpPr>
         <p:spPr>
           <a:xfrm>
-            <a:off x="685800" y="1435608"/>
-            <a:ext cx="4791456" cy="329184"/>
+            <a:off x="685800" y="1426464"/>
+            <a:ext cx="4791456" cy="347472"/>
           </a:xfrm>
           <a:prstGeom prst="rect">
             <a:avLst/>
@@ -8165,7 +8244,7 @@
             <a:r>
               <a:rPr lang="en-US" sz="1400" b="1" dirty="0">
                 <a:solidFill>
-                  <a:srgbClr val="1A0A2E"/>
+                  <a:srgbClr val="111827"/>
                 </a:solidFill>
               </a:rPr>
               <a:t>Digital Transformation</a:t>
@@ -8182,8 +8261,8 @@
         </p:nvSpPr>
         <p:spPr>
           <a:xfrm>
-            <a:off x="685800" y="1801368"/>
-            <a:ext cx="5248656" cy="1024128"/>
+            <a:off x="685800" y="1810512"/>
+            <a:ext cx="5248656" cy="1005840"/>
           </a:xfrm>
           <a:prstGeom prst="rect">
             <a:avLst/>
@@ -8204,7 +8283,7 @@
             <a:r>
               <a:rPr lang="en-US" sz="950" dirty="0">
                 <a:solidFill>
-                  <a:srgbClr val="64748B"/>
+                  <a:srgbClr val="1F2937"/>
                 </a:solidFill>
               </a:rPr>
               <a:t>End-to-end overhaul of your business processes, culture, and technology stack — aligned with UAE Vision 2031 and global best practices.</a:t>
@@ -8238,14 +8317,14 @@
               <a:buNone/>
             </a:pPr>
             <a:r>
-              <a:rPr lang="en-US" sz="900" b="1" dirty="0">
+              <a:rPr lang="en-US" sz="950" b="1" dirty="0">
                 <a:solidFill>
                   <a:srgbClr val="7C3AED"/>
                 </a:solidFill>
               </a:rPr>
               <a:t>↑ 70% faster onboarding</a:t>
             </a:r>
-            <a:endParaRPr lang="en-US" sz="900" dirty="0"/>
+            <a:endParaRPr lang="en-US" sz="950" dirty="0"/>
           </a:p>
         </p:txBody>
       </p:sp>
@@ -8257,7 +8336,7 @@
         </p:nvSpPr>
         <p:spPr>
           <a:xfrm>
-            <a:off x="685800" y="3127248"/>
+            <a:off x="685800" y="3145536"/>
             <a:ext cx="5248656" cy="402336"/>
           </a:xfrm>
           <a:prstGeom prst="rect">
@@ -8274,14 +8353,14 @@
               <a:buNone/>
             </a:pPr>
             <a:r>
-              <a:rPr lang="en-US" sz="800" dirty="0">
-                <a:solidFill>
-                  <a:srgbClr val="94A3B8"/>
-                </a:solidFill>
-              </a:rPr>
-              <a:t>Process Design  ·  Change Management  ·  Vision 2031  ·  Roadmapping</a:t>
-            </a:r>
-            <a:endParaRPr lang="en-US" sz="800" dirty="0"/>
+              <a:rPr lang="en-US" sz="850" dirty="0">
+                <a:solidFill>
+                  <a:srgbClr val="6B7280"/>
+                </a:solidFill>
+              </a:rPr>
+              <a:t>Process Design  ·  Change Management  ·  Vision 2031</a:t>
+            </a:r>
+            <a:endParaRPr lang="en-US" sz="850" dirty="0"/>
           </a:p>
         </p:txBody>
       </p:sp>
@@ -8303,13 +8382,13 @@
           </a:prstGeom>
           <a:solidFill>
             <a:srgbClr val="4F46E5">
-              <a:alpha val="7000"/>
+              <a:alpha val="8000"/>
             </a:srgbClr>
           </a:solidFill>
           <a:ln w="12700">
             <a:solidFill>
               <a:srgbClr val="4F46E5">
-                <a:alpha val="32000"/>
+                <a:alpha val="38000"/>
               </a:srgbClr>
             </a:solidFill>
             <a:prstDash val="solid"/>
@@ -8352,7 +8431,7 @@
         <p:spPr>
           <a:xfrm>
             <a:off x="11091672" y="1353312"/>
-            <a:ext cx="548640" cy="457200"/>
+            <a:ext cx="548640" cy="475488"/>
           </a:xfrm>
           <a:prstGeom prst="rect">
             <a:avLst/>
@@ -8371,7 +8450,7 @@
               <a:rPr lang="en-US" sz="3200" b="1" dirty="0">
                 <a:solidFill>
                   <a:srgbClr val="4F46E5">
-                    <a:alpha val="18000"/>
+                    <a:alpha val="25000"/>
                   </a:srgbClr>
                 </a:solidFill>
               </a:rPr>
@@ -8389,8 +8468,8 @@
         </p:nvSpPr>
         <p:spPr>
           <a:xfrm>
-            <a:off x="6345936" y="1435608"/>
-            <a:ext cx="4791456" cy="329184"/>
+            <a:off x="6345936" y="1426464"/>
+            <a:ext cx="4791456" cy="347472"/>
           </a:xfrm>
           <a:prstGeom prst="rect">
             <a:avLst/>
@@ -8408,7 +8487,7 @@
             <a:r>
               <a:rPr lang="en-US" sz="1400" b="1" dirty="0">
                 <a:solidFill>
-                  <a:srgbClr val="1A0A2E"/>
+                  <a:srgbClr val="111827"/>
                 </a:solidFill>
               </a:rPr>
               <a:t>Strategic Consulting</a:t>
@@ -8425,8 +8504,8 @@
         </p:nvSpPr>
         <p:spPr>
           <a:xfrm>
-            <a:off x="6345936" y="1801368"/>
-            <a:ext cx="5248656" cy="1024128"/>
+            <a:off x="6345936" y="1810512"/>
+            <a:ext cx="5248656" cy="1005840"/>
           </a:xfrm>
           <a:prstGeom prst="rect">
             <a:avLst/>
@@ -8447,7 +8526,7 @@
             <a:r>
               <a:rPr lang="en-US" sz="950" dirty="0">
                 <a:solidFill>
-                  <a:srgbClr val="64748B"/>
+                  <a:srgbClr val="1F2937"/>
                 </a:solidFill>
               </a:rPr>
               <a:t>Technology roadmap design and C-suite advisory — aligning IT investments with long-term business objectives and competitive positioning.</a:t>
@@ -8481,14 +8560,14 @@
               <a:buNone/>
             </a:pPr>
             <a:r>
-              <a:rPr lang="en-US" sz="900" b="1" dirty="0">
+              <a:rPr lang="en-US" sz="950" b="1" dirty="0">
                 <a:solidFill>
                   <a:srgbClr val="4F46E5"/>
                 </a:solidFill>
               </a:rPr>
               <a:t>3× faster decision-making</a:t>
             </a:r>
-            <a:endParaRPr lang="en-US" sz="900" dirty="0"/>
+            <a:endParaRPr lang="en-US" sz="950" dirty="0"/>
           </a:p>
         </p:txBody>
       </p:sp>
@@ -8500,7 +8579,7 @@
         </p:nvSpPr>
         <p:spPr>
           <a:xfrm>
-            <a:off x="6345936" y="3127248"/>
+            <a:off x="6345936" y="3145536"/>
             <a:ext cx="5248656" cy="402336"/>
           </a:xfrm>
           <a:prstGeom prst="rect">
@@ -8517,14 +8596,14 @@
               <a:buNone/>
             </a:pPr>
             <a:r>
-              <a:rPr lang="en-US" sz="800" dirty="0">
-                <a:solidFill>
-                  <a:srgbClr val="94A3B8"/>
-                </a:solidFill>
-              </a:rPr>
-              <a:t>C-Suite Advisory  ·  OKRs  ·  Technology Roadmap  ·  Business Analysis</a:t>
-            </a:r>
-            <a:endParaRPr lang="en-US" sz="800" dirty="0"/>
+              <a:rPr lang="en-US" sz="850" dirty="0">
+                <a:solidFill>
+                  <a:srgbClr val="6B7280"/>
+                </a:solidFill>
+              </a:rPr>
+              <a:t>C-Suite Advisory  ·  OKRs  ·  Technology Roadmap</a:t>
+            </a:r>
+            <a:endParaRPr lang="en-US" sz="850" dirty="0"/>
           </a:p>
         </p:txBody>
       </p:sp>
@@ -8546,13 +8625,13 @@
           </a:prstGeom>
           <a:solidFill>
             <a:srgbClr val="0EA5E9">
-              <a:alpha val="7000"/>
+              <a:alpha val="8000"/>
             </a:srgbClr>
           </a:solidFill>
           <a:ln w="12700">
             <a:solidFill>
               <a:srgbClr val="0EA5E9">
-                <a:alpha val="32000"/>
+                <a:alpha val="38000"/>
               </a:srgbClr>
             </a:solidFill>
             <a:prstDash val="solid"/>
@@ -8595,7 +8674,7 @@
         <p:spPr>
           <a:xfrm>
             <a:off x="5431536" y="3858768"/>
-            <a:ext cx="548640" cy="457200"/>
+            <a:ext cx="548640" cy="475488"/>
           </a:xfrm>
           <a:prstGeom prst="rect">
             <a:avLst/>
@@ -8614,7 +8693,7 @@
               <a:rPr lang="en-US" sz="3200" b="1" dirty="0">
                 <a:solidFill>
                   <a:srgbClr val="0EA5E9">
-                    <a:alpha val="18000"/>
+                    <a:alpha val="25000"/>
                   </a:srgbClr>
                 </a:solidFill>
               </a:rPr>
@@ -8632,8 +8711,8 @@
         </p:nvSpPr>
         <p:spPr>
           <a:xfrm>
-            <a:off x="685800" y="3941064"/>
-            <a:ext cx="4791456" cy="329184"/>
+            <a:off x="685800" y="3931920"/>
+            <a:ext cx="4791456" cy="347472"/>
           </a:xfrm>
           <a:prstGeom prst="rect">
             <a:avLst/>
@@ -8651,7 +8730,7 @@
             <a:r>
               <a:rPr lang="en-US" sz="1400" b="1" dirty="0">
                 <a:solidFill>
-                  <a:srgbClr val="1A0A2E"/>
+                  <a:srgbClr val="111827"/>
                 </a:solidFill>
               </a:rPr>
               <a:t>IT Solutions</a:t>
@@ -8668,8 +8747,8 @@
         </p:nvSpPr>
         <p:spPr>
           <a:xfrm>
-            <a:off x="685800" y="4306824"/>
-            <a:ext cx="5248656" cy="1024128"/>
+            <a:off x="685800" y="4315968"/>
+            <a:ext cx="5248656" cy="1005840"/>
           </a:xfrm>
           <a:prstGeom prst="rect">
             <a:avLst/>
@@ -8690,7 +8769,7 @@
             <a:r>
               <a:rPr lang="en-US" sz="950" dirty="0">
                 <a:solidFill>
-                  <a:srgbClr val="64748B"/>
+                  <a:srgbClr val="1F2937"/>
                 </a:solidFill>
               </a:rPr>
               <a:t>Infrastructure design, systems integration, and managed IT services tailored to your organisation's scale, complexity, and industry requirements.</a:t>
@@ -8724,14 +8803,14 @@
               <a:buNone/>
             </a:pPr>
             <a:r>
-              <a:rPr lang="en-US" sz="900" b="1" dirty="0">
+              <a:rPr lang="en-US" sz="950" b="1" dirty="0">
                 <a:solidFill>
                   <a:srgbClr val="0EA5E9"/>
                 </a:solidFill>
               </a:rPr>
               <a:t>99.98% uptime delivered</a:t>
             </a:r>
-            <a:endParaRPr lang="en-US" sz="900" dirty="0"/>
+            <a:endParaRPr lang="en-US" sz="950" dirty="0"/>
           </a:p>
         </p:txBody>
       </p:sp>
@@ -8743,7 +8822,7 @@
         </p:nvSpPr>
         <p:spPr>
           <a:xfrm>
-            <a:off x="685800" y="5632704"/>
+            <a:off x="685800" y="5650992"/>
             <a:ext cx="5248656" cy="402336"/>
           </a:xfrm>
           <a:prstGeom prst="rect">
@@ -8760,14 +8839,14 @@
               <a:buNone/>
             </a:pPr>
             <a:r>
-              <a:rPr lang="en-US" sz="800" dirty="0">
-                <a:solidFill>
-                  <a:srgbClr val="94A3B8"/>
-                </a:solidFill>
-              </a:rPr>
-              <a:t>Infrastructure  ·  Managed IT  ·  Systems Integration  ·  ERP</a:t>
-            </a:r>
-            <a:endParaRPr lang="en-US" sz="800" dirty="0"/>
+              <a:rPr lang="en-US" sz="850" dirty="0">
+                <a:solidFill>
+                  <a:srgbClr val="6B7280"/>
+                </a:solidFill>
+              </a:rPr>
+              <a:t>Infrastructure  ·  Managed IT  ·  ERP Integration</a:t>
+            </a:r>
+            <a:endParaRPr lang="en-US" sz="850" dirty="0"/>
           </a:p>
         </p:txBody>
       </p:sp>
@@ -8789,13 +8868,13 @@
           </a:prstGeom>
           <a:solidFill>
             <a:srgbClr val="9333EA">
-              <a:alpha val="7000"/>
+              <a:alpha val="8000"/>
             </a:srgbClr>
           </a:solidFill>
           <a:ln w="12700">
             <a:solidFill>
               <a:srgbClr val="9333EA">
-                <a:alpha val="32000"/>
+                <a:alpha val="38000"/>
               </a:srgbClr>
             </a:solidFill>
             <a:prstDash val="solid"/>
@@ -8838,7 +8917,7 @@
         <p:spPr>
           <a:xfrm>
             <a:off x="11091672" y="3858768"/>
-            <a:ext cx="548640" cy="457200"/>
+            <a:ext cx="548640" cy="475488"/>
           </a:xfrm>
           <a:prstGeom prst="rect">
             <a:avLst/>
@@ -8857,7 +8936,7 @@
               <a:rPr lang="en-US" sz="3200" b="1" dirty="0">
                 <a:solidFill>
                   <a:srgbClr val="9333EA">
-                    <a:alpha val="18000"/>
+                    <a:alpha val="25000"/>
                   </a:srgbClr>
                 </a:solidFill>
               </a:rPr>
@@ -8875,8 +8954,8 @@
         </p:nvSpPr>
         <p:spPr>
           <a:xfrm>
-            <a:off x="6345936" y="3941064"/>
-            <a:ext cx="4791456" cy="329184"/>
+            <a:off x="6345936" y="3931920"/>
+            <a:ext cx="4791456" cy="347472"/>
           </a:xfrm>
           <a:prstGeom prst="rect">
             <a:avLst/>
@@ -8894,7 +8973,7 @@
             <a:r>
               <a:rPr lang="en-US" sz="1400" b="1" dirty="0">
                 <a:solidFill>
-                  <a:srgbClr val="1A0A2E"/>
+                  <a:srgbClr val="111827"/>
                 </a:solidFill>
               </a:rPr>
               <a:t>Project Management</a:t>
@@ -8911,8 +8990,8 @@
         </p:nvSpPr>
         <p:spPr>
           <a:xfrm>
-            <a:off x="6345936" y="4306824"/>
-            <a:ext cx="5248656" cy="1024128"/>
+            <a:off x="6345936" y="4315968"/>
+            <a:ext cx="5248656" cy="1005840"/>
           </a:xfrm>
           <a:prstGeom prst="rect">
             <a:avLst/>
@@ -8933,7 +9012,7 @@
             <a:r>
               <a:rPr lang="en-US" sz="950" dirty="0">
                 <a:solidFill>
-                  <a:srgbClr val="64748B"/>
+                  <a:srgbClr val="1F2937"/>
                 </a:solidFill>
               </a:rPr>
               <a:t>Rigorous PMO governance, agile delivery, and stakeholder coordination — ensuring every technology project lands on time, on budget, and on scope.</a:t>
@@ -8967,14 +9046,14 @@
               <a:buNone/>
             </a:pPr>
             <a:r>
-              <a:rPr lang="en-US" sz="900" b="1" dirty="0">
+              <a:rPr lang="en-US" sz="950" b="1" dirty="0">
                 <a:solidFill>
                   <a:srgbClr val="9333EA"/>
                 </a:solidFill>
               </a:rPr>
               <a:t>100% on-time delivery</a:t>
             </a:r>
-            <a:endParaRPr lang="en-US" sz="900" dirty="0"/>
+            <a:endParaRPr lang="en-US" sz="950" dirty="0"/>
           </a:p>
         </p:txBody>
       </p:sp>
@@ -8986,7 +9065,7 @@
         </p:nvSpPr>
         <p:spPr>
           <a:xfrm>
-            <a:off x="6345936" y="5632704"/>
+            <a:off x="6345936" y="5650992"/>
             <a:ext cx="5248656" cy="402336"/>
           </a:xfrm>
           <a:prstGeom prst="rect">
@@ -9003,14 +9082,14 @@
               <a:buNone/>
             </a:pPr>
             <a:r>
-              <a:rPr lang="en-US" sz="800" dirty="0">
-                <a:solidFill>
-                  <a:srgbClr val="94A3B8"/>
-                </a:solidFill>
-              </a:rPr>
-              <a:t>Agile / Scrum  ·  PMO Governance  ·  Stakeholder Mgmt  ·  Risk Management</a:t>
-            </a:r>
-            <a:endParaRPr lang="en-US" sz="800" dirty="0"/>
+              <a:rPr lang="en-US" sz="850" dirty="0">
+                <a:solidFill>
+                  <a:srgbClr val="6B7280"/>
+                </a:solidFill>
+              </a:rPr>
+              <a:t>Agile / Scrum  ·  PMO Governance  ·  Risk Management</a:t>
+            </a:r>
+            <a:endParaRPr lang="en-US" sz="850" dirty="0"/>
           </a:p>
         </p:txBody>
       </p:sp>
@@ -9068,9 +9147,9 @@
               <a:buNone/>
             </a:pPr>
             <a:r>
-              <a:rPr lang="en-US" sz="750" dirty="0">
-                <a:solidFill>
-                  <a:srgbClr val="7C3AED"/>
+              <a:rPr lang="en-US" sz="750" b="1" dirty="0">
+                <a:solidFill>
+                  <a:srgbClr val="5B21B6"/>
                 </a:solidFill>
               </a:rPr>
               <a:t>WeThink Technology Consulting  ·  Abu Dhabi, UAE  ·  wethink.ae  ·  © 2025</a:t>
@@ -9205,7 +9284,7 @@
                   <a:srgbClr val="7C3AED"/>
                 </a:solidFill>
               </a:rPr>
-              <a:t>SERVICES  2/2</a:t>
+              <a:t>SERVICES  2 OF 2</a:t>
             </a:r>
             <a:endParaRPr lang="en-US" sz="750" dirty="0"/>
           </a:p>
@@ -9238,7 +9317,7 @@
             <a:r>
               <a:rPr lang="en-US" sz="3000" b="1" dirty="0">
                 <a:solidFill>
-                  <a:srgbClr val="1A0A2E"/>
+                  <a:srgbClr val="111827"/>
                 </a:solidFill>
               </a:rPr>
               <a:t>Our Services</a:t>
@@ -9274,7 +9353,7 @@
             <a:r>
               <a:rPr lang="en-US" sz="1000" dirty="0">
                 <a:solidFill>
-                  <a:srgbClr val="64748B"/>
+                  <a:srgbClr val="4B5563"/>
                 </a:solidFill>
               </a:rPr>
               <a:t>Specialised capabilities across cloud, security, software engineering, and advanced analytics.</a:t>
@@ -9301,13 +9380,13 @@
           </a:prstGeom>
           <a:solidFill>
             <a:srgbClr val="06B6D4">
-              <a:alpha val="7000"/>
+              <a:alpha val="8000"/>
             </a:srgbClr>
           </a:solidFill>
           <a:ln w="12700">
             <a:solidFill>
               <a:srgbClr val="06B6D4">
-                <a:alpha val="32000"/>
+                <a:alpha val="38000"/>
               </a:srgbClr>
             </a:solidFill>
             <a:prstDash val="solid"/>
@@ -9350,7 +9429,7 @@
         <p:spPr>
           <a:xfrm>
             <a:off x="5431536" y="1353312"/>
-            <a:ext cx="548640" cy="457200"/>
+            <a:ext cx="548640" cy="475488"/>
           </a:xfrm>
           <a:prstGeom prst="rect">
             <a:avLst/>
@@ -9369,7 +9448,7 @@
               <a:rPr lang="en-US" sz="3200" b="1" dirty="0">
                 <a:solidFill>
                   <a:srgbClr val="06B6D4">
-                    <a:alpha val="18000"/>
+                    <a:alpha val="25000"/>
                   </a:srgbClr>
                 </a:solidFill>
               </a:rPr>
@@ -9387,8 +9466,8 @@
         </p:nvSpPr>
         <p:spPr>
           <a:xfrm>
-            <a:off x="685800" y="1435608"/>
-            <a:ext cx="4791456" cy="329184"/>
+            <a:off x="685800" y="1426464"/>
+            <a:ext cx="4791456" cy="347472"/>
           </a:xfrm>
           <a:prstGeom prst="rect">
             <a:avLst/>
@@ -9406,7 +9485,7 @@
             <a:r>
               <a:rPr lang="en-US" sz="1400" b="1" dirty="0">
                 <a:solidFill>
-                  <a:srgbClr val="1A0A2E"/>
+                  <a:srgbClr val="111827"/>
                 </a:solidFill>
               </a:rPr>
               <a:t>Cloud Services</a:t>
@@ -9423,8 +9502,8 @@
         </p:nvSpPr>
         <p:spPr>
           <a:xfrm>
-            <a:off x="685800" y="1801368"/>
-            <a:ext cx="5248656" cy="1024128"/>
+            <a:off x="685800" y="1810512"/>
+            <a:ext cx="5248656" cy="1005840"/>
           </a:xfrm>
           <a:prstGeom prst="rect">
             <a:avLst/>
@@ -9445,7 +9524,7 @@
             <a:r>
               <a:rPr lang="en-US" sz="950" dirty="0">
                 <a:solidFill>
-                  <a:srgbClr val="64748B"/>
+                  <a:srgbClr val="1F2937"/>
                 </a:solidFill>
               </a:rPr>
               <a:t>Hybrid and multi-cloud architecture, migration, and optimisation on AWS, Azure, and GCP — built for resilience, scalability, and cost efficiency.</a:t>
@@ -9479,14 +9558,14 @@
               <a:buNone/>
             </a:pPr>
             <a:r>
-              <a:rPr lang="en-US" sz="900" b="1" dirty="0">
+              <a:rPr lang="en-US" sz="950" b="1" dirty="0">
                 <a:solidFill>
                   <a:srgbClr val="06B6D4"/>
                 </a:solidFill>
               </a:rPr>
               <a:t>45% cost reduction</a:t>
             </a:r>
-            <a:endParaRPr lang="en-US" sz="900" dirty="0"/>
+            <a:endParaRPr lang="en-US" sz="950" dirty="0"/>
           </a:p>
         </p:txBody>
       </p:sp>
@@ -9498,7 +9577,7 @@
         </p:nvSpPr>
         <p:spPr>
           <a:xfrm>
-            <a:off x="685800" y="3127248"/>
+            <a:off x="685800" y="3145536"/>
             <a:ext cx="5248656" cy="402336"/>
           </a:xfrm>
           <a:prstGeom prst="rect">
@@ -9515,14 +9594,14 @@
               <a:buNone/>
             </a:pPr>
             <a:r>
-              <a:rPr lang="en-US" sz="800" dirty="0">
-                <a:solidFill>
-                  <a:srgbClr val="94A3B8"/>
-                </a:solidFill>
-              </a:rPr>
-              <a:t>AWS · Azure · GCP  ·  Cloud Migration  ·  FinOps  ·  24/7 Operations</a:t>
-            </a:r>
-            <a:endParaRPr lang="en-US" sz="800" dirty="0"/>
+              <a:rPr lang="en-US" sz="850" dirty="0">
+                <a:solidFill>
+                  <a:srgbClr val="6B7280"/>
+                </a:solidFill>
+              </a:rPr>
+              <a:t>AWS  ·  Azure  ·  GCP  ·  FinOps  ·  24/7 Operations</a:t>
+            </a:r>
+            <a:endParaRPr lang="en-US" sz="850" dirty="0"/>
           </a:p>
         </p:txBody>
       </p:sp>
@@ -9544,13 +9623,13 @@
           </a:prstGeom>
           <a:solidFill>
             <a:srgbClr val="EF4444">
-              <a:alpha val="7000"/>
+              <a:alpha val="8000"/>
             </a:srgbClr>
           </a:solidFill>
           <a:ln w="12700">
             <a:solidFill>
               <a:srgbClr val="EF4444">
-                <a:alpha val="32000"/>
+                <a:alpha val="38000"/>
               </a:srgbClr>
             </a:solidFill>
             <a:prstDash val="solid"/>
@@ -9593,7 +9672,7 @@
         <p:spPr>
           <a:xfrm>
             <a:off x="11091672" y="1353312"/>
-            <a:ext cx="548640" cy="457200"/>
+            <a:ext cx="548640" cy="475488"/>
           </a:xfrm>
           <a:prstGeom prst="rect">
             <a:avLst/>
@@ -9612,7 +9691,7 @@
               <a:rPr lang="en-US" sz="3200" b="1" dirty="0">
                 <a:solidFill>
                   <a:srgbClr val="EF4444">
-                    <a:alpha val="18000"/>
+                    <a:alpha val="25000"/>
                   </a:srgbClr>
                 </a:solidFill>
               </a:rPr>
@@ -9630,8 +9709,8 @@
         </p:nvSpPr>
         <p:spPr>
           <a:xfrm>
-            <a:off x="6345936" y="1435608"/>
-            <a:ext cx="4791456" cy="329184"/>
+            <a:off x="6345936" y="1426464"/>
+            <a:ext cx="4791456" cy="347472"/>
           </a:xfrm>
           <a:prstGeom prst="rect">
             <a:avLst/>
@@ -9649,7 +9728,7 @@
             <a:r>
               <a:rPr lang="en-US" sz="1400" b="1" dirty="0">
                 <a:solidFill>
-                  <a:srgbClr val="1A0A2E"/>
+                  <a:srgbClr val="111827"/>
                 </a:solidFill>
               </a:rPr>
               <a:t>Cybersecurity</a:t>
@@ -9666,8 +9745,8 @@
         </p:nvSpPr>
         <p:spPr>
           <a:xfrm>
-            <a:off x="6345936" y="1801368"/>
-            <a:ext cx="5248656" cy="1024128"/>
+            <a:off x="6345936" y="1810512"/>
+            <a:ext cx="5248656" cy="1005840"/>
           </a:xfrm>
           <a:prstGeom prst="rect">
             <a:avLst/>
@@ -9688,7 +9767,7 @@
             <a:r>
               <a:rPr lang="en-US" sz="950" dirty="0">
                 <a:solidFill>
-                  <a:srgbClr val="64748B"/>
+                  <a:srgbClr val="1F2937"/>
                 </a:solidFill>
               </a:rPr>
               <a:t>Zero-trust frameworks, 24/7 SOC monitoring, penetration testing, and compliance programmes including ISO 27001 and NESA for critical infrastructure.</a:t>
@@ -9722,14 +9801,14 @@
               <a:buNone/>
             </a:pPr>
             <a:r>
-              <a:rPr lang="en-US" sz="900" b="1" dirty="0">
+              <a:rPr lang="en-US" sz="950" b="1" dirty="0">
                 <a:solidFill>
                   <a:srgbClr val="EF4444"/>
                 </a:solidFill>
               </a:rPr>
               <a:t>ISO 27001 in 9 months</a:t>
             </a:r>
-            <a:endParaRPr lang="en-US" sz="900" dirty="0"/>
+            <a:endParaRPr lang="en-US" sz="950" dirty="0"/>
           </a:p>
         </p:txBody>
       </p:sp>
@@ -9741,7 +9820,7 @@
         </p:nvSpPr>
         <p:spPr>
           <a:xfrm>
-            <a:off x="6345936" y="3127248"/>
+            <a:off x="6345936" y="3145536"/>
             <a:ext cx="5248656" cy="402336"/>
           </a:xfrm>
           <a:prstGeom prst="rect">
@@ -9758,14 +9837,14 @@
               <a:buNone/>
             </a:pPr>
             <a:r>
-              <a:rPr lang="en-US" sz="800" dirty="0">
-                <a:solidFill>
-                  <a:srgbClr val="94A3B8"/>
-                </a:solidFill>
-              </a:rPr>
-              <a:t>Zero Trust  ·  SOC / SIEM  ·  Pen Testing  ·  ISO 27001 · NESA</a:t>
-            </a:r>
-            <a:endParaRPr lang="en-US" sz="800" dirty="0"/>
+              <a:rPr lang="en-US" sz="850" dirty="0">
+                <a:solidFill>
+                  <a:srgbClr val="6B7280"/>
+                </a:solidFill>
+              </a:rPr>
+              <a:t>Zero Trust  ·  SOC / SIEM  ·  Pen Testing  ·  ISO 27001</a:t>
+            </a:r>
+            <a:endParaRPr lang="en-US" sz="850" dirty="0"/>
           </a:p>
         </p:txBody>
       </p:sp>
@@ -9787,13 +9866,13 @@
           </a:prstGeom>
           <a:solidFill>
             <a:srgbClr val="059669">
-              <a:alpha val="7000"/>
+              <a:alpha val="8000"/>
             </a:srgbClr>
           </a:solidFill>
           <a:ln w="12700">
             <a:solidFill>
               <a:srgbClr val="059669">
-                <a:alpha val="32000"/>
+                <a:alpha val="38000"/>
               </a:srgbClr>
             </a:solidFill>
             <a:prstDash val="solid"/>
@@ -9836,7 +9915,7 @@
         <p:spPr>
           <a:xfrm>
             <a:off x="5431536" y="3858768"/>
-            <a:ext cx="548640" cy="457200"/>
+            <a:ext cx="548640" cy="475488"/>
           </a:xfrm>
           <a:prstGeom prst="rect">
             <a:avLst/>
@@ -9855,7 +9934,7 @@
               <a:rPr lang="en-US" sz="3200" b="1" dirty="0">
                 <a:solidFill>
                   <a:srgbClr val="059669">
-                    <a:alpha val="18000"/>
+                    <a:alpha val="25000"/>
                   </a:srgbClr>
                 </a:solidFill>
               </a:rPr>
@@ -9873,8 +9952,8 @@
         </p:nvSpPr>
         <p:spPr>
           <a:xfrm>
-            <a:off x="685800" y="3941064"/>
-            <a:ext cx="4791456" cy="329184"/>
+            <a:off x="685800" y="3931920"/>
+            <a:ext cx="4791456" cy="347472"/>
           </a:xfrm>
           <a:prstGeom prst="rect">
             <a:avLst/>
@@ -9892,7 +9971,7 @@
             <a:r>
               <a:rPr lang="en-US" sz="1400" b="1" dirty="0">
                 <a:solidFill>
-                  <a:srgbClr val="1A0A2E"/>
+                  <a:srgbClr val="111827"/>
                 </a:solidFill>
               </a:rPr>
               <a:t>Custom Software Development</a:t>
@@ -9909,8 +9988,8 @@
         </p:nvSpPr>
         <p:spPr>
           <a:xfrm>
-            <a:off x="685800" y="4306824"/>
-            <a:ext cx="5248656" cy="1024128"/>
+            <a:off x="685800" y="4315968"/>
+            <a:ext cx="5248656" cy="1005840"/>
           </a:xfrm>
           <a:prstGeom prst="rect">
             <a:avLst/>
@@ -9931,7 +10010,7 @@
             <a:r>
               <a:rPr lang="en-US" sz="950" dirty="0">
                 <a:solidFill>
-                  <a:srgbClr val="64748B"/>
+                  <a:srgbClr val="1F2937"/>
                 </a:solidFill>
               </a:rPr>
               <a:t>Bespoke web, mobile, and enterprise applications engineered from the ground up — including AI-powered platforms and deep API integrations.</a:t>
@@ -9965,14 +10044,14 @@
               <a:buNone/>
             </a:pPr>
             <a:r>
-              <a:rPr lang="en-US" sz="900" b="1" dirty="0">
+              <a:rPr lang="en-US" sz="950" b="1" dirty="0">
                 <a:solidFill>
                   <a:srgbClr val="059669"/>
                 </a:solidFill>
               </a:rPr>
               <a:t>5,000 users in 6 months</a:t>
             </a:r>
-            <a:endParaRPr lang="en-US" sz="900" dirty="0"/>
+            <a:endParaRPr lang="en-US" sz="950" dirty="0"/>
           </a:p>
         </p:txBody>
       </p:sp>
@@ -9984,7 +10063,7 @@
         </p:nvSpPr>
         <p:spPr>
           <a:xfrm>
-            <a:off x="685800" y="5632704"/>
+            <a:off x="685800" y="5650992"/>
             <a:ext cx="5248656" cy="402336"/>
           </a:xfrm>
           <a:prstGeom prst="rect">
@@ -10001,14 +10080,14 @@
               <a:buNone/>
             </a:pPr>
             <a:r>
-              <a:rPr lang="en-US" sz="800" dirty="0">
-                <a:solidFill>
-                  <a:srgbClr val="94A3B8"/>
-                </a:solidFill>
-              </a:rPr>
-              <a:t>React · Node.js  ·  Mobile Apps  ·  AI / ML  ·  API Integration</a:t>
-            </a:r>
-            <a:endParaRPr lang="en-US" sz="800" dirty="0"/>
+              <a:rPr lang="en-US" sz="850" dirty="0">
+                <a:solidFill>
+                  <a:srgbClr val="6B7280"/>
+                </a:solidFill>
+              </a:rPr>
+              <a:t>React  ·  Node.js  ·  Mobile Apps  ·  AI / ML</a:t>
+            </a:r>
+            <a:endParaRPr lang="en-US" sz="850" dirty="0"/>
           </a:p>
         </p:txBody>
       </p:sp>
@@ -10030,13 +10109,13 @@
           </a:prstGeom>
           <a:solidFill>
             <a:srgbClr val="F59E0B">
-              <a:alpha val="7000"/>
+              <a:alpha val="8000"/>
             </a:srgbClr>
           </a:solidFill>
           <a:ln w="12700">
             <a:solidFill>
               <a:srgbClr val="F59E0B">
-                <a:alpha val="32000"/>
+                <a:alpha val="38000"/>
               </a:srgbClr>
             </a:solidFill>
             <a:prstDash val="solid"/>
@@ -10079,7 +10158,7 @@
         <p:spPr>
           <a:xfrm>
             <a:off x="11091672" y="3858768"/>
-            <a:ext cx="548640" cy="457200"/>
+            <a:ext cx="548640" cy="475488"/>
           </a:xfrm>
           <a:prstGeom prst="rect">
             <a:avLst/>
@@ -10098,7 +10177,7 @@
               <a:rPr lang="en-US" sz="3200" b="1" dirty="0">
                 <a:solidFill>
                   <a:srgbClr val="F59E0B">
-                    <a:alpha val="18000"/>
+                    <a:alpha val="25000"/>
                   </a:srgbClr>
                 </a:solidFill>
               </a:rPr>
@@ -10116,8 +10195,8 @@
         </p:nvSpPr>
         <p:spPr>
           <a:xfrm>
-            <a:off x="6345936" y="3941064"/>
-            <a:ext cx="4791456" cy="329184"/>
+            <a:off x="6345936" y="3931920"/>
+            <a:ext cx="4791456" cy="347472"/>
           </a:xfrm>
           <a:prstGeom prst="rect">
             <a:avLst/>
@@ -10135,7 +10214,7 @@
             <a:r>
               <a:rPr lang="en-US" sz="1400" b="1" dirty="0">
                 <a:solidFill>
-                  <a:srgbClr val="1A0A2E"/>
+                  <a:srgbClr val="111827"/>
                 </a:solidFill>
               </a:rPr>
               <a:t>Data &amp; Analytics</a:t>
@@ -10152,8 +10231,8 @@
         </p:nvSpPr>
         <p:spPr>
           <a:xfrm>
-            <a:off x="6345936" y="4306824"/>
-            <a:ext cx="5248656" cy="1024128"/>
+            <a:off x="6345936" y="4315968"/>
+            <a:ext cx="5248656" cy="1005840"/>
           </a:xfrm>
           <a:prstGeom prst="rect">
             <a:avLst/>
@@ -10174,7 +10253,7 @@
             <a:r>
               <a:rPr lang="en-US" sz="950" dirty="0">
                 <a:solidFill>
-                  <a:srgbClr val="64748B"/>
+                  <a:srgbClr val="1F2937"/>
                 </a:solidFill>
               </a:rPr>
               <a:t>Business intelligence dashboards, data warehouse architecture, and machine-learning models that turn raw data into actionable revenue-generating intelligence.</a:t>
@@ -10208,14 +10287,14 @@
               <a:buNone/>
             </a:pPr>
             <a:r>
-              <a:rPr lang="en-US" sz="900" b="1" dirty="0">
+              <a:rPr lang="en-US" sz="950" b="1" dirty="0">
                 <a:solidFill>
                   <a:srgbClr val="F59E0B"/>
                 </a:solidFill>
               </a:rPr>
               <a:t>80+ stores connected</a:t>
             </a:r>
-            <a:endParaRPr lang="en-US" sz="900" dirty="0"/>
+            <a:endParaRPr lang="en-US" sz="950" dirty="0"/>
           </a:p>
         </p:txBody>
       </p:sp>
@@ -10227,7 +10306,7 @@
         </p:nvSpPr>
         <p:spPr>
           <a:xfrm>
-            <a:off x="6345936" y="5632704"/>
+            <a:off x="6345936" y="5650992"/>
             <a:ext cx="5248656" cy="402336"/>
           </a:xfrm>
           <a:prstGeom prst="rect">
@@ -10244,14 +10323,14 @@
               <a:buNone/>
             </a:pPr>
             <a:r>
-              <a:rPr lang="en-US" sz="800" dirty="0">
-                <a:solidFill>
-                  <a:srgbClr val="94A3B8"/>
+              <a:rPr lang="en-US" sz="850" dirty="0">
+                <a:solidFill>
+                  <a:srgbClr val="6B7280"/>
                 </a:solidFill>
               </a:rPr>
               <a:t>Power BI  ·  Data Warehouse  ·  ML Models  ·  Real-Time BI</a:t>
             </a:r>
-            <a:endParaRPr lang="en-US" sz="800" dirty="0"/>
+            <a:endParaRPr lang="en-US" sz="850" dirty="0"/>
           </a:p>
         </p:txBody>
       </p:sp>
@@ -10309,9 +10388,9 @@
               <a:buNone/>
             </a:pPr>
             <a:r>
-              <a:rPr lang="en-US" sz="750" dirty="0">
-                <a:solidFill>
-                  <a:srgbClr val="7C3AED"/>
+              <a:rPr lang="en-US" sz="750" b="1" dirty="0">
+                <a:solidFill>
+                  <a:srgbClr val="5B21B6"/>
                 </a:solidFill>
               </a:rPr>
               <a:t>WeThink Technology Consulting  ·  Abu Dhabi, UAE  ·  wethink.ae  ·  © 2025</a:t>
@@ -10455,7 +10534,7 @@
             <a:r>
               <a:rPr lang="en-US" sz="2800" b="1" dirty="0">
                 <a:solidFill>
-                  <a:srgbClr val="1A0A2E"/>
+                  <a:srgbClr val="111827"/>
                 </a:solidFill>
               </a:rPr>
               <a:t>National Digital</a:t>
@@ -10472,7 +10551,7 @@
             <a:r>
               <a:rPr lang="en-US" sz="2800" b="1" dirty="0">
                 <a:solidFill>
-                  <a:srgbClr val="1A0A2E"/>
+                  <a:srgbClr val="111827"/>
                 </a:solidFill>
               </a:rPr>
               <a:t>Identity Platform</a:t>
@@ -10571,7 +10650,7 @@
             <a:r>
               <a:rPr lang="en-US" sz="1100" b="1" dirty="0">
                 <a:solidFill>
-                  <a:srgbClr val="1A0A2E"/>
+                  <a:srgbClr val="111827"/>
                 </a:solidFill>
               </a:rPr>
               <a:t>Project Overview</a:t>
@@ -10610,10 +10689,10 @@
             <a:r>
               <a:rPr lang="en-US" sz="1000" dirty="0">
                 <a:solidFill>
-                  <a:srgbClr val="64748B"/>
-                </a:solidFill>
-              </a:rPr>
-              <a:t>WeThink was engaged to design and deliver a unified citizen identity portal for a UAE federal entity, integrating 12 separate government services into a single secure platform. The programme covered discovery, UX design, cloud architecture, identity and access management, and full API integration with legacy systems.</a:t>
+                  <a:srgbClr val="1F2937"/>
+                </a:solidFill>
+              </a:rPr>
+              <a:t>WeThink designed and delivered a unified citizen identity portal for a UAE federal entity, integrating 12 separate government services into a single secure platform covering discovery, UX, cloud architecture, identity management, and full API integration with legacy systems.</a:t>
             </a:r>
             <a:endParaRPr lang="en-US" sz="1000" dirty="0"/>
           </a:p>
@@ -10707,7 +10786,7 @@
             <a:r>
               <a:rPr lang="en-US" sz="1150" b="1" dirty="0">
                 <a:solidFill>
-                  <a:srgbClr val="1A0A2E"/>
+                  <a:srgbClr val="111827"/>
                 </a:solidFill>
               </a:rPr>
               <a:t>The Challenge</a:t>
@@ -10746,10 +10825,10 @@
             <a:r>
               <a:rPr lang="en-US" sz="950" dirty="0">
                 <a:solidFill>
-                  <a:srgbClr val="64748B"/>
-                </a:solidFill>
-              </a:rPr>
-              <a:t>Fragmented citizen experience across 12 federal services. Manual onboarding process taking 3–4 weeks per citizen. No unified identity layer.</a:t>
+                  <a:srgbClr val="1F2937"/>
+                </a:solidFill>
+              </a:rPr>
+              <a:t>Fragmented citizen experience across 12 federal services with manual onboarding taking 3–4 weeks per citizen and no unified identity layer.</a:t>
             </a:r>
             <a:endParaRPr lang="en-US" sz="950" dirty="0"/>
           </a:p>
@@ -10843,7 +10922,7 @@
             <a:r>
               <a:rPr lang="en-US" sz="1150" b="1" dirty="0">
                 <a:solidFill>
-                  <a:srgbClr val="1A0A2E"/>
+                  <a:srgbClr val="111827"/>
                 </a:solidFill>
               </a:rPr>
               <a:t>Our Approach</a:t>
@@ -10882,7 +10961,7 @@
             <a:r>
               <a:rPr lang="en-US" sz="950" dirty="0">
                 <a:solidFill>
-                  <a:srgbClr val="64748B"/>
+                  <a:srgbClr val="1F2937"/>
                 </a:solidFill>
               </a:rPr>
               <a:t>Cloud-native identity platform with single sign-on, biometric verification, and a microservices API layer connecting all 12 services in real time.</a:t>
@@ -10918,10 +10997,10 @@
             <a:r>
               <a:rPr lang="en-US" sz="750" b="1" spc="150" kern="0" dirty="0">
                 <a:solidFill>
-                  <a:srgbClr val="94A3B8"/>
-                </a:solidFill>
-              </a:rPr>
-              <a:t>TECHNOLOGIES</a:t>
+                  <a:srgbClr val="6B7280"/>
+                </a:solidFill>
+              </a:rPr>
+              <a:t>TECHNOLOGIES USED</a:t>
             </a:r>
             <a:endParaRPr lang="en-US" sz="750" dirty="0"/>
           </a:p>
@@ -10971,23 +11050,23 @@
         </p:nvSpPr>
         <p:spPr>
           <a:xfrm>
-            <a:off x="8028432" y="502920"/>
-            <a:ext cx="3657600" cy="1536192"/>
+            <a:off x="8028432" y="384048"/>
+            <a:ext cx="3657600" cy="1572768"/>
           </a:xfrm>
           <a:prstGeom prst="rect">
             <a:avLst>
-              <a:gd name="adj" fmla="val 5952"/>
+              <a:gd name="adj" fmla="val 6977"/>
             </a:avLst>
           </a:prstGeom>
           <a:solidFill>
             <a:srgbClr val="7C3AED">
-              <a:alpha val="10000"/>
+              <a:alpha val="12000"/>
             </a:srgbClr>
           </a:solidFill>
           <a:ln w="12700">
             <a:solidFill>
               <a:srgbClr val="7C3AED">
-                <a:alpha val="35000"/>
+                <a:alpha val="45000"/>
               </a:srgbClr>
             </a:solidFill>
             <a:prstDash val="solid"/>
@@ -11002,8 +11081,8 @@
         </p:nvSpPr>
         <p:spPr>
           <a:xfrm>
-            <a:off x="8028432" y="576072"/>
-            <a:ext cx="3657600" cy="475488"/>
+            <a:off x="8028432" y="548640"/>
+            <a:ext cx="3657600" cy="658368"/>
           </a:xfrm>
           <a:prstGeom prst="rect">
             <a:avLst/>
@@ -11019,14 +11098,14 @@
               <a:buNone/>
             </a:pPr>
             <a:r>
-              <a:rPr lang="en-US" sz="2800" b="1" dirty="0">
+              <a:rPr lang="en-US" sz="3600" b="1" dirty="0">
                 <a:solidFill>
                   <a:srgbClr val="7C3AED"/>
                 </a:solidFill>
               </a:rPr>
               <a:t>70%</a:t>
             </a:r>
-            <a:endParaRPr lang="en-US" sz="2800" dirty="0"/>
+            <a:endParaRPr lang="en-US" sz="3600" dirty="0"/>
           </a:p>
         </p:txBody>
       </p:sp>
@@ -11038,8 +11117,8 @@
         </p:nvSpPr>
         <p:spPr>
           <a:xfrm>
-            <a:off x="8028432" y="1051560"/>
-            <a:ext cx="3657600" cy="320040"/>
+            <a:off x="8028432" y="1207008"/>
+            <a:ext cx="3657600" cy="502920"/>
           </a:xfrm>
           <a:prstGeom prst="rect">
             <a:avLst/>
@@ -11055,14 +11134,14 @@
               <a:buNone/>
             </a:pPr>
             <a:r>
-              <a:rPr lang="en-US" sz="900" dirty="0">
-                <a:solidFill>
-                  <a:srgbClr val="64748B"/>
-                </a:solidFill>
-              </a:rPr>
-              <a:t>Reduction in onboarding time</a:t>
-            </a:r>
-            <a:endParaRPr lang="en-US" sz="900" dirty="0"/>
+              <a:rPr lang="en-US" sz="950" dirty="0">
+                <a:solidFill>
+                  <a:srgbClr val="1F2937"/>
+                </a:solidFill>
+              </a:rPr>
+              <a:t>Reduction in citizen onboarding time</a:t>
+            </a:r>
+            <a:endParaRPr lang="en-US" sz="950" dirty="0"/>
           </a:p>
         </p:txBody>
       </p:sp>
@@ -11074,23 +11153,23 @@
         </p:nvSpPr>
         <p:spPr>
           <a:xfrm>
-            <a:off x="8028432" y="2240280"/>
-            <a:ext cx="3657600" cy="1536192"/>
+            <a:off x="8028432" y="2176272"/>
+            <a:ext cx="3657600" cy="1572768"/>
           </a:xfrm>
           <a:prstGeom prst="rect">
             <a:avLst>
-              <a:gd name="adj" fmla="val 5952"/>
+              <a:gd name="adj" fmla="val 6977"/>
             </a:avLst>
           </a:prstGeom>
           <a:solidFill>
             <a:srgbClr val="4F46E5">
-              <a:alpha val="10000"/>
+              <a:alpha val="12000"/>
             </a:srgbClr>
           </a:solidFill>
           <a:ln w="12700">
             <a:solidFill>
               <a:srgbClr val="4F46E5">
-                <a:alpha val="35000"/>
+                <a:alpha val="45000"/>
               </a:srgbClr>
             </a:solidFill>
             <a:prstDash val="solid"/>
@@ -11105,8 +11184,8 @@
         </p:nvSpPr>
         <p:spPr>
           <a:xfrm>
-            <a:off x="8028432" y="2313432"/>
-            <a:ext cx="3657600" cy="475488"/>
+            <a:off x="8028432" y="2340864"/>
+            <a:ext cx="3657600" cy="658368"/>
           </a:xfrm>
           <a:prstGeom prst="rect">
             <a:avLst/>
@@ -11122,14 +11201,14 @@
               <a:buNone/>
             </a:pPr>
             <a:r>
-              <a:rPr lang="en-US" sz="2800" b="1" dirty="0">
+              <a:rPr lang="en-US" sz="3600" b="1" dirty="0">
                 <a:solidFill>
                   <a:srgbClr val="4F46E5"/>
                 </a:solidFill>
               </a:rPr>
               <a:t>12</a:t>
             </a:r>
-            <a:endParaRPr lang="en-US" sz="2800" dirty="0"/>
+            <a:endParaRPr lang="en-US" sz="3600" dirty="0"/>
           </a:p>
         </p:txBody>
       </p:sp>
@@ -11141,8 +11220,8 @@
         </p:nvSpPr>
         <p:spPr>
           <a:xfrm>
-            <a:off x="8028432" y="2788920"/>
-            <a:ext cx="3657600" cy="320040"/>
+            <a:off x="8028432" y="2999232"/>
+            <a:ext cx="3657600" cy="502920"/>
           </a:xfrm>
           <a:prstGeom prst="rect">
             <a:avLst/>
@@ -11158,14 +11237,14 @@
               <a:buNone/>
             </a:pPr>
             <a:r>
-              <a:rPr lang="en-US" sz="900" dirty="0">
-                <a:solidFill>
-                  <a:srgbClr val="64748B"/>
-                </a:solidFill>
-              </a:rPr>
-              <a:t>Federal services integrated</a:t>
-            </a:r>
-            <a:endParaRPr lang="en-US" sz="900" dirty="0"/>
+              <a:rPr lang="en-US" sz="950" dirty="0">
+                <a:solidFill>
+                  <a:srgbClr val="1F2937"/>
+                </a:solidFill>
+              </a:rPr>
+              <a:t>Federal services integrated on one platform</a:t>
+            </a:r>
+            <a:endParaRPr lang="en-US" sz="950" dirty="0"/>
           </a:p>
         </p:txBody>
       </p:sp>
@@ -11177,23 +11256,23 @@
         </p:nvSpPr>
         <p:spPr>
           <a:xfrm>
-            <a:off x="8028432" y="3977640"/>
-            <a:ext cx="3657600" cy="1536192"/>
+            <a:off x="8028432" y="3968496"/>
+            <a:ext cx="3657600" cy="1572768"/>
           </a:xfrm>
           <a:prstGeom prst="rect">
             <a:avLst>
-              <a:gd name="adj" fmla="val 5952"/>
+              <a:gd name="adj" fmla="val 6977"/>
             </a:avLst>
           </a:prstGeom>
           <a:solidFill>
             <a:srgbClr val="059669">
-              <a:alpha val="10000"/>
+              <a:alpha val="12000"/>
             </a:srgbClr>
           </a:solidFill>
           <a:ln w="12700">
             <a:solidFill>
               <a:srgbClr val="059669">
-                <a:alpha val="35000"/>
+                <a:alpha val="45000"/>
               </a:srgbClr>
             </a:solidFill>
             <a:prstDash val="solid"/>
@@ -11208,8 +11287,8 @@
         </p:nvSpPr>
         <p:spPr>
           <a:xfrm>
-            <a:off x="8028432" y="4050792"/>
-            <a:ext cx="3657600" cy="475488"/>
+            <a:off x="8028432" y="4133088"/>
+            <a:ext cx="3657600" cy="658368"/>
           </a:xfrm>
           <a:prstGeom prst="rect">
             <a:avLst/>
@@ -11225,14 +11304,14 @@
               <a:buNone/>
             </a:pPr>
             <a:r>
-              <a:rPr lang="en-US" sz="2800" b="1" dirty="0">
+              <a:rPr lang="en-US" sz="3600" b="1" dirty="0">
                 <a:solidFill>
                   <a:srgbClr val="059669"/>
                 </a:solidFill>
               </a:rPr>
               <a:t>1M+</a:t>
             </a:r>
-            <a:endParaRPr lang="en-US" sz="2800" dirty="0"/>
+            <a:endParaRPr lang="en-US" sz="3600" dirty="0"/>
           </a:p>
         </p:txBody>
       </p:sp>
@@ -11244,8 +11323,8 @@
         </p:nvSpPr>
         <p:spPr>
           <a:xfrm>
-            <a:off x="8028432" y="4526280"/>
-            <a:ext cx="3657600" cy="320040"/>
+            <a:off x="8028432" y="4791456"/>
+            <a:ext cx="3657600" cy="502920"/>
           </a:xfrm>
           <a:prstGeom prst="rect">
             <a:avLst/>
@@ -11261,14 +11340,14 @@
               <a:buNone/>
             </a:pPr>
             <a:r>
-              <a:rPr lang="en-US" sz="900" dirty="0">
-                <a:solidFill>
-                  <a:srgbClr val="64748B"/>
-                </a:solidFill>
-              </a:rPr>
-              <a:t>Citizens served on platform</a:t>
-            </a:r>
-            <a:endParaRPr lang="en-US" sz="900" dirty="0"/>
+              <a:rPr lang="en-US" sz="950" dirty="0">
+                <a:solidFill>
+                  <a:srgbClr val="1F2937"/>
+                </a:solidFill>
+              </a:rPr>
+              <a:t>Citizens served on the platform</a:t>
+            </a:r>
+            <a:endParaRPr lang="en-US" sz="950" dirty="0"/>
           </a:p>
         </p:txBody>
       </p:sp>
@@ -11326,9 +11405,9 @@
               <a:buNone/>
             </a:pPr>
             <a:r>
-              <a:rPr lang="en-US" sz="750" dirty="0">
-                <a:solidFill>
-                  <a:srgbClr val="7C3AED"/>
+              <a:rPr lang="en-US" sz="750" b="1" dirty="0">
+                <a:solidFill>
+                  <a:srgbClr val="5B21B6"/>
                 </a:solidFill>
               </a:rPr>
               <a:t>WeThink Technology Consulting  ·  Abu Dhabi, UAE  ·  wethink.ae  ·  © 2025</a:t>
@@ -11472,7 +11551,7 @@
             <a:r>
               <a:rPr lang="en-US" sz="2800" b="1" dirty="0">
                 <a:solidFill>
-                  <a:srgbClr val="1A0A2E"/>
+                  <a:srgbClr val="111827"/>
                 </a:solidFill>
               </a:rPr>
               <a:t>Core Banking</a:t>
@@ -11489,7 +11568,7 @@
             <a:r>
               <a:rPr lang="en-US" sz="2800" b="1" dirty="0">
                 <a:solidFill>
-                  <a:srgbClr val="1A0A2E"/>
+                  <a:srgbClr val="111827"/>
                 </a:solidFill>
               </a:rPr>
               <a:t>Modernisation</a:t>
@@ -11588,7 +11667,7 @@
             <a:r>
               <a:rPr lang="en-US" sz="1100" b="1" dirty="0">
                 <a:solidFill>
-                  <a:srgbClr val="1A0A2E"/>
+                  <a:srgbClr val="111827"/>
                 </a:solidFill>
               </a:rPr>
               <a:t>Project Overview</a:t>
@@ -11627,10 +11706,10 @@
             <a:r>
               <a:rPr lang="en-US" sz="1000" dirty="0">
                 <a:solidFill>
-                  <a:srgbClr val="64748B"/>
-                </a:solidFill>
-              </a:rPr>
-              <a:t>WeThink led the full migration of a legacy on-premise core banking infrastructure to a hybrid cloud environment. The 18-month programme included a phased migration strategy to ensure zero downtime, a DevSecOps transformation, and a new cybersecurity framework aligned with UAE Central Bank regulations.</a:t>
+                  <a:srgbClr val="1F2937"/>
+                </a:solidFill>
+              </a:rPr>
+              <a:t>WeThink led the full migration of legacy on-premise core banking infrastructure to a hybrid cloud environment. The 18-month programme included a phased zero-downtime migration strategy, a DevSecOps transformation, and a new cybersecurity framework aligned with UAE Central Bank regulations.</a:t>
             </a:r>
             <a:endParaRPr lang="en-US" sz="1000" dirty="0"/>
           </a:p>
@@ -11724,7 +11803,7 @@
             <a:r>
               <a:rPr lang="en-US" sz="1150" b="1" dirty="0">
                 <a:solidFill>
-                  <a:srgbClr val="1A0A2E"/>
+                  <a:srgbClr val="111827"/>
                 </a:solidFill>
               </a:rPr>
               <a:t>The Challenge</a:t>
@@ -11763,10 +11842,10 @@
             <a:r>
               <a:rPr lang="en-US" sz="950" dirty="0">
                 <a:solidFill>
-                  <a:srgbClr val="64748B"/>
-                </a:solidFill>
-              </a:rPr>
-              <a:t>High maintenance costs on aging on-premise infrastructure. Frequent downtime impacting business operations. No modern DevOps or security practices in place.</a:t>
+                  <a:srgbClr val="1F2937"/>
+                </a:solidFill>
+              </a:rPr>
+              <a:t>High maintenance costs on aging on-premise infrastructure with frequent downtime impacting operations and no modern DevOps or security practices in place.</a:t>
             </a:r>
             <a:endParaRPr lang="en-US" sz="950" dirty="0"/>
           </a:p>
@@ -11860,7 +11939,7 @@
             <a:r>
               <a:rPr lang="en-US" sz="1150" b="1" dirty="0">
                 <a:solidFill>
-                  <a:srgbClr val="1A0A2E"/>
+                  <a:srgbClr val="111827"/>
                 </a:solidFill>
               </a:rPr>
               <a:t>Our Approach</a:t>
@@ -11899,10 +11978,10 @@
             <a:r>
               <a:rPr lang="en-US" sz="950" dirty="0">
                 <a:solidFill>
-                  <a:srgbClr val="64748B"/>
-                </a:solidFill>
-              </a:rPr>
-              <a:t>Phased zero-downtime migration to hybrid cloud (Azure). Introduced CI/CD pipelines, automated testing, and a UAE Central Bank-compliant cybersecurity framework.</a:t>
+                  <a:srgbClr val="1F2937"/>
+                </a:solidFill>
+              </a:rPr>
+              <a:t>Phased zero-downtime migration to hybrid cloud (Azure), introduction of CI/CD pipelines, automated testing, and a UAE Central Bank-compliant cybersecurity framework.</a:t>
             </a:r>
             <a:endParaRPr lang="en-US" sz="950" dirty="0"/>
           </a:p>
@@ -11935,10 +12014,10 @@
             <a:r>
               <a:rPr lang="en-US" sz="750" b="1" spc="150" kern="0" dirty="0">
                 <a:solidFill>
-                  <a:srgbClr val="94A3B8"/>
-                </a:solidFill>
-              </a:rPr>
-              <a:t>TECHNOLOGIES</a:t>
+                  <a:srgbClr val="6B7280"/>
+                </a:solidFill>
+              </a:rPr>
+              <a:t>TECHNOLOGIES USED</a:t>
             </a:r>
             <a:endParaRPr lang="en-US" sz="750" dirty="0"/>
           </a:p>
@@ -11988,23 +12067,23 @@
         </p:nvSpPr>
         <p:spPr>
           <a:xfrm>
-            <a:off x="8028432" y="502920"/>
-            <a:ext cx="3657600" cy="1536192"/>
+            <a:off x="8028432" y="384048"/>
+            <a:ext cx="3657600" cy="1572768"/>
           </a:xfrm>
           <a:prstGeom prst="rect">
             <a:avLst>
-              <a:gd name="adj" fmla="val 5952"/>
+              <a:gd name="adj" fmla="val 6977"/>
             </a:avLst>
           </a:prstGeom>
           <a:solidFill>
             <a:srgbClr val="059669">
-              <a:alpha val="10000"/>
+              <a:alpha val="12000"/>
             </a:srgbClr>
           </a:solidFill>
           <a:ln w="12700">
             <a:solidFill>
               <a:srgbClr val="059669">
-                <a:alpha val="35000"/>
+                <a:alpha val="45000"/>
               </a:srgbClr>
             </a:solidFill>
             <a:prstDash val="solid"/>
@@ -12019,8 +12098,8 @@
         </p:nvSpPr>
         <p:spPr>
           <a:xfrm>
-            <a:off x="8028432" y="576072"/>
-            <a:ext cx="3657600" cy="475488"/>
+            <a:off x="8028432" y="548640"/>
+            <a:ext cx="3657600" cy="658368"/>
           </a:xfrm>
           <a:prstGeom prst="rect">
             <a:avLst/>
@@ -12036,14 +12115,14 @@
               <a:buNone/>
             </a:pPr>
             <a:r>
-              <a:rPr lang="en-US" sz="2800" b="1" dirty="0">
+              <a:rPr lang="en-US" sz="3600" b="1" dirty="0">
                 <a:solidFill>
                   <a:srgbClr val="059669"/>
                 </a:solidFill>
               </a:rPr>
               <a:t>45%</a:t>
             </a:r>
-            <a:endParaRPr lang="en-US" sz="2800" dirty="0"/>
+            <a:endParaRPr lang="en-US" sz="3600" dirty="0"/>
           </a:p>
         </p:txBody>
       </p:sp>
@@ -12055,8 +12134,8 @@
         </p:nvSpPr>
         <p:spPr>
           <a:xfrm>
-            <a:off x="8028432" y="1051560"/>
-            <a:ext cx="3657600" cy="320040"/>
+            <a:off x="8028432" y="1207008"/>
+            <a:ext cx="3657600" cy="502920"/>
           </a:xfrm>
           <a:prstGeom prst="rect">
             <a:avLst/>
@@ -12072,14 +12151,14 @@
               <a:buNone/>
             </a:pPr>
             <a:r>
-              <a:rPr lang="en-US" sz="900" dirty="0">
-                <a:solidFill>
-                  <a:srgbClr val="64748B"/>
+              <a:rPr lang="en-US" sz="950" dirty="0">
+                <a:solidFill>
+                  <a:srgbClr val="1F2937"/>
                 </a:solidFill>
               </a:rPr>
               <a:t>Reduction in IT operational costs</a:t>
             </a:r>
-            <a:endParaRPr lang="en-US" sz="900" dirty="0"/>
+            <a:endParaRPr lang="en-US" sz="950" dirty="0"/>
           </a:p>
         </p:txBody>
       </p:sp>
@@ -12091,23 +12170,23 @@
         </p:nvSpPr>
         <p:spPr>
           <a:xfrm>
-            <a:off x="8028432" y="2240280"/>
-            <a:ext cx="3657600" cy="1536192"/>
+            <a:off x="8028432" y="2176272"/>
+            <a:ext cx="3657600" cy="1572768"/>
           </a:xfrm>
           <a:prstGeom prst="rect">
             <a:avLst>
-              <a:gd name="adj" fmla="val 5952"/>
+              <a:gd name="adj" fmla="val 6977"/>
             </a:avLst>
           </a:prstGeom>
           <a:solidFill>
             <a:srgbClr val="0EA5E9">
-              <a:alpha val="10000"/>
+              <a:alpha val="12000"/>
             </a:srgbClr>
           </a:solidFill>
           <a:ln w="12700">
             <a:solidFill>
               <a:srgbClr val="0EA5E9">
-                <a:alpha val="35000"/>
+                <a:alpha val="45000"/>
               </a:srgbClr>
             </a:solidFill>
             <a:prstDash val="solid"/>
@@ -12122,8 +12201,8 @@
         </p:nvSpPr>
         <p:spPr>
           <a:xfrm>
-            <a:off x="8028432" y="2313432"/>
-            <a:ext cx="3657600" cy="475488"/>
+            <a:off x="8028432" y="2340864"/>
+            <a:ext cx="3657600" cy="658368"/>
           </a:xfrm>
           <a:prstGeom prst="rect">
             <a:avLst/>
@@ -12139,14 +12218,14 @@
               <a:buNone/>
             </a:pPr>
             <a:r>
-              <a:rPr lang="en-US" sz="2800" b="1" dirty="0">
+              <a:rPr lang="en-US" sz="3600" b="1" dirty="0">
                 <a:solidFill>
                   <a:srgbClr val="0EA5E9"/>
                 </a:solidFill>
               </a:rPr>
               <a:t>99.98%</a:t>
             </a:r>
-            <a:endParaRPr lang="en-US" sz="2800" dirty="0"/>
+            <a:endParaRPr lang="en-US" sz="3600" dirty="0"/>
           </a:p>
         </p:txBody>
       </p:sp>
@@ -12158,8 +12237,8 @@
         </p:nvSpPr>
         <p:spPr>
           <a:xfrm>
-            <a:off x="8028432" y="2788920"/>
-            <a:ext cx="3657600" cy="320040"/>
+            <a:off x="8028432" y="2999232"/>
+            <a:ext cx="3657600" cy="502920"/>
           </a:xfrm>
           <a:prstGeom prst="rect">
             <a:avLst/>
@@ -12175,14 +12254,14 @@
               <a:buNone/>
             </a:pPr>
             <a:r>
-              <a:rPr lang="en-US" sz="900" dirty="0">
-                <a:solidFill>
-                  <a:srgbClr val="64748B"/>
+              <a:rPr lang="en-US" sz="950" dirty="0">
+                <a:solidFill>
+                  <a:srgbClr val="1F2937"/>
                 </a:solidFill>
               </a:rPr>
               <a:t>System uptime post-migration</a:t>
             </a:r>
-            <a:endParaRPr lang="en-US" sz="900" dirty="0"/>
+            <a:endParaRPr lang="en-US" sz="950" dirty="0"/>
           </a:p>
         </p:txBody>
       </p:sp>
@@ -12194,23 +12273,23 @@
         </p:nvSpPr>
         <p:spPr>
           <a:xfrm>
-            <a:off x="8028432" y="3977640"/>
-            <a:ext cx="3657600" cy="1536192"/>
+            <a:off x="8028432" y="3968496"/>
+            <a:ext cx="3657600" cy="1572768"/>
           </a:xfrm>
           <a:prstGeom prst="rect">
             <a:avLst>
-              <a:gd name="adj" fmla="val 5952"/>
+              <a:gd name="adj" fmla="val 6977"/>
             </a:avLst>
           </a:prstGeom>
           <a:solidFill>
             <a:srgbClr val="7C3AED">
-              <a:alpha val="10000"/>
+              <a:alpha val="12000"/>
             </a:srgbClr>
           </a:solidFill>
           <a:ln w="12700">
             <a:solidFill>
               <a:srgbClr val="7C3AED">
-                <a:alpha val="35000"/>
+                <a:alpha val="45000"/>
               </a:srgbClr>
             </a:solidFill>
             <a:prstDash val="solid"/>
@@ -12225,8 +12304,8 @@
         </p:nvSpPr>
         <p:spPr>
           <a:xfrm>
-            <a:off x="8028432" y="4050792"/>
-            <a:ext cx="3657600" cy="475488"/>
+            <a:off x="8028432" y="4133088"/>
+            <a:ext cx="3657600" cy="658368"/>
           </a:xfrm>
           <a:prstGeom prst="rect">
             <a:avLst/>
@@ -12242,14 +12321,14 @@
               <a:buNone/>
             </a:pPr>
             <a:r>
-              <a:rPr lang="en-US" sz="2800" b="1" dirty="0">
+              <a:rPr lang="en-US" sz="3600" b="1" dirty="0">
                 <a:solidFill>
                   <a:srgbClr val="7C3AED"/>
                 </a:solidFill>
               </a:rPr>
               <a:t>0</a:t>
             </a:r>
-            <a:endParaRPr lang="en-US" sz="2800" dirty="0"/>
+            <a:endParaRPr lang="en-US" sz="3600" dirty="0"/>
           </a:p>
         </p:txBody>
       </p:sp>
@@ -12261,8 +12340,8 @@
         </p:nvSpPr>
         <p:spPr>
           <a:xfrm>
-            <a:off x="8028432" y="4526280"/>
-            <a:ext cx="3657600" cy="320040"/>
+            <a:off x="8028432" y="4791456"/>
+            <a:ext cx="3657600" cy="502920"/>
           </a:xfrm>
           <a:prstGeom prst="rect">
             <a:avLst/>
@@ -12278,14 +12357,14 @@
               <a:buNone/>
             </a:pPr>
             <a:r>
-              <a:rPr lang="en-US" sz="900" dirty="0">
-                <a:solidFill>
-                  <a:srgbClr val="64748B"/>
+              <a:rPr lang="en-US" sz="950" dirty="0">
+                <a:solidFill>
+                  <a:srgbClr val="1F2937"/>
                 </a:solidFill>
               </a:rPr>
               <a:t>Downtime incidents during migration</a:t>
             </a:r>
-            <a:endParaRPr lang="en-US" sz="900" dirty="0"/>
+            <a:endParaRPr lang="en-US" sz="950" dirty="0"/>
           </a:p>
         </p:txBody>
       </p:sp>
@@ -12343,9 +12422,9 @@
               <a:buNone/>
             </a:pPr>
             <a:r>
-              <a:rPr lang="en-US" sz="750" dirty="0">
-                <a:solidFill>
-                  <a:srgbClr val="7C3AED"/>
+              <a:rPr lang="en-US" sz="750" b="1" dirty="0">
+                <a:solidFill>
+                  <a:srgbClr val="5B21B6"/>
                 </a:solidFill>
               </a:rPr>
               <a:t>WeThink Technology Consulting  ·  Abu Dhabi, UAE  ·  wethink.ae  ·  © 2025</a:t>
@@ -12489,7 +12568,7 @@
             <a:r>
               <a:rPr lang="en-US" sz="2800" b="1" dirty="0">
                 <a:solidFill>
-                  <a:srgbClr val="1A0A2E"/>
+                  <a:srgbClr val="111827"/>
                 </a:solidFill>
               </a:rPr>
               <a:t>Smart Campus</a:t>
@@ -12506,7 +12585,7 @@
             <a:r>
               <a:rPr lang="en-US" sz="2800" b="1" dirty="0">
                 <a:solidFill>
-                  <a:srgbClr val="1A0A2E"/>
+                  <a:srgbClr val="111827"/>
                 </a:solidFill>
               </a:rPr>
               <a:t>Management System</a:t>
@@ -12605,7 +12684,7 @@
             <a:r>
               <a:rPr lang="en-US" sz="1100" b="1" dirty="0">
                 <a:solidFill>
-                  <a:srgbClr val="1A0A2E"/>
+                  <a:srgbClr val="111827"/>
                 </a:solidFill>
               </a:rPr>
               <a:t>Project Overview</a:t>
@@ -12644,10 +12723,10 @@
             <a:r>
               <a:rPr lang="en-US" sz="1000" dirty="0">
                 <a:solidFill>
-                  <a:srgbClr val="64748B"/>
-                </a:solidFill>
-              </a:rPr>
-              <a:t>WeThink designed and built a full-stack IoT-connected campus management platform deployed across 3 campuses. The platform unifies student attendance, facility bookings, energy monitoring, and security access into a single mobile-first system — integrated with the university's existing ERP and student information systems.</a:t>
+                  <a:srgbClr val="1F2937"/>
+                </a:solidFill>
+              </a:rPr>
+              <a:t>WeThink designed and built a full-stack IoT-connected campus management platform deployed across 3 campuses, unifying student attendance, facility bookings, energy monitoring, and security access into a single mobile-first system integrated with the university's ERP.</a:t>
             </a:r>
             <a:endParaRPr lang="en-US" sz="1000" dirty="0"/>
           </a:p>
@@ -12741,7 +12820,7 @@
             <a:r>
               <a:rPr lang="en-US" sz="1150" b="1" dirty="0">
                 <a:solidFill>
-                  <a:srgbClr val="1A0A2E"/>
+                  <a:srgbClr val="111827"/>
                 </a:solidFill>
               </a:rPr>
               <a:t>The Challenge</a:t>
@@ -12780,10 +12859,10 @@
             <a:r>
               <a:rPr lang="en-US" sz="950" dirty="0">
                 <a:solidFill>
-                  <a:srgbClr val="64748B"/>
-                </a:solidFill>
-              </a:rPr>
-              <a:t>Separate disconnected systems across 3 campuses for attendance, facilities, and energy. No real-time visibility. High administrative overhead.</a:t>
+                  <a:srgbClr val="1F2937"/>
+                </a:solidFill>
+              </a:rPr>
+              <a:t>Separate disconnected systems across 3 campuses for attendance, facilities, and energy. No real-time visibility and high administrative overhead.</a:t>
             </a:r>
             <a:endParaRPr lang="en-US" sz="950" dirty="0"/>
           </a:p>
@@ -12877,7 +12956,7 @@
             <a:r>
               <a:rPr lang="en-US" sz="1150" b="1" dirty="0">
                 <a:solidFill>
-                  <a:srgbClr val="1A0A2E"/>
+                  <a:srgbClr val="111827"/>
                 </a:solidFill>
               </a:rPr>
               <a:t>Our Approach</a:t>
@@ -12916,10 +12995,10 @@
             <a:r>
               <a:rPr lang="en-US" sz="950" dirty="0">
                 <a:solidFill>
-                  <a:srgbClr val="64748B"/>
-                </a:solidFill>
-              </a:rPr>
-              <a:t>Built a unified React/Node.js platform with IoT sensor integration on Azure. Mobile app for students and staff. Real-time dashboards for campus operations teams.</a:t>
+                  <a:srgbClr val="1F2937"/>
+                </a:solidFill>
+              </a:rPr>
+              <a:t>Built a unified React/Node.js platform with IoT sensor integration on Azure. Mobile app for students and staff with real-time dashboards for campus operations.</a:t>
             </a:r>
             <a:endParaRPr lang="en-US" sz="950" dirty="0"/>
           </a:p>
@@ -12952,10 +13031,10 @@
             <a:r>
               <a:rPr lang="en-US" sz="750" b="1" spc="150" kern="0" dirty="0">
                 <a:solidFill>
-                  <a:srgbClr val="94A3B8"/>
-                </a:solidFill>
-              </a:rPr>
-              <a:t>TECHNOLOGIES</a:t>
+                  <a:srgbClr val="6B7280"/>
+                </a:solidFill>
+              </a:rPr>
+              <a:t>TECHNOLOGIES USED</a:t>
             </a:r>
             <a:endParaRPr lang="en-US" sz="750" dirty="0"/>
           </a:p>
@@ -13005,23 +13084,23 @@
         </p:nvSpPr>
         <p:spPr>
           <a:xfrm>
-            <a:off x="8028432" y="502920"/>
-            <a:ext cx="3657600" cy="1536192"/>
+            <a:off x="8028432" y="384048"/>
+            <a:ext cx="3657600" cy="1572768"/>
           </a:xfrm>
           <a:prstGeom prst="rect">
             <a:avLst>
-              <a:gd name="adj" fmla="val 5952"/>
+              <a:gd name="adj" fmla="val 6977"/>
             </a:avLst>
           </a:prstGeom>
           <a:solidFill>
             <a:srgbClr val="0EA5E9">
-              <a:alpha val="10000"/>
+              <a:alpha val="12000"/>
             </a:srgbClr>
           </a:solidFill>
           <a:ln w="12700">
             <a:solidFill>
               <a:srgbClr val="0EA5E9">
-                <a:alpha val="35000"/>
+                <a:alpha val="45000"/>
               </a:srgbClr>
             </a:solidFill>
             <a:prstDash val="solid"/>
@@ -13036,8 +13115,8 @@
         </p:nvSpPr>
         <p:spPr>
           <a:xfrm>
-            <a:off x="8028432" y="576072"/>
-            <a:ext cx="3657600" cy="475488"/>
+            <a:off x="8028432" y="548640"/>
+            <a:ext cx="3657600" cy="658368"/>
           </a:xfrm>
           <a:prstGeom prst="rect">
             <a:avLst/>
@@ -13053,14 +13132,14 @@
               <a:buNone/>
             </a:pPr>
             <a:r>
-              <a:rPr lang="en-US" sz="2800" b="1" dirty="0">
+              <a:rPr lang="en-US" sz="3600" b="1" dirty="0">
                 <a:solidFill>
                   <a:srgbClr val="0EA5E9"/>
                 </a:solidFill>
               </a:rPr>
               <a:t>18K</a:t>
             </a:r>
-            <a:endParaRPr lang="en-US" sz="2800" dirty="0"/>
+            <a:endParaRPr lang="en-US" sz="3600" dirty="0"/>
           </a:p>
         </p:txBody>
       </p:sp>
@@ -13072,8 +13151,8 @@
         </p:nvSpPr>
         <p:spPr>
           <a:xfrm>
-            <a:off x="8028432" y="1051560"/>
-            <a:ext cx="3657600" cy="320040"/>
+            <a:off x="8028432" y="1207008"/>
+            <a:ext cx="3657600" cy="502920"/>
           </a:xfrm>
           <a:prstGeom prst="rect">
             <a:avLst/>
@@ -13089,14 +13168,14 @@
               <a:buNone/>
             </a:pPr>
             <a:r>
-              <a:rPr lang="en-US" sz="900" dirty="0">
-                <a:solidFill>
-                  <a:srgbClr val="64748B"/>
-                </a:solidFill>
-              </a:rPr>
-              <a:t>Daily active users across campuses</a:t>
-            </a:r>
-            <a:endParaRPr lang="en-US" sz="900" dirty="0"/>
+              <a:rPr lang="en-US" sz="950" dirty="0">
+                <a:solidFill>
+                  <a:srgbClr val="1F2937"/>
+                </a:solidFill>
+              </a:rPr>
+              <a:t>Daily active users across all campuses</a:t>
+            </a:r>
+            <a:endParaRPr lang="en-US" sz="950" dirty="0"/>
           </a:p>
         </p:txBody>
       </p:sp>
@@ -13108,23 +13187,23 @@
         </p:nvSpPr>
         <p:spPr>
           <a:xfrm>
-            <a:off x="8028432" y="2240280"/>
-            <a:ext cx="3657600" cy="1536192"/>
+            <a:off x="8028432" y="2176272"/>
+            <a:ext cx="3657600" cy="1572768"/>
           </a:xfrm>
           <a:prstGeom prst="rect">
             <a:avLst>
-              <a:gd name="adj" fmla="val 5952"/>
+              <a:gd name="adj" fmla="val 6977"/>
             </a:avLst>
           </a:prstGeom>
           <a:solidFill>
             <a:srgbClr val="7C3AED">
-              <a:alpha val="10000"/>
+              <a:alpha val="12000"/>
             </a:srgbClr>
           </a:solidFill>
           <a:ln w="12700">
             <a:solidFill>
               <a:srgbClr val="7C3AED">
-                <a:alpha val="35000"/>
+                <a:alpha val="45000"/>
               </a:srgbClr>
             </a:solidFill>
             <a:prstDash val="solid"/>
@@ -13139,8 +13218,8 @@
         </p:nvSpPr>
         <p:spPr>
           <a:xfrm>
-            <a:off x="8028432" y="2313432"/>
-            <a:ext cx="3657600" cy="475488"/>
+            <a:off x="8028432" y="2340864"/>
+            <a:ext cx="3657600" cy="658368"/>
           </a:xfrm>
           <a:prstGeom prst="rect">
             <a:avLst/>
@@ -13156,14 +13235,14 @@
               <a:buNone/>
             </a:pPr>
             <a:r>
-              <a:rPr lang="en-US" sz="2800" b="1" dirty="0">
+              <a:rPr lang="en-US" sz="3600" b="1" dirty="0">
                 <a:solidFill>
                   <a:srgbClr val="7C3AED"/>
                 </a:solidFill>
               </a:rPr>
               <a:t>3</a:t>
             </a:r>
-            <a:endParaRPr lang="en-US" sz="2800" dirty="0"/>
+            <a:endParaRPr lang="en-US" sz="3600" dirty="0"/>
           </a:p>
         </p:txBody>
       </p:sp>
@@ -13175,8 +13254,8 @@
         </p:nvSpPr>
         <p:spPr>
           <a:xfrm>
-            <a:off x="8028432" y="2788920"/>
-            <a:ext cx="3657600" cy="320040"/>
+            <a:off x="8028432" y="2999232"/>
+            <a:ext cx="3657600" cy="502920"/>
           </a:xfrm>
           <a:prstGeom prst="rect">
             <a:avLst/>
@@ -13192,14 +13271,14 @@
               <a:buNone/>
             </a:pPr>
             <a:r>
-              <a:rPr lang="en-US" sz="900" dirty="0">
-                <a:solidFill>
-                  <a:srgbClr val="64748B"/>
+              <a:rPr lang="en-US" sz="950" dirty="0">
+                <a:solidFill>
+                  <a:srgbClr val="1F2937"/>
                 </a:solidFill>
               </a:rPr>
               <a:t>Campuses unified on one platform</a:t>
             </a:r>
-            <a:endParaRPr lang="en-US" sz="900" dirty="0"/>
+            <a:endParaRPr lang="en-US" sz="950" dirty="0"/>
           </a:p>
         </p:txBody>
       </p:sp>
@@ -13211,23 +13290,23 @@
         </p:nvSpPr>
         <p:spPr>
           <a:xfrm>
-            <a:off x="8028432" y="3977640"/>
-            <a:ext cx="3657600" cy="1536192"/>
+            <a:off x="8028432" y="3968496"/>
+            <a:ext cx="3657600" cy="1572768"/>
           </a:xfrm>
           <a:prstGeom prst="rect">
             <a:avLst>
-              <a:gd name="adj" fmla="val 5952"/>
+              <a:gd name="adj" fmla="val 6977"/>
             </a:avLst>
           </a:prstGeom>
           <a:solidFill>
             <a:srgbClr val="059669">
-              <a:alpha val="10000"/>
+              <a:alpha val="12000"/>
             </a:srgbClr>
           </a:solidFill>
           <a:ln w="12700">
             <a:solidFill>
               <a:srgbClr val="059669">
-                <a:alpha val="35000"/>
+                <a:alpha val="45000"/>
               </a:srgbClr>
             </a:solidFill>
             <a:prstDash val="solid"/>
@@ -13242,8 +13321,8 @@
         </p:nvSpPr>
         <p:spPr>
           <a:xfrm>
-            <a:off x="8028432" y="4050792"/>
-            <a:ext cx="3657600" cy="475488"/>
+            <a:off x="8028432" y="4133088"/>
+            <a:ext cx="3657600" cy="658368"/>
           </a:xfrm>
           <a:prstGeom prst="rect">
             <a:avLst/>
@@ -13259,14 +13338,14 @@
               <a:buNone/>
             </a:pPr>
             <a:r>
-              <a:rPr lang="en-US" sz="2800" b="1" dirty="0">
+              <a:rPr lang="en-US" sz="3600" b="1" dirty="0">
                 <a:solidFill>
                   <a:srgbClr val="059669"/>
                 </a:solidFill>
               </a:rPr>
               <a:t>30%</a:t>
             </a:r>
-            <a:endParaRPr lang="en-US" sz="2800" dirty="0"/>
+            <a:endParaRPr lang="en-US" sz="3600" dirty="0"/>
           </a:p>
         </p:txBody>
       </p:sp>
@@ -13278,8 +13357,8 @@
         </p:nvSpPr>
         <p:spPr>
           <a:xfrm>
-            <a:off x="8028432" y="4526280"/>
-            <a:ext cx="3657600" cy="320040"/>
+            <a:off x="8028432" y="4791456"/>
+            <a:ext cx="3657600" cy="502920"/>
           </a:xfrm>
           <a:prstGeom prst="rect">
             <a:avLst/>
@@ -13295,14 +13374,14 @@
               <a:buNone/>
             </a:pPr>
             <a:r>
-              <a:rPr lang="en-US" sz="900" dirty="0">
-                <a:solidFill>
-                  <a:srgbClr val="64748B"/>
-                </a:solidFill>
-              </a:rPr>
-              <a:t>Reduction in energy consumption</a:t>
-            </a:r>
-            <a:endParaRPr lang="en-US" sz="900" dirty="0"/>
+              <a:rPr lang="en-US" sz="950" dirty="0">
+                <a:solidFill>
+                  <a:srgbClr val="1F2937"/>
+                </a:solidFill>
+              </a:rPr>
+              <a:t>Reduction in campus energy consumption</a:t>
+            </a:r>
+            <a:endParaRPr lang="en-US" sz="950" dirty="0"/>
           </a:p>
         </p:txBody>
       </p:sp>
@@ -13360,9 +13439,9 @@
               <a:buNone/>
             </a:pPr>
             <a:r>
-              <a:rPr lang="en-US" sz="750" dirty="0">
-                <a:solidFill>
-                  <a:srgbClr val="7C3AED"/>
+              <a:rPr lang="en-US" sz="750" b="1" dirty="0">
+                <a:solidFill>
+                  <a:srgbClr val="5B21B6"/>
                 </a:solidFill>
               </a:rPr>
               <a:t>WeThink Technology Consulting  ·  Abu Dhabi, UAE  ·  wethink.ae  ·  © 2025</a:t>
@@ -13506,7 +13585,7 @@
             <a:r>
               <a:rPr lang="en-US" sz="2800" b="1" dirty="0">
                 <a:solidFill>
-                  <a:srgbClr val="1A0A2E"/>
+                  <a:srgbClr val="111827"/>
                 </a:solidFill>
               </a:rPr>
               <a:t>Zero-Trust Security</a:t>
@@ -13523,7 +13602,7 @@
             <a:r>
               <a:rPr lang="en-US" sz="2800" b="1" dirty="0">
                 <a:solidFill>
-                  <a:srgbClr val="1A0A2E"/>
+                  <a:srgbClr val="111827"/>
                 </a:solidFill>
               </a:rPr>
               <a:t>Framework</a:t>
@@ -13622,7 +13701,7 @@
             <a:r>
               <a:rPr lang="en-US" sz="1100" b="1" dirty="0">
                 <a:solidFill>
-                  <a:srgbClr val="1A0A2E"/>
+                  <a:srgbClr val="111827"/>
                 </a:solidFill>
               </a:rPr>
               <a:t>Project Overview</a:t>
@@ -13661,10 +13740,10 @@
             <a:r>
               <a:rPr lang="en-US" sz="1000" dirty="0">
                 <a:solidFill>
-                  <a:srgbClr val="64748B"/>
-                </a:solidFill>
-              </a:rPr>
-              <a:t>WeThink was engaged to implement a zero-trust network architecture and establish a 24/7 Security Operations Centre (SOC) for a critical ADNOC supply chain operator. The engagement included a full security audit, threat modelling, network re-segmentation, and a 9-month ISO 27001 certification programme.</a:t>
+                  <a:srgbClr val="1F2937"/>
+                </a:solidFill>
+              </a:rPr>
+              <a:t>WeThink implemented a zero-trust network architecture and established a 24/7 Security Operations Centre for a critical ADNOC supply chain operator. The engagement covered a full security audit, threat modelling, network re-segmentation, and a 9-month ISO 27001 certification programme.</a:t>
             </a:r>
             <a:endParaRPr lang="en-US" sz="1000" dirty="0"/>
           </a:p>
@@ -13758,7 +13837,7 @@
             <a:r>
               <a:rPr lang="en-US" sz="1150" b="1" dirty="0">
                 <a:solidFill>
-                  <a:srgbClr val="1A0A2E"/>
+                  <a:srgbClr val="111827"/>
                 </a:solidFill>
               </a:rPr>
               <a:t>The Challenge</a:t>
@@ -13797,10 +13876,10 @@
             <a:r>
               <a:rPr lang="en-US" sz="950" dirty="0">
                 <a:solidFill>
-                  <a:srgbClr val="64748B"/>
-                </a:solidFill>
-              </a:rPr>
-              <a:t>No formal security framework in place. Network perimeter-based security with no monitoring. Compliance gap against NESA and ISO 27001 required by ADNOC supply chain.</a:t>
+                  <a:srgbClr val="1F2937"/>
+                </a:solidFill>
+              </a:rPr>
+              <a:t>No formal security framework in place. Perimeter-based security with no monitoring. Compliance gap against NESA and ISO 27001 required by ADNOC supply chain.</a:t>
             </a:r>
             <a:endParaRPr lang="en-US" sz="950" dirty="0"/>
           </a:p>
@@ -13894,7 +13973,7 @@
             <a:r>
               <a:rPr lang="en-US" sz="1150" b="1" dirty="0">
                 <a:solidFill>
-                  <a:srgbClr val="1A0A2E"/>
+                  <a:srgbClr val="111827"/>
                 </a:solidFill>
               </a:rPr>
               <a:t>Our Approach</a:t>
@@ -13933,10 +14012,10 @@
             <a:r>
               <a:rPr lang="en-US" sz="950" dirty="0">
                 <a:solidFill>
-                  <a:srgbClr val="64748B"/>
-                </a:solidFill>
-              </a:rPr>
-              <a:t>Full zero-trust re-architecture, 24/7 SOC with SIEM, penetration testing programme, and a structured ISO 27001 readiness sprint over 9 months.</a:t>
+                  <a:srgbClr val="1F2937"/>
+                </a:solidFill>
+              </a:rPr>
+              <a:t>Full zero-trust re-architecture, 24/7 SOC with SIEM, structured penetration testing programme, and an ISO 27001 readiness sprint delivered in 9 months.</a:t>
             </a:r>
             <a:endParaRPr lang="en-US" sz="950" dirty="0"/>
           </a:p>
@@ -13969,10 +14048,10 @@
             <a:r>
               <a:rPr lang="en-US" sz="750" b="1" spc="150" kern="0" dirty="0">
                 <a:solidFill>
-                  <a:srgbClr val="94A3B8"/>
-                </a:solidFill>
-              </a:rPr>
-              <a:t>TECHNOLOGIES</a:t>
+                  <a:srgbClr val="6B7280"/>
+                </a:solidFill>
+              </a:rPr>
+              <a:t>TECHNOLOGIES USED</a:t>
             </a:r>
             <a:endParaRPr lang="en-US" sz="750" dirty="0"/>
           </a:p>
@@ -14022,23 +14101,23 @@
         </p:nvSpPr>
         <p:spPr>
           <a:xfrm>
-            <a:off x="8028432" y="502920"/>
-            <a:ext cx="3657600" cy="1536192"/>
+            <a:off x="8028432" y="384048"/>
+            <a:ext cx="3657600" cy="1572768"/>
           </a:xfrm>
           <a:prstGeom prst="rect">
             <a:avLst>
-              <a:gd name="adj" fmla="val 5952"/>
+              <a:gd name="adj" fmla="val 6977"/>
             </a:avLst>
           </a:prstGeom>
           <a:solidFill>
             <a:srgbClr val="EF4444">
-              <a:alpha val="10000"/>
+              <a:alpha val="12000"/>
             </a:srgbClr>
           </a:solidFill>
           <a:ln w="12700">
             <a:solidFill>
               <a:srgbClr val="EF4444">
-                <a:alpha val="35000"/>
+                <a:alpha val="45000"/>
               </a:srgbClr>
             </a:solidFill>
             <a:prstDash val="solid"/>
@@ -14053,8 +14132,8 @@
         </p:nvSpPr>
         <p:spPr>
           <a:xfrm>
-            <a:off x="8028432" y="576072"/>
-            <a:ext cx="3657600" cy="475488"/>
+            <a:off x="8028432" y="548640"/>
+            <a:ext cx="3657600" cy="658368"/>
           </a:xfrm>
           <a:prstGeom prst="rect">
             <a:avLst/>
@@ -14070,14 +14149,14 @@
               <a:buNone/>
             </a:pPr>
             <a:r>
-              <a:rPr lang="en-US" sz="2800" b="1" dirty="0">
+              <a:rPr lang="en-US" sz="3600" b="1" dirty="0">
                 <a:solidFill>
                   <a:srgbClr val="EF4444"/>
                 </a:solidFill>
               </a:rPr>
               <a:t>9mo</a:t>
             </a:r>
-            <a:endParaRPr lang="en-US" sz="2800" dirty="0"/>
+            <a:endParaRPr lang="en-US" sz="3600" dirty="0"/>
           </a:p>
         </p:txBody>
       </p:sp>
@@ -14089,8 +14168,8 @@
         </p:nvSpPr>
         <p:spPr>
           <a:xfrm>
-            <a:off x="8028432" y="1051560"/>
-            <a:ext cx="3657600" cy="320040"/>
+            <a:off x="8028432" y="1207008"/>
+            <a:ext cx="3657600" cy="502920"/>
           </a:xfrm>
           <a:prstGeom prst="rect">
             <a:avLst/>
@@ -14106,14 +14185,14 @@
               <a:buNone/>
             </a:pPr>
             <a:r>
-              <a:rPr lang="en-US" sz="900" dirty="0">
-                <a:solidFill>
-                  <a:srgbClr val="64748B"/>
-                </a:solidFill>
-              </a:rPr>
-              <a:t>To ISO 27001 certification</a:t>
-            </a:r>
-            <a:endParaRPr lang="en-US" sz="900" dirty="0"/>
+              <a:rPr lang="en-US" sz="950" dirty="0">
+                <a:solidFill>
+                  <a:srgbClr val="1F2937"/>
+                </a:solidFill>
+              </a:rPr>
+              <a:t>To full ISO 27001 certification</a:t>
+            </a:r>
+            <a:endParaRPr lang="en-US" sz="950" dirty="0"/>
           </a:p>
         </p:txBody>
       </p:sp>
@@ -14125,23 +14204,23 @@
         </p:nvSpPr>
         <p:spPr>
           <a:xfrm>
-            <a:off x="8028432" y="2240280"/>
-            <a:ext cx="3657600" cy="1536192"/>
+            <a:off x="8028432" y="2176272"/>
+            <a:ext cx="3657600" cy="1572768"/>
           </a:xfrm>
           <a:prstGeom prst="rect">
             <a:avLst>
-              <a:gd name="adj" fmla="val 5952"/>
+              <a:gd name="adj" fmla="val 6977"/>
             </a:avLst>
           </a:prstGeom>
           <a:solidFill>
             <a:srgbClr val="059669">
-              <a:alpha val="10000"/>
+              <a:alpha val="12000"/>
             </a:srgbClr>
           </a:solidFill>
           <a:ln w="12700">
             <a:solidFill>
               <a:srgbClr val="059669">
-                <a:alpha val="35000"/>
+                <a:alpha val="45000"/>
               </a:srgbClr>
             </a:solidFill>
             <a:prstDash val="solid"/>
@@ -14156,8 +14235,8 @@
         </p:nvSpPr>
         <p:spPr>
           <a:xfrm>
-            <a:off x="8028432" y="2313432"/>
-            <a:ext cx="3657600" cy="475488"/>
+            <a:off x="8028432" y="2340864"/>
+            <a:ext cx="3657600" cy="658368"/>
           </a:xfrm>
           <a:prstGeom prst="rect">
             <a:avLst/>
@@ -14173,14 +14252,14 @@
               <a:buNone/>
             </a:pPr>
             <a:r>
-              <a:rPr lang="en-US" sz="2800" b="1" dirty="0">
+              <a:rPr lang="en-US" sz="3600" b="1" dirty="0">
                 <a:solidFill>
                   <a:srgbClr val="059669"/>
                 </a:solidFill>
               </a:rPr>
               <a:t>0</a:t>
             </a:r>
-            <a:endParaRPr lang="en-US" sz="2800" dirty="0"/>
+            <a:endParaRPr lang="en-US" sz="3600" dirty="0"/>
           </a:p>
         </p:txBody>
       </p:sp>
@@ -14192,8 +14271,8 @@
         </p:nvSpPr>
         <p:spPr>
           <a:xfrm>
-            <a:off x="8028432" y="2788920"/>
-            <a:ext cx="3657600" cy="320040"/>
+            <a:off x="8028432" y="2999232"/>
+            <a:ext cx="3657600" cy="502920"/>
           </a:xfrm>
           <a:prstGeom prst="rect">
             <a:avLst/>
@@ -14209,14 +14288,14 @@
               <a:buNone/>
             </a:pPr>
             <a:r>
-              <a:rPr lang="en-US" sz="900" dirty="0">
-                <a:solidFill>
-                  <a:srgbClr val="64748B"/>
+              <a:rPr lang="en-US" sz="950" dirty="0">
+                <a:solidFill>
+                  <a:srgbClr val="1F2937"/>
                 </a:solidFill>
               </a:rPr>
               <a:t>Security incidents post-deployment</a:t>
             </a:r>
-            <a:endParaRPr lang="en-US" sz="900" dirty="0"/>
+            <a:endParaRPr lang="en-US" sz="950" dirty="0"/>
           </a:p>
         </p:txBody>
       </p:sp>
@@ -14228,23 +14307,23 @@
         </p:nvSpPr>
         <p:spPr>
           <a:xfrm>
-            <a:off x="8028432" y="3977640"/>
-            <a:ext cx="3657600" cy="1536192"/>
+            <a:off x="8028432" y="3968496"/>
+            <a:ext cx="3657600" cy="1572768"/>
           </a:xfrm>
           <a:prstGeom prst="rect">
             <a:avLst>
-              <a:gd name="adj" fmla="val 5952"/>
+              <a:gd name="adj" fmla="val 6977"/>
             </a:avLst>
           </a:prstGeom>
           <a:solidFill>
             <a:srgbClr val="F59E0B">
-              <a:alpha val="10000"/>
+              <a:alpha val="12000"/>
             </a:srgbClr>
           </a:solidFill>
           <a:ln w="12700">
             <a:solidFill>
               <a:srgbClr val="F59E0B">
-                <a:alpha val="35000"/>
+                <a:alpha val="45000"/>
               </a:srgbClr>
             </a:solidFill>
             <a:prstDash val="solid"/>
@@ -14259,8 +14338,8 @@
         </p:nvSpPr>
         <p:spPr>
           <a:xfrm>
-            <a:off x="8028432" y="4050792"/>
-            <a:ext cx="3657600" cy="475488"/>
+            <a:off x="8028432" y="4133088"/>
+            <a:ext cx="3657600" cy="658368"/>
           </a:xfrm>
           <a:prstGeom prst="rect">
             <a:avLst/>
@@ -14276,14 +14355,14 @@
               <a:buNone/>
             </a:pPr>
             <a:r>
-              <a:rPr lang="en-US" sz="2800" b="1" dirty="0">
+              <a:rPr lang="en-US" sz="3600" b="1" dirty="0">
                 <a:solidFill>
                   <a:srgbClr val="F59E0B"/>
                 </a:solidFill>
               </a:rPr>
               <a:t>100%</a:t>
             </a:r>
-            <a:endParaRPr lang="en-US" sz="2800" dirty="0"/>
+            <a:endParaRPr lang="en-US" sz="3600" dirty="0"/>
           </a:p>
         </p:txBody>
       </p:sp>
@@ -14295,8 +14374,8 @@
         </p:nvSpPr>
         <p:spPr>
           <a:xfrm>
-            <a:off x="8028432" y="4526280"/>
-            <a:ext cx="3657600" cy="320040"/>
+            <a:off x="8028432" y="4791456"/>
+            <a:ext cx="3657600" cy="502920"/>
           </a:xfrm>
           <a:prstGeom prst="rect">
             <a:avLst/>
@@ -14312,14 +14391,14 @@
               <a:buNone/>
             </a:pPr>
             <a:r>
-              <a:rPr lang="en-US" sz="900" dirty="0">
-                <a:solidFill>
-                  <a:srgbClr val="64748B"/>
+              <a:rPr lang="en-US" sz="950" dirty="0">
+                <a:solidFill>
+                  <a:srgbClr val="1F2937"/>
                 </a:solidFill>
               </a:rPr>
               <a:t>NESA compliance achieved</a:t>
             </a:r>
-            <a:endParaRPr lang="en-US" sz="900" dirty="0"/>
+            <a:endParaRPr lang="en-US" sz="950" dirty="0"/>
           </a:p>
         </p:txBody>
       </p:sp>
@@ -14377,9 +14456,9 @@
               <a:buNone/>
             </a:pPr>
             <a:r>
-              <a:rPr lang="en-US" sz="750" dirty="0">
-                <a:solidFill>
-                  <a:srgbClr val="7C3AED"/>
+              <a:rPr lang="en-US" sz="750" b="1" dirty="0">
+                <a:solidFill>
+                  <a:srgbClr val="5B21B6"/>
                 </a:solidFill>
               </a:rPr>
               <a:t>WeThink Technology Consulting  ·  Abu Dhabi, UAE  ·  wethink.ae  ·  © 2025</a:t>

--- a/public/WeThink-Company-Profile-2025.pptx
+++ b/public/WeThink-Company-Profile-2025.pptx
@@ -1861,6 +1861,9 @@
           <a:prstGeom prst="rect">
             <a:avLst/>
           </a:prstGeom>
+          <a:solidFill>
+            <a:srgbClr val="0C0818"/>
+          </a:solidFill>
           <a:ln/>
         </p:spPr>
       </p:sp>
@@ -2009,7 +2012,7 @@
             <a:r>
               <a:rPr lang="en-US" sz="7200" b="1" dirty="0">
                 <a:solidFill>
-                  <a:srgbClr val="C4B5FD"/>
+                  <a:srgbClr val="E9D5FF"/>
                 </a:solidFill>
               </a:rPr>
               <a:t>Think</a:t>
@@ -2033,7 +2036,7 @@
             <a:avLst/>
           </a:prstGeom>
           <a:solidFill>
-            <a:srgbClr val="D8B4FE"/>
+            <a:srgbClr val="FFFFFF"/>
           </a:solidFill>
           <a:ln w="12700">
             <a:solidFill>
@@ -2072,7 +2075,7 @@
             <a:r>
               <a:rPr lang="en-US" sz="1200" i="1" dirty="0">
                 <a:solidFill>
-                  <a:srgbClr val="E2E8F0"/>
+                  <a:srgbClr val="FFFFFF"/>
                 </a:solidFill>
               </a:rPr>
               <a:t>Engineered for the Digital Age.</a:t>
@@ -2108,7 +2111,7 @@
             <a:r>
               <a:rPr lang="en-US" sz="950" dirty="0">
                 <a:solidFill>
-                  <a:srgbClr val="D8B4FE"/>
+                  <a:srgbClr val="E9D5FF"/>
                 </a:solidFill>
               </a:rPr>
               <a:t>Abu Dhabi, UAE  ·  Est. 2019  ·  wethink.ae</a:t>
@@ -2132,7 +2135,7 @@
             <a:avLst/>
           </a:prstGeom>
           <a:solidFill>
-            <a:srgbClr val="D8B4FE"/>
+            <a:srgbClr val="FFFFFF"/>
           </a:solidFill>
           <a:ln w="12700">
             <a:solidFill>
@@ -2171,7 +2174,7 @@
             <a:r>
               <a:rPr lang="en-US" sz="950" dirty="0">
                 <a:solidFill>
-                  <a:srgbClr val="E2E8F0"/>
+                  <a:srgbClr val="FFFFFF"/>
                 </a:solidFill>
               </a:rPr>
               <a:t>IT Consulting</a:t>
@@ -2195,7 +2198,7 @@
             <a:avLst/>
           </a:prstGeom>
           <a:solidFill>
-            <a:srgbClr val="D8B4FE"/>
+            <a:srgbClr val="FFFFFF"/>
           </a:solidFill>
           <a:ln w="12700">
             <a:solidFill>
@@ -2234,7 +2237,7 @@
             <a:r>
               <a:rPr lang="en-US" sz="950" dirty="0">
                 <a:solidFill>
-                  <a:srgbClr val="E2E8F0"/>
+                  <a:srgbClr val="FFFFFF"/>
                 </a:solidFill>
               </a:rPr>
               <a:t>Cloud Strategy</a:t>
@@ -2258,7 +2261,7 @@
             <a:avLst/>
           </a:prstGeom>
           <a:solidFill>
-            <a:srgbClr val="D8B4FE"/>
+            <a:srgbClr val="FFFFFF"/>
           </a:solidFill>
           <a:ln w="12700">
             <a:solidFill>
@@ -2297,7 +2300,7 @@
             <a:r>
               <a:rPr lang="en-US" sz="950" dirty="0">
                 <a:solidFill>
-                  <a:srgbClr val="E2E8F0"/>
+                  <a:srgbClr val="FFFFFF"/>
                 </a:solidFill>
               </a:rPr>
               <a:t>Cybersecurity</a:t>
@@ -2321,7 +2324,7 @@
             <a:avLst/>
           </a:prstGeom>
           <a:solidFill>
-            <a:srgbClr val="D8B4FE"/>
+            <a:srgbClr val="FFFFFF"/>
           </a:solidFill>
           <a:ln w="12700">
             <a:solidFill>
@@ -2360,7 +2363,7 @@
             <a:r>
               <a:rPr lang="en-US" sz="950" dirty="0">
                 <a:solidFill>
-                  <a:srgbClr val="E2E8F0"/>
+                  <a:srgbClr val="FFFFFF"/>
                 </a:solidFill>
               </a:rPr>
               <a:t>Custom Software</a:t>
@@ -2496,9 +2499,7 @@
             <a:avLst/>
           </a:prstGeom>
           <a:solidFill>
-            <a:srgbClr val="3B0764">
-              <a:alpha val="60000"/>
-            </a:srgbClr>
+            <a:srgbClr val="1E1040"/>
           </a:solidFill>
           <a:ln w="12700">
             <a:solidFill>
@@ -2537,7 +2538,7 @@
             <a:r>
               <a:rPr lang="en-US" sz="750" dirty="0">
                 <a:solidFill>
-                  <a:srgbClr val="C4B5FD"/>
+                  <a:srgbClr val="E9D5FF"/>
                 </a:solidFill>
               </a:rPr>
               <a:t>WeThink Technology Consulting  ·  Abu Dhabi, UAE  ·  wethink.ae  ·  © 2025</a:t>
@@ -3538,6 +3539,9 @@
           <a:prstGeom prst="rect">
             <a:avLst/>
           </a:prstGeom>
+          <a:solidFill>
+            <a:srgbClr val="0C0818"/>
+          </a:solidFill>
           <a:ln/>
         </p:spPr>
       </p:sp>
@@ -3638,7 +3642,7 @@
             <a:avLst/>
           </a:prstGeom>
           <a:solidFill>
-            <a:srgbClr val="C4B5FD"/>
+            <a:srgbClr val="FFFFFF"/>
           </a:solidFill>
           <a:ln w="12700">
             <a:solidFill>
@@ -3677,7 +3681,7 @@
             <a:r>
               <a:rPr lang="en-US" sz="750" b="1" spc="200" kern="0" dirty="0">
                 <a:solidFill>
-                  <a:srgbClr val="C4B5FD"/>
+                  <a:srgbClr val="FFFFFF"/>
                 </a:solidFill>
               </a:rPr>
               <a:t>BY THE NUMBERS</a:t>
@@ -3749,7 +3753,7 @@
             <a:r>
               <a:rPr lang="en-US" sz="4400" b="1" dirty="0">
                 <a:solidFill>
-                  <a:srgbClr val="C4B5FD"/>
+                  <a:srgbClr val="E9D5FF"/>
                 </a:solidFill>
               </a:rPr>
               <a:t>Define Us</a:t>
@@ -3775,14 +3779,12 @@
             </a:avLst>
           </a:prstGeom>
           <a:solidFill>
-            <a:srgbClr val="A78BFA">
-              <a:alpha val="22000"/>
-            </a:srgbClr>
+            <a:srgbClr val="1E1040"/>
           </a:solidFill>
           <a:ln w="12700">
             <a:solidFill>
-              <a:srgbClr val="A78BFA">
-                <a:alpha val="55000"/>
+              <a:srgbClr val="7C3AED">
+                <a:alpha val="80000"/>
               </a:srgbClr>
             </a:solidFill>
             <a:prstDash val="solid"/>
@@ -3791,506 +3793,20 @@
       </p:sp>
       <p:sp>
         <p:nvSpPr>
-          <p:cNvPr id="11" name="Text 9"/>
-          <p:cNvSpPr/>
-          <p:nvPr/>
-        </p:nvSpPr>
-        <p:spPr>
-          <a:xfrm>
-            <a:off x="662940" y="1901952"/>
-            <a:ext cx="2084832" cy="713232"/>
-          </a:xfrm>
-          <a:prstGeom prst="rect">
-            <a:avLst/>
-          </a:prstGeom>
-          <a:noFill/>
-          <a:ln/>
-        </p:spPr>
-        <p:txBody>
-          <a:bodyPr wrap="square" rtlCol="0" anchor="ctr"/>
-          <a:lstStyle/>
-          <a:p>
-            <a:pPr algn="ctr" indent="0" marL="0">
-              <a:buNone/>
-            </a:pPr>
-            <a:r>
-              <a:rPr lang="en-US" sz="3400" b="1" dirty="0">
-                <a:solidFill>
-                  <a:srgbClr val="FFFFFF"/>
-                </a:solidFill>
-              </a:rPr>
-              <a:t>5+</a:t>
-            </a:r>
-            <a:endParaRPr lang="en-US" sz="3400" dirty="0"/>
-          </a:p>
-        </p:txBody>
-      </p:sp>
-      <p:sp>
-        <p:nvSpPr>
-          <p:cNvPr id="12" name="Text 10"/>
-          <p:cNvSpPr/>
-          <p:nvPr/>
-        </p:nvSpPr>
-        <p:spPr>
-          <a:xfrm>
-            <a:off x="662940" y="2615184"/>
-            <a:ext cx="2084832" cy="530352"/>
-          </a:xfrm>
-          <a:prstGeom prst="rect">
-            <a:avLst/>
-          </a:prstGeom>
-          <a:noFill/>
-          <a:ln/>
-        </p:spPr>
-        <p:txBody>
-          <a:bodyPr wrap="square" rtlCol="0" anchor="ctr"/>
-          <a:lstStyle/>
-          <a:p>
-            <a:pPr algn="ctr" indent="0" marL="0">
-              <a:buNone/>
-            </a:pPr>
-            <a:r>
-              <a:rPr lang="en-US" sz="900" dirty="0">
-                <a:solidFill>
-                  <a:srgbClr val="CBD5E1"/>
-                </a:solidFill>
-              </a:rPr>
-              <a:t>Years of Excellence</a:t>
-            </a:r>
-            <a:endParaRPr lang="en-US" sz="900" dirty="0"/>
-          </a:p>
-        </p:txBody>
-      </p:sp>
-      <p:sp>
-        <p:nvSpPr>
-          <p:cNvPr id="13" name="Shape 11"/>
-          <p:cNvSpPr/>
-          <p:nvPr/>
-        </p:nvSpPr>
-        <p:spPr>
-          <a:xfrm>
-            <a:off x="2857500" y="1828800"/>
-            <a:ext cx="2084832" cy="1444752"/>
-          </a:xfrm>
-          <a:prstGeom prst="rect">
-            <a:avLst>
-              <a:gd name="adj" fmla="val 7595"/>
-            </a:avLst>
-          </a:prstGeom>
-          <a:solidFill>
-            <a:srgbClr val="818CF8">
-              <a:alpha val="22000"/>
-            </a:srgbClr>
-          </a:solidFill>
-          <a:ln w="12700">
-            <a:solidFill>
-              <a:srgbClr val="818CF8">
-                <a:alpha val="55000"/>
-              </a:srgbClr>
-            </a:solidFill>
-            <a:prstDash val="solid"/>
-          </a:ln>
-        </p:spPr>
-      </p:sp>
-      <p:sp>
-        <p:nvSpPr>
-          <p:cNvPr id="14" name="Text 12"/>
-          <p:cNvSpPr/>
-          <p:nvPr/>
-        </p:nvSpPr>
-        <p:spPr>
-          <a:xfrm>
-            <a:off x="2857500" y="1901952"/>
-            <a:ext cx="2084832" cy="713232"/>
-          </a:xfrm>
-          <a:prstGeom prst="rect">
-            <a:avLst/>
-          </a:prstGeom>
-          <a:noFill/>
-          <a:ln/>
-        </p:spPr>
-        <p:txBody>
-          <a:bodyPr wrap="square" rtlCol="0" anchor="ctr"/>
-          <a:lstStyle/>
-          <a:p>
-            <a:pPr algn="ctr" indent="0" marL="0">
-              <a:buNone/>
-            </a:pPr>
-            <a:r>
-              <a:rPr lang="en-US" sz="3400" b="1" dirty="0">
-                <a:solidFill>
-                  <a:srgbClr val="FFFFFF"/>
-                </a:solidFill>
-              </a:rPr>
-              <a:t>5,000+</a:t>
-            </a:r>
-            <a:endParaRPr lang="en-US" sz="3400" dirty="0"/>
-          </a:p>
-        </p:txBody>
-      </p:sp>
-      <p:sp>
-        <p:nvSpPr>
-          <p:cNvPr id="15" name="Text 13"/>
-          <p:cNvSpPr/>
-          <p:nvPr/>
-        </p:nvSpPr>
-        <p:spPr>
-          <a:xfrm>
-            <a:off x="2857500" y="2615184"/>
-            <a:ext cx="2084832" cy="530352"/>
-          </a:xfrm>
-          <a:prstGeom prst="rect">
-            <a:avLst/>
-          </a:prstGeom>
-          <a:noFill/>
-          <a:ln/>
-        </p:spPr>
-        <p:txBody>
-          <a:bodyPr wrap="square" rtlCol="0" anchor="ctr"/>
-          <a:lstStyle/>
-          <a:p>
-            <a:pPr algn="ctr" indent="0" marL="0">
-              <a:buNone/>
-            </a:pPr>
-            <a:r>
-              <a:rPr lang="en-US" sz="900" dirty="0">
-                <a:solidFill>
-                  <a:srgbClr val="CBD5E1"/>
-                </a:solidFill>
-              </a:rPr>
-              <a:t>Projects Delivered</a:t>
-            </a:r>
-            <a:endParaRPr lang="en-US" sz="900" dirty="0"/>
-          </a:p>
-        </p:txBody>
-      </p:sp>
-      <p:sp>
-        <p:nvSpPr>
-          <p:cNvPr id="16" name="Shape 14"/>
-          <p:cNvSpPr/>
-          <p:nvPr/>
-        </p:nvSpPr>
-        <p:spPr>
-          <a:xfrm>
-            <a:off x="5052060" y="1828800"/>
-            <a:ext cx="2084832" cy="1444752"/>
-          </a:xfrm>
-          <a:prstGeom prst="rect">
-            <a:avLst>
-              <a:gd name="adj" fmla="val 7595"/>
-            </a:avLst>
-          </a:prstGeom>
-          <a:solidFill>
-            <a:srgbClr val="38BDF8">
-              <a:alpha val="22000"/>
-            </a:srgbClr>
-          </a:solidFill>
-          <a:ln w="12700">
-            <a:solidFill>
-              <a:srgbClr val="38BDF8">
-                <a:alpha val="55000"/>
-              </a:srgbClr>
-            </a:solidFill>
-            <a:prstDash val="solid"/>
-          </a:ln>
-        </p:spPr>
-      </p:sp>
-      <p:sp>
-        <p:nvSpPr>
-          <p:cNvPr id="17" name="Text 15"/>
-          <p:cNvSpPr/>
-          <p:nvPr/>
-        </p:nvSpPr>
-        <p:spPr>
-          <a:xfrm>
-            <a:off x="5052060" y="1901952"/>
-            <a:ext cx="2084832" cy="713232"/>
-          </a:xfrm>
-          <a:prstGeom prst="rect">
-            <a:avLst/>
-          </a:prstGeom>
-          <a:noFill/>
-          <a:ln/>
-        </p:spPr>
-        <p:txBody>
-          <a:bodyPr wrap="square" rtlCol="0" anchor="ctr"/>
-          <a:lstStyle/>
-          <a:p>
-            <a:pPr algn="ctr" indent="0" marL="0">
-              <a:buNone/>
-            </a:pPr>
-            <a:r>
-              <a:rPr lang="en-US" sz="3400" b="1" dirty="0">
-                <a:solidFill>
-                  <a:srgbClr val="FFFFFF"/>
-                </a:solidFill>
-              </a:rPr>
-              <a:t>1,000+</a:t>
-            </a:r>
-            <a:endParaRPr lang="en-US" sz="3400" dirty="0"/>
-          </a:p>
-        </p:txBody>
-      </p:sp>
-      <p:sp>
-        <p:nvSpPr>
-          <p:cNvPr id="18" name="Text 16"/>
-          <p:cNvSpPr/>
-          <p:nvPr/>
-        </p:nvSpPr>
-        <p:spPr>
-          <a:xfrm>
-            <a:off x="5052060" y="2615184"/>
-            <a:ext cx="2084832" cy="530352"/>
-          </a:xfrm>
-          <a:prstGeom prst="rect">
-            <a:avLst/>
-          </a:prstGeom>
-          <a:noFill/>
-          <a:ln/>
-        </p:spPr>
-        <p:txBody>
-          <a:bodyPr wrap="square" rtlCol="0" anchor="ctr"/>
-          <a:lstStyle/>
-          <a:p>
-            <a:pPr algn="ctr" indent="0" marL="0">
-              <a:buNone/>
-            </a:pPr>
-            <a:r>
-              <a:rPr lang="en-US" sz="900" dirty="0">
-                <a:solidFill>
-                  <a:srgbClr val="CBD5E1"/>
-                </a:solidFill>
-              </a:rPr>
-              <a:t>Clients Served</a:t>
-            </a:r>
-            <a:endParaRPr lang="en-US" sz="900" dirty="0"/>
-          </a:p>
-        </p:txBody>
-      </p:sp>
-      <p:sp>
-        <p:nvSpPr>
-          <p:cNvPr id="19" name="Shape 17"/>
-          <p:cNvSpPr/>
-          <p:nvPr/>
-        </p:nvSpPr>
-        <p:spPr>
-          <a:xfrm>
-            <a:off x="7246620" y="1828800"/>
-            <a:ext cx="2084832" cy="1444752"/>
-          </a:xfrm>
-          <a:prstGeom prst="rect">
-            <a:avLst>
-              <a:gd name="adj" fmla="val 7595"/>
-            </a:avLst>
-          </a:prstGeom>
-          <a:solidFill>
-            <a:srgbClr val="34D399">
-              <a:alpha val="22000"/>
-            </a:srgbClr>
-          </a:solidFill>
-          <a:ln w="12700">
-            <a:solidFill>
-              <a:srgbClr val="34D399">
-                <a:alpha val="55000"/>
-              </a:srgbClr>
-            </a:solidFill>
-            <a:prstDash val="solid"/>
-          </a:ln>
-        </p:spPr>
-      </p:sp>
-      <p:sp>
-        <p:nvSpPr>
-          <p:cNvPr id="20" name="Text 18"/>
-          <p:cNvSpPr/>
-          <p:nvPr/>
-        </p:nvSpPr>
-        <p:spPr>
-          <a:xfrm>
-            <a:off x="7246620" y="1901952"/>
-            <a:ext cx="2084832" cy="713232"/>
-          </a:xfrm>
-          <a:prstGeom prst="rect">
-            <a:avLst/>
-          </a:prstGeom>
-          <a:noFill/>
-          <a:ln/>
-        </p:spPr>
-        <p:txBody>
-          <a:bodyPr wrap="square" rtlCol="0" anchor="ctr"/>
-          <a:lstStyle/>
-          <a:p>
-            <a:pPr algn="ctr" indent="0" marL="0">
-              <a:buNone/>
-            </a:pPr>
-            <a:r>
-              <a:rPr lang="en-US" sz="3400" b="1" dirty="0">
-                <a:solidFill>
-                  <a:srgbClr val="FFFFFF"/>
-                </a:solidFill>
-              </a:rPr>
-              <a:t>99.98%</a:t>
-            </a:r>
-            <a:endParaRPr lang="en-US" sz="3400" dirty="0"/>
-          </a:p>
-        </p:txBody>
-      </p:sp>
-      <p:sp>
-        <p:nvSpPr>
-          <p:cNvPr id="21" name="Text 19"/>
-          <p:cNvSpPr/>
-          <p:nvPr/>
-        </p:nvSpPr>
-        <p:spPr>
-          <a:xfrm>
-            <a:off x="7246620" y="2615184"/>
-            <a:ext cx="2084832" cy="530352"/>
-          </a:xfrm>
-          <a:prstGeom prst="rect">
-            <a:avLst/>
-          </a:prstGeom>
-          <a:noFill/>
-          <a:ln/>
-        </p:spPr>
-        <p:txBody>
-          <a:bodyPr wrap="square" rtlCol="0" anchor="ctr"/>
-          <a:lstStyle/>
-          <a:p>
-            <a:pPr algn="ctr" indent="0" marL="0">
-              <a:buNone/>
-            </a:pPr>
-            <a:r>
-              <a:rPr lang="en-US" sz="900" dirty="0">
-                <a:solidFill>
-                  <a:srgbClr val="CBD5E1"/>
-                </a:solidFill>
-              </a:rPr>
-              <a:t>Average Uptime SLA</a:t>
-            </a:r>
-            <a:endParaRPr lang="en-US" sz="900" dirty="0"/>
-          </a:p>
-        </p:txBody>
-      </p:sp>
-      <p:sp>
-        <p:nvSpPr>
-          <p:cNvPr id="22" name="Shape 20"/>
-          <p:cNvSpPr/>
-          <p:nvPr/>
-        </p:nvSpPr>
-        <p:spPr>
-          <a:xfrm>
-            <a:off x="9441180" y="1828800"/>
-            <a:ext cx="2084832" cy="1444752"/>
-          </a:xfrm>
-          <a:prstGeom prst="rect">
-            <a:avLst>
-              <a:gd name="adj" fmla="val 7595"/>
-            </a:avLst>
-          </a:prstGeom>
-          <a:solidFill>
-            <a:srgbClr val="FBB124">
-              <a:alpha val="22000"/>
-            </a:srgbClr>
-          </a:solidFill>
-          <a:ln w="12700">
-            <a:solidFill>
-              <a:srgbClr val="FBB124">
-                <a:alpha val="55000"/>
-              </a:srgbClr>
-            </a:solidFill>
-            <a:prstDash val="solid"/>
-          </a:ln>
-        </p:spPr>
-      </p:sp>
-      <p:sp>
-        <p:nvSpPr>
-          <p:cNvPr id="23" name="Text 21"/>
-          <p:cNvSpPr/>
-          <p:nvPr/>
-        </p:nvSpPr>
-        <p:spPr>
-          <a:xfrm>
-            <a:off x="9441180" y="1901952"/>
-            <a:ext cx="2084832" cy="713232"/>
-          </a:xfrm>
-          <a:prstGeom prst="rect">
-            <a:avLst/>
-          </a:prstGeom>
-          <a:noFill/>
-          <a:ln/>
-        </p:spPr>
-        <p:txBody>
-          <a:bodyPr wrap="square" rtlCol="0" anchor="ctr"/>
-          <a:lstStyle/>
-          <a:p>
-            <a:pPr algn="ctr" indent="0" marL="0">
-              <a:buNone/>
-            </a:pPr>
-            <a:r>
-              <a:rPr lang="en-US" sz="3400" b="1" dirty="0">
-                <a:solidFill>
-                  <a:srgbClr val="FFFFFF"/>
-                </a:solidFill>
-              </a:rPr>
-              <a:t>8</a:t>
-            </a:r>
-            <a:endParaRPr lang="en-US" sz="3400" dirty="0"/>
-          </a:p>
-        </p:txBody>
-      </p:sp>
-      <p:sp>
-        <p:nvSpPr>
-          <p:cNvPr id="24" name="Text 22"/>
-          <p:cNvSpPr/>
-          <p:nvPr/>
-        </p:nvSpPr>
-        <p:spPr>
-          <a:xfrm>
-            <a:off x="9441180" y="2615184"/>
-            <a:ext cx="2084832" cy="530352"/>
-          </a:xfrm>
-          <a:prstGeom prst="rect">
-            <a:avLst/>
-          </a:prstGeom>
-          <a:noFill/>
-          <a:ln/>
-        </p:spPr>
-        <p:txBody>
-          <a:bodyPr wrap="square" rtlCol="0" anchor="ctr"/>
-          <a:lstStyle/>
-          <a:p>
-            <a:pPr algn="ctr" indent="0" marL="0">
-              <a:buNone/>
-            </a:pPr>
-            <a:r>
-              <a:rPr lang="en-US" sz="900" dirty="0">
-                <a:solidFill>
-                  <a:srgbClr val="CBD5E1"/>
-                </a:solidFill>
-              </a:rPr>
-              <a:t>Core Service Areas</a:t>
-            </a:r>
-            <a:endParaRPr lang="en-US" sz="900" dirty="0"/>
-          </a:p>
-        </p:txBody>
-      </p:sp>
-      <p:sp>
-        <p:nvSpPr>
-          <p:cNvPr id="25" name="Shape 23"/>
-          <p:cNvSpPr/>
-          <p:nvPr/>
-        </p:nvSpPr>
-        <p:spPr>
-          <a:xfrm>
-            <a:off x="502920" y="3456432"/>
-            <a:ext cx="11183112" cy="36576"/>
-          </a:xfrm>
-          <a:prstGeom prst="rect">
-            <a:avLst/>
-          </a:prstGeom>
-          <a:solidFill>
-            <a:srgbClr val="5B21B6">
-              <a:alpha val="50000"/>
-            </a:srgbClr>
+          <p:cNvPr id="11" name="Shape 9"/>
+          <p:cNvSpPr/>
+          <p:nvPr/>
+        </p:nvSpPr>
+        <p:spPr>
+          <a:xfrm>
+            <a:off x="662940" y="1828800"/>
+            <a:ext cx="2084832" cy="54864"/>
+          </a:xfrm>
+          <a:prstGeom prst="rect">
+            <a:avLst/>
+          </a:prstGeom>
+          <a:solidFill>
+            <a:srgbClr val="7C3AED"/>
           </a:solidFill>
           <a:ln w="12700">
             <a:solidFill>
@@ -4304,56 +3820,121 @@
       </p:sp>
       <p:sp>
         <p:nvSpPr>
-          <p:cNvPr id="26" name="Text 24"/>
-          <p:cNvSpPr/>
-          <p:nvPr/>
-        </p:nvSpPr>
-        <p:spPr>
-          <a:xfrm>
-            <a:off x="502920" y="3566160"/>
-            <a:ext cx="11183112" cy="347472"/>
-          </a:xfrm>
-          <a:prstGeom prst="rect">
-            <a:avLst/>
-          </a:prstGeom>
-          <a:noFill/>
-          <a:ln/>
-        </p:spPr>
-        <p:txBody>
-          <a:bodyPr wrap="square" rtlCol="0" anchor="ctr"/>
-          <a:lstStyle/>
-          <a:p>
-            <a:pPr indent="0" marL="0">
-              <a:buNone/>
-            </a:pPr>
-            <a:r>
-              <a:rPr lang="en-US" sz="1700" b="1" dirty="0">
+          <p:cNvPr id="12" name="Text 10"/>
+          <p:cNvSpPr/>
+          <p:nvPr/>
+        </p:nvSpPr>
+        <p:spPr>
+          <a:xfrm>
+            <a:off x="662940" y="1920240"/>
+            <a:ext cx="2084832" cy="713232"/>
+          </a:xfrm>
+          <a:prstGeom prst="rect">
+            <a:avLst/>
+          </a:prstGeom>
+          <a:noFill/>
+          <a:ln/>
+        </p:spPr>
+        <p:txBody>
+          <a:bodyPr wrap="square" rtlCol="0" anchor="ctr"/>
+          <a:lstStyle/>
+          <a:p>
+            <a:pPr algn="ctr" indent="0" marL="0">
+              <a:buNone/>
+            </a:pPr>
+            <a:r>
+              <a:rPr lang="en-US" sz="3400" b="1" dirty="0">
                 <a:solidFill>
                   <a:srgbClr val="FFFFFF"/>
                 </a:solidFill>
               </a:rPr>
-              <a:t>Key Achievements</a:t>
-            </a:r>
-            <a:endParaRPr lang="en-US" sz="1700" dirty="0"/>
-          </a:p>
-        </p:txBody>
-      </p:sp>
-      <p:sp>
-        <p:nvSpPr>
-          <p:cNvPr id="27" name="Shape 25"/>
-          <p:cNvSpPr/>
-          <p:nvPr/>
-        </p:nvSpPr>
-        <p:spPr>
-          <a:xfrm>
-            <a:off x="502920" y="4050792"/>
-            <a:ext cx="91440" cy="91440"/>
-          </a:xfrm>
-          <a:prstGeom prst="ellipse">
-            <a:avLst/>
-          </a:prstGeom>
-          <a:solidFill>
-            <a:srgbClr val="A78BFA"/>
+              <a:t>5+</a:t>
+            </a:r>
+            <a:endParaRPr lang="en-US" sz="3400" dirty="0"/>
+          </a:p>
+        </p:txBody>
+      </p:sp>
+      <p:sp>
+        <p:nvSpPr>
+          <p:cNvPr id="13" name="Text 11"/>
+          <p:cNvSpPr/>
+          <p:nvPr/>
+        </p:nvSpPr>
+        <p:spPr>
+          <a:xfrm>
+            <a:off x="662940" y="2633472"/>
+            <a:ext cx="2084832" cy="530352"/>
+          </a:xfrm>
+          <a:prstGeom prst="rect">
+            <a:avLst/>
+          </a:prstGeom>
+          <a:noFill/>
+          <a:ln/>
+        </p:spPr>
+        <p:txBody>
+          <a:bodyPr wrap="square" rtlCol="0" anchor="ctr"/>
+          <a:lstStyle/>
+          <a:p>
+            <a:pPr algn="ctr" indent="0" marL="0">
+              <a:buNone/>
+            </a:pPr>
+            <a:r>
+              <a:rPr lang="en-US" sz="900" dirty="0">
+                <a:solidFill>
+                  <a:srgbClr val="E2E8F0"/>
+                </a:solidFill>
+              </a:rPr>
+              <a:t>Years of Excellence</a:t>
+            </a:r>
+            <a:endParaRPr lang="en-US" sz="900" dirty="0"/>
+          </a:p>
+        </p:txBody>
+      </p:sp>
+      <p:sp>
+        <p:nvSpPr>
+          <p:cNvPr id="14" name="Shape 12"/>
+          <p:cNvSpPr/>
+          <p:nvPr/>
+        </p:nvSpPr>
+        <p:spPr>
+          <a:xfrm>
+            <a:off x="2857500" y="1828800"/>
+            <a:ext cx="2084832" cy="1444752"/>
+          </a:xfrm>
+          <a:prstGeom prst="rect">
+            <a:avLst>
+              <a:gd name="adj" fmla="val 7595"/>
+            </a:avLst>
+          </a:prstGeom>
+          <a:solidFill>
+            <a:srgbClr val="1E1040"/>
+          </a:solidFill>
+          <a:ln w="12700">
+            <a:solidFill>
+              <a:srgbClr val="4F46E5">
+                <a:alpha val="80000"/>
+              </a:srgbClr>
+            </a:solidFill>
+            <a:prstDash val="solid"/>
+          </a:ln>
+        </p:spPr>
+      </p:sp>
+      <p:sp>
+        <p:nvSpPr>
+          <p:cNvPr id="15" name="Shape 13"/>
+          <p:cNvSpPr/>
+          <p:nvPr/>
+        </p:nvSpPr>
+        <p:spPr>
+          <a:xfrm>
+            <a:off x="2857500" y="1828800"/>
+            <a:ext cx="2084832" cy="54864"/>
+          </a:xfrm>
+          <a:prstGeom prst="rect">
+            <a:avLst/>
+          </a:prstGeom>
+          <a:solidFill>
+            <a:srgbClr val="4F46E5"/>
           </a:solidFill>
           <a:ln w="12700">
             <a:solidFill>
@@ -4367,56 +3948,121 @@
       </p:sp>
       <p:sp>
         <p:nvSpPr>
-          <p:cNvPr id="28" name="Text 26"/>
-          <p:cNvSpPr/>
-          <p:nvPr/>
-        </p:nvSpPr>
-        <p:spPr>
-          <a:xfrm>
-            <a:off x="685800" y="3986784"/>
-            <a:ext cx="5303520" cy="420624"/>
-          </a:xfrm>
-          <a:prstGeom prst="rect">
-            <a:avLst/>
-          </a:prstGeom>
-          <a:noFill/>
-          <a:ln/>
-        </p:spPr>
-        <p:txBody>
-          <a:bodyPr wrap="square" rtlCol="0" anchor="ctr"/>
-          <a:lstStyle/>
-          <a:p>
-            <a:pPr indent="0" marL="0">
-              <a:buNone/>
-            </a:pPr>
-            <a:r>
-              <a:rPr lang="en-US" sz="950" dirty="0">
+          <p:cNvPr id="16" name="Text 14"/>
+          <p:cNvSpPr/>
+          <p:nvPr/>
+        </p:nvSpPr>
+        <p:spPr>
+          <a:xfrm>
+            <a:off x="2857500" y="1920240"/>
+            <a:ext cx="2084832" cy="713232"/>
+          </a:xfrm>
+          <a:prstGeom prst="rect">
+            <a:avLst/>
+          </a:prstGeom>
+          <a:noFill/>
+          <a:ln/>
+        </p:spPr>
+        <p:txBody>
+          <a:bodyPr wrap="square" rtlCol="0" anchor="ctr"/>
+          <a:lstStyle/>
+          <a:p>
+            <a:pPr algn="ctr" indent="0" marL="0">
+              <a:buNone/>
+            </a:pPr>
+            <a:r>
+              <a:rPr lang="en-US" sz="3400" b="1" dirty="0">
+                <a:solidFill>
+                  <a:srgbClr val="FFFFFF"/>
+                </a:solidFill>
+              </a:rPr>
+              <a:t>5,000+</a:t>
+            </a:r>
+            <a:endParaRPr lang="en-US" sz="3400" dirty="0"/>
+          </a:p>
+        </p:txBody>
+      </p:sp>
+      <p:sp>
+        <p:nvSpPr>
+          <p:cNvPr id="17" name="Text 15"/>
+          <p:cNvSpPr/>
+          <p:nvPr/>
+        </p:nvSpPr>
+        <p:spPr>
+          <a:xfrm>
+            <a:off x="2857500" y="2633472"/>
+            <a:ext cx="2084832" cy="530352"/>
+          </a:xfrm>
+          <a:prstGeom prst="rect">
+            <a:avLst/>
+          </a:prstGeom>
+          <a:noFill/>
+          <a:ln/>
+        </p:spPr>
+        <p:txBody>
+          <a:bodyPr wrap="square" rtlCol="0" anchor="ctr"/>
+          <a:lstStyle/>
+          <a:p>
+            <a:pPr algn="ctr" indent="0" marL="0">
+              <a:buNone/>
+            </a:pPr>
+            <a:r>
+              <a:rPr lang="en-US" sz="900" dirty="0">
                 <a:solidFill>
                   <a:srgbClr val="E2E8F0"/>
                 </a:solidFill>
               </a:rPr>
-              <a:t>ISO 27001 certification programmes completed in under 9 months</a:t>
-            </a:r>
-            <a:endParaRPr lang="en-US" sz="950" dirty="0"/>
-          </a:p>
-        </p:txBody>
-      </p:sp>
-      <p:sp>
-        <p:nvSpPr>
-          <p:cNvPr id="29" name="Shape 27"/>
-          <p:cNvSpPr/>
-          <p:nvPr/>
-        </p:nvSpPr>
-        <p:spPr>
-          <a:xfrm>
-            <a:off x="6185916" y="4050792"/>
-            <a:ext cx="91440" cy="91440"/>
-          </a:xfrm>
-          <a:prstGeom prst="ellipse">
-            <a:avLst/>
-          </a:prstGeom>
-          <a:solidFill>
-            <a:srgbClr val="38BDF8"/>
+              <a:t>Projects Delivered</a:t>
+            </a:r>
+            <a:endParaRPr lang="en-US" sz="900" dirty="0"/>
+          </a:p>
+        </p:txBody>
+      </p:sp>
+      <p:sp>
+        <p:nvSpPr>
+          <p:cNvPr id="18" name="Shape 16"/>
+          <p:cNvSpPr/>
+          <p:nvPr/>
+        </p:nvSpPr>
+        <p:spPr>
+          <a:xfrm>
+            <a:off x="5052060" y="1828800"/>
+            <a:ext cx="2084832" cy="1444752"/>
+          </a:xfrm>
+          <a:prstGeom prst="rect">
+            <a:avLst>
+              <a:gd name="adj" fmla="val 7595"/>
+            </a:avLst>
+          </a:prstGeom>
+          <a:solidFill>
+            <a:srgbClr val="1E1040"/>
+          </a:solidFill>
+          <a:ln w="12700">
+            <a:solidFill>
+              <a:srgbClr val="0EA5E9">
+                <a:alpha val="80000"/>
+              </a:srgbClr>
+            </a:solidFill>
+            <a:prstDash val="solid"/>
+          </a:ln>
+        </p:spPr>
+      </p:sp>
+      <p:sp>
+        <p:nvSpPr>
+          <p:cNvPr id="19" name="Shape 17"/>
+          <p:cNvSpPr/>
+          <p:nvPr/>
+        </p:nvSpPr>
+        <p:spPr>
+          <a:xfrm>
+            <a:off x="5052060" y="1828800"/>
+            <a:ext cx="2084832" cy="54864"/>
+          </a:xfrm>
+          <a:prstGeom prst="rect">
+            <a:avLst/>
+          </a:prstGeom>
+          <a:solidFill>
+            <a:srgbClr val="0EA5E9"/>
           </a:solidFill>
           <a:ln w="12700">
             <a:solidFill>
@@ -4430,56 +4076,121 @@
       </p:sp>
       <p:sp>
         <p:nvSpPr>
-          <p:cNvPr id="30" name="Text 28"/>
-          <p:cNvSpPr/>
-          <p:nvPr/>
-        </p:nvSpPr>
-        <p:spPr>
-          <a:xfrm>
-            <a:off x="6368796" y="3986784"/>
-            <a:ext cx="5303520" cy="420624"/>
-          </a:xfrm>
-          <a:prstGeom prst="rect">
-            <a:avLst/>
-          </a:prstGeom>
-          <a:noFill/>
-          <a:ln/>
-        </p:spPr>
-        <p:txBody>
-          <a:bodyPr wrap="square" rtlCol="0" anchor="ctr"/>
-          <a:lstStyle/>
-          <a:p>
-            <a:pPr indent="0" marL="0">
-              <a:buNone/>
-            </a:pPr>
-            <a:r>
-              <a:rPr lang="en-US" sz="950" dirty="0">
+          <p:cNvPr id="20" name="Text 18"/>
+          <p:cNvSpPr/>
+          <p:nvPr/>
+        </p:nvSpPr>
+        <p:spPr>
+          <a:xfrm>
+            <a:off x="5052060" y="1920240"/>
+            <a:ext cx="2084832" cy="713232"/>
+          </a:xfrm>
+          <a:prstGeom prst="rect">
+            <a:avLst/>
+          </a:prstGeom>
+          <a:noFill/>
+          <a:ln/>
+        </p:spPr>
+        <p:txBody>
+          <a:bodyPr wrap="square" rtlCol="0" anchor="ctr"/>
+          <a:lstStyle/>
+          <a:p>
+            <a:pPr algn="ctr" indent="0" marL="0">
+              <a:buNone/>
+            </a:pPr>
+            <a:r>
+              <a:rPr lang="en-US" sz="3400" b="1" dirty="0">
+                <a:solidFill>
+                  <a:srgbClr val="FFFFFF"/>
+                </a:solidFill>
+              </a:rPr>
+              <a:t>1,000+</a:t>
+            </a:r>
+            <a:endParaRPr lang="en-US" sz="3400" dirty="0"/>
+          </a:p>
+        </p:txBody>
+      </p:sp>
+      <p:sp>
+        <p:nvSpPr>
+          <p:cNvPr id="21" name="Text 19"/>
+          <p:cNvSpPr/>
+          <p:nvPr/>
+        </p:nvSpPr>
+        <p:spPr>
+          <a:xfrm>
+            <a:off x="5052060" y="2633472"/>
+            <a:ext cx="2084832" cy="530352"/>
+          </a:xfrm>
+          <a:prstGeom prst="rect">
+            <a:avLst/>
+          </a:prstGeom>
+          <a:noFill/>
+          <a:ln/>
+        </p:spPr>
+        <p:txBody>
+          <a:bodyPr wrap="square" rtlCol="0" anchor="ctr"/>
+          <a:lstStyle/>
+          <a:p>
+            <a:pPr algn="ctr" indent="0" marL="0">
+              <a:buNone/>
+            </a:pPr>
+            <a:r>
+              <a:rPr lang="en-US" sz="900" dirty="0">
                 <a:solidFill>
                   <a:srgbClr val="E2E8F0"/>
                 </a:solidFill>
               </a:rPr>
-              <a:t>Zero-downtime cloud migrations delivered across financial sector clients</a:t>
-            </a:r>
-            <a:endParaRPr lang="en-US" sz="950" dirty="0"/>
-          </a:p>
-        </p:txBody>
-      </p:sp>
-      <p:sp>
-        <p:nvSpPr>
-          <p:cNvPr id="31" name="Shape 29"/>
-          <p:cNvSpPr/>
-          <p:nvPr/>
-        </p:nvSpPr>
-        <p:spPr>
-          <a:xfrm>
-            <a:off x="502920" y="4526280"/>
-            <a:ext cx="91440" cy="91440"/>
-          </a:xfrm>
-          <a:prstGeom prst="ellipse">
-            <a:avLst/>
-          </a:prstGeom>
-          <a:solidFill>
-            <a:srgbClr val="34D399"/>
+              <a:t>Clients Served</a:t>
+            </a:r>
+            <a:endParaRPr lang="en-US" sz="900" dirty="0"/>
+          </a:p>
+        </p:txBody>
+      </p:sp>
+      <p:sp>
+        <p:nvSpPr>
+          <p:cNvPr id="22" name="Shape 20"/>
+          <p:cNvSpPr/>
+          <p:nvPr/>
+        </p:nvSpPr>
+        <p:spPr>
+          <a:xfrm>
+            <a:off x="7246620" y="1828800"/>
+            <a:ext cx="2084832" cy="1444752"/>
+          </a:xfrm>
+          <a:prstGeom prst="rect">
+            <a:avLst>
+              <a:gd name="adj" fmla="val 7595"/>
+            </a:avLst>
+          </a:prstGeom>
+          <a:solidFill>
+            <a:srgbClr val="1E1040"/>
+          </a:solidFill>
+          <a:ln w="12700">
+            <a:solidFill>
+              <a:srgbClr val="059669">
+                <a:alpha val="80000"/>
+              </a:srgbClr>
+            </a:solidFill>
+            <a:prstDash val="solid"/>
+          </a:ln>
+        </p:spPr>
+      </p:sp>
+      <p:sp>
+        <p:nvSpPr>
+          <p:cNvPr id="23" name="Shape 21"/>
+          <p:cNvSpPr/>
+          <p:nvPr/>
+        </p:nvSpPr>
+        <p:spPr>
+          <a:xfrm>
+            <a:off x="7246620" y="1828800"/>
+            <a:ext cx="2084832" cy="54864"/>
+          </a:xfrm>
+          <a:prstGeom prst="rect">
+            <a:avLst/>
+          </a:prstGeom>
+          <a:solidFill>
+            <a:srgbClr val="059669"/>
           </a:solidFill>
           <a:ln w="12700">
             <a:solidFill>
@@ -4493,56 +4204,121 @@
       </p:sp>
       <p:sp>
         <p:nvSpPr>
-          <p:cNvPr id="32" name="Text 30"/>
-          <p:cNvSpPr/>
-          <p:nvPr/>
-        </p:nvSpPr>
-        <p:spPr>
-          <a:xfrm>
-            <a:off x="685800" y="4462272"/>
-            <a:ext cx="5303520" cy="420624"/>
-          </a:xfrm>
-          <a:prstGeom prst="rect">
-            <a:avLst/>
-          </a:prstGeom>
-          <a:noFill/>
-          <a:ln/>
-        </p:spPr>
-        <p:txBody>
-          <a:bodyPr wrap="square" rtlCol="0" anchor="ctr"/>
-          <a:lstStyle/>
-          <a:p>
-            <a:pPr indent="0" marL="0">
-              <a:buNone/>
-            </a:pPr>
-            <a:r>
-              <a:rPr lang="en-US" sz="950" dirty="0">
+          <p:cNvPr id="24" name="Text 22"/>
+          <p:cNvSpPr/>
+          <p:nvPr/>
+        </p:nvSpPr>
+        <p:spPr>
+          <a:xfrm>
+            <a:off x="7246620" y="1920240"/>
+            <a:ext cx="2084832" cy="713232"/>
+          </a:xfrm>
+          <a:prstGeom prst="rect">
+            <a:avLst/>
+          </a:prstGeom>
+          <a:noFill/>
+          <a:ln/>
+        </p:spPr>
+        <p:txBody>
+          <a:bodyPr wrap="square" rtlCol="0" anchor="ctr"/>
+          <a:lstStyle/>
+          <a:p>
+            <a:pPr algn="ctr" indent="0" marL="0">
+              <a:buNone/>
+            </a:pPr>
+            <a:r>
+              <a:rPr lang="en-US" sz="3400" b="1" dirty="0">
+                <a:solidFill>
+                  <a:srgbClr val="FFFFFF"/>
+                </a:solidFill>
+              </a:rPr>
+              <a:t>99.98%</a:t>
+            </a:r>
+            <a:endParaRPr lang="en-US" sz="3400" dirty="0"/>
+          </a:p>
+        </p:txBody>
+      </p:sp>
+      <p:sp>
+        <p:nvSpPr>
+          <p:cNvPr id="25" name="Text 23"/>
+          <p:cNvSpPr/>
+          <p:nvPr/>
+        </p:nvSpPr>
+        <p:spPr>
+          <a:xfrm>
+            <a:off x="7246620" y="2633472"/>
+            <a:ext cx="2084832" cy="530352"/>
+          </a:xfrm>
+          <a:prstGeom prst="rect">
+            <a:avLst/>
+          </a:prstGeom>
+          <a:noFill/>
+          <a:ln/>
+        </p:spPr>
+        <p:txBody>
+          <a:bodyPr wrap="square" rtlCol="0" anchor="ctr"/>
+          <a:lstStyle/>
+          <a:p>
+            <a:pPr algn="ctr" indent="0" marL="0">
+              <a:buNone/>
+            </a:pPr>
+            <a:r>
+              <a:rPr lang="en-US" sz="900" dirty="0">
                 <a:solidFill>
                   <a:srgbClr val="E2E8F0"/>
                 </a:solidFill>
               </a:rPr>
-              <a:t>Trusted technology partner for UAE Federal and Emirate Government entities</a:t>
-            </a:r>
-            <a:endParaRPr lang="en-US" sz="950" dirty="0"/>
-          </a:p>
-        </p:txBody>
-      </p:sp>
-      <p:sp>
-        <p:nvSpPr>
-          <p:cNvPr id="33" name="Shape 31"/>
-          <p:cNvSpPr/>
-          <p:nvPr/>
-        </p:nvSpPr>
-        <p:spPr>
-          <a:xfrm>
-            <a:off x="6185916" y="4526280"/>
-            <a:ext cx="91440" cy="91440"/>
-          </a:xfrm>
-          <a:prstGeom prst="ellipse">
-            <a:avLst/>
-          </a:prstGeom>
-          <a:solidFill>
-            <a:srgbClr val="FBB124"/>
+              <a:t>Average Uptime SLA</a:t>
+            </a:r>
+            <a:endParaRPr lang="en-US" sz="900" dirty="0"/>
+          </a:p>
+        </p:txBody>
+      </p:sp>
+      <p:sp>
+        <p:nvSpPr>
+          <p:cNvPr id="26" name="Shape 24"/>
+          <p:cNvSpPr/>
+          <p:nvPr/>
+        </p:nvSpPr>
+        <p:spPr>
+          <a:xfrm>
+            <a:off x="9441180" y="1828800"/>
+            <a:ext cx="2084832" cy="1444752"/>
+          </a:xfrm>
+          <a:prstGeom prst="rect">
+            <a:avLst>
+              <a:gd name="adj" fmla="val 7595"/>
+            </a:avLst>
+          </a:prstGeom>
+          <a:solidFill>
+            <a:srgbClr val="1E1040"/>
+          </a:solidFill>
+          <a:ln w="12700">
+            <a:solidFill>
+              <a:srgbClr val="D97706">
+                <a:alpha val="80000"/>
+              </a:srgbClr>
+            </a:solidFill>
+            <a:prstDash val="solid"/>
+          </a:ln>
+        </p:spPr>
+      </p:sp>
+      <p:sp>
+        <p:nvSpPr>
+          <p:cNvPr id="27" name="Shape 25"/>
+          <p:cNvSpPr/>
+          <p:nvPr/>
+        </p:nvSpPr>
+        <p:spPr>
+          <a:xfrm>
+            <a:off x="9441180" y="1828800"/>
+            <a:ext cx="2084832" cy="54864"/>
+          </a:xfrm>
+          <a:prstGeom prst="rect">
+            <a:avLst/>
+          </a:prstGeom>
+          <a:solidFill>
+            <a:srgbClr val="D97706"/>
           </a:solidFill>
           <a:ln w="12700">
             <a:solidFill>
@@ -4556,56 +4332,94 @@
       </p:sp>
       <p:sp>
         <p:nvSpPr>
-          <p:cNvPr id="34" name="Text 32"/>
-          <p:cNvSpPr/>
-          <p:nvPr/>
-        </p:nvSpPr>
-        <p:spPr>
-          <a:xfrm>
-            <a:off x="6368796" y="4462272"/>
-            <a:ext cx="5303520" cy="420624"/>
-          </a:xfrm>
-          <a:prstGeom prst="rect">
-            <a:avLst/>
-          </a:prstGeom>
-          <a:noFill/>
-          <a:ln/>
-        </p:spPr>
-        <p:txBody>
-          <a:bodyPr wrap="square" rtlCol="0" anchor="ctr"/>
-          <a:lstStyle/>
-          <a:p>
-            <a:pPr indent="0" marL="0">
-              <a:buNone/>
-            </a:pPr>
-            <a:r>
-              <a:rPr lang="en-US" sz="950" dirty="0">
+          <p:cNvPr id="28" name="Text 26"/>
+          <p:cNvSpPr/>
+          <p:nvPr/>
+        </p:nvSpPr>
+        <p:spPr>
+          <a:xfrm>
+            <a:off x="9441180" y="1920240"/>
+            <a:ext cx="2084832" cy="713232"/>
+          </a:xfrm>
+          <a:prstGeom prst="rect">
+            <a:avLst/>
+          </a:prstGeom>
+          <a:noFill/>
+          <a:ln/>
+        </p:spPr>
+        <p:txBody>
+          <a:bodyPr wrap="square" rtlCol="0" anchor="ctr"/>
+          <a:lstStyle/>
+          <a:p>
+            <a:pPr algn="ctr" indent="0" marL="0">
+              <a:buNone/>
+            </a:pPr>
+            <a:r>
+              <a:rPr lang="en-US" sz="3400" b="1" dirty="0">
+                <a:solidFill>
+                  <a:srgbClr val="FFFFFF"/>
+                </a:solidFill>
+              </a:rPr>
+              <a:t>8</a:t>
+            </a:r>
+            <a:endParaRPr lang="en-US" sz="3400" dirty="0"/>
+          </a:p>
+        </p:txBody>
+      </p:sp>
+      <p:sp>
+        <p:nvSpPr>
+          <p:cNvPr id="29" name="Text 27"/>
+          <p:cNvSpPr/>
+          <p:nvPr/>
+        </p:nvSpPr>
+        <p:spPr>
+          <a:xfrm>
+            <a:off x="9441180" y="2633472"/>
+            <a:ext cx="2084832" cy="530352"/>
+          </a:xfrm>
+          <a:prstGeom prst="rect">
+            <a:avLst/>
+          </a:prstGeom>
+          <a:noFill/>
+          <a:ln/>
+        </p:spPr>
+        <p:txBody>
+          <a:bodyPr wrap="square" rtlCol="0" anchor="ctr"/>
+          <a:lstStyle/>
+          <a:p>
+            <a:pPr algn="ctr" indent="0" marL="0">
+              <a:buNone/>
+            </a:pPr>
+            <a:r>
+              <a:rPr lang="en-US" sz="900" dirty="0">
                 <a:solidFill>
                   <a:srgbClr val="E2E8F0"/>
                 </a:solidFill>
               </a:rPr>
-              <a:t>Custom platforms serving 18,000+ daily active users across UAE university campuses</a:t>
-            </a:r>
-            <a:endParaRPr lang="en-US" sz="950" dirty="0"/>
-          </a:p>
-        </p:txBody>
-      </p:sp>
-      <p:sp>
-        <p:nvSpPr>
-          <p:cNvPr id="35" name="Shape 33"/>
-          <p:cNvSpPr/>
-          <p:nvPr/>
-        </p:nvSpPr>
-        <p:spPr>
-          <a:xfrm>
-            <a:off x="502920" y="5001768"/>
-            <a:ext cx="91440" cy="91440"/>
-          </a:xfrm>
-          <a:prstGeom prst="ellipse">
-            <a:avLst/>
-          </a:prstGeom>
-          <a:solidFill>
-            <a:srgbClr val="818CF8"/>
+              <a:t>Core Service Areas</a:t>
+            </a:r>
+            <a:endParaRPr lang="en-US" sz="900" dirty="0"/>
+          </a:p>
+        </p:txBody>
+      </p:sp>
+      <p:sp>
+        <p:nvSpPr>
+          <p:cNvPr id="30" name="Shape 28"/>
+          <p:cNvSpPr/>
+          <p:nvPr/>
+        </p:nvSpPr>
+        <p:spPr>
+          <a:xfrm>
+            <a:off x="502920" y="3456432"/>
+            <a:ext cx="11183112" cy="36576"/>
+          </a:xfrm>
+          <a:prstGeom prst="rect">
+            <a:avLst/>
+          </a:prstGeom>
+          <a:solidFill>
+            <a:srgbClr val="FFFFFF">
+              <a:alpha val="30000"/>
+            </a:srgbClr>
           </a:solidFill>
           <a:ln w="12700">
             <a:solidFill>
@@ -4619,56 +4433,56 @@
       </p:sp>
       <p:sp>
         <p:nvSpPr>
-          <p:cNvPr id="36" name="Text 34"/>
-          <p:cNvSpPr/>
-          <p:nvPr/>
-        </p:nvSpPr>
-        <p:spPr>
-          <a:xfrm>
-            <a:off x="685800" y="4937760"/>
-            <a:ext cx="5303520" cy="420624"/>
-          </a:xfrm>
-          <a:prstGeom prst="rect">
-            <a:avLst/>
-          </a:prstGeom>
-          <a:noFill/>
-          <a:ln/>
-        </p:spPr>
-        <p:txBody>
-          <a:bodyPr wrap="square" rtlCol="0" anchor="ctr"/>
-          <a:lstStyle/>
-          <a:p>
-            <a:pPr indent="0" marL="0">
-              <a:buNone/>
-            </a:pPr>
-            <a:r>
-              <a:rPr lang="en-US" sz="950" dirty="0">
-                <a:solidFill>
-                  <a:srgbClr val="E2E8F0"/>
-                </a:solidFill>
-              </a:rPr>
-              <a:t>Real-time BI platforms deployed across 80+ retail locations in the Gulf region</a:t>
-            </a:r>
-            <a:endParaRPr lang="en-US" sz="950" dirty="0"/>
-          </a:p>
-        </p:txBody>
-      </p:sp>
-      <p:sp>
-        <p:nvSpPr>
-          <p:cNvPr id="37" name="Shape 35"/>
-          <p:cNvSpPr/>
-          <p:nvPr/>
-        </p:nvSpPr>
-        <p:spPr>
-          <a:xfrm>
-            <a:off x="6185916" y="5001768"/>
+          <p:cNvPr id="31" name="Text 29"/>
+          <p:cNvSpPr/>
+          <p:nvPr/>
+        </p:nvSpPr>
+        <p:spPr>
+          <a:xfrm>
+            <a:off x="502920" y="3566160"/>
+            <a:ext cx="11183112" cy="347472"/>
+          </a:xfrm>
+          <a:prstGeom prst="rect">
+            <a:avLst/>
+          </a:prstGeom>
+          <a:noFill/>
+          <a:ln/>
+        </p:spPr>
+        <p:txBody>
+          <a:bodyPr wrap="square" rtlCol="0" anchor="ctr"/>
+          <a:lstStyle/>
+          <a:p>
+            <a:pPr indent="0" marL="0">
+              <a:buNone/>
+            </a:pPr>
+            <a:r>
+              <a:rPr lang="en-US" sz="1700" b="1" dirty="0">
+                <a:solidFill>
+                  <a:srgbClr val="FFFFFF"/>
+                </a:solidFill>
+              </a:rPr>
+              <a:t>Key Achievements</a:t>
+            </a:r>
+            <a:endParaRPr lang="en-US" sz="1700" dirty="0"/>
+          </a:p>
+        </p:txBody>
+      </p:sp>
+      <p:sp>
+        <p:nvSpPr>
+          <p:cNvPr id="32" name="Shape 30"/>
+          <p:cNvSpPr/>
+          <p:nvPr/>
+        </p:nvSpPr>
+        <p:spPr>
+          <a:xfrm>
+            <a:off x="502920" y="4050792"/>
             <a:ext cx="91440" cy="91440"/>
           </a:xfrm>
           <a:prstGeom prst="ellipse">
             <a:avLst/>
           </a:prstGeom>
           <a:solidFill>
-            <a:srgbClr val="F87171"/>
+            <a:srgbClr val="A78BFA"/>
           </a:solidFill>
           <a:ln w="12700">
             <a:solidFill>
@@ -4682,13 +4496,13 @@
       </p:sp>
       <p:sp>
         <p:nvSpPr>
-          <p:cNvPr id="38" name="Text 36"/>
-          <p:cNvSpPr/>
-          <p:nvPr/>
-        </p:nvSpPr>
-        <p:spPr>
-          <a:xfrm>
-            <a:off x="6368796" y="4937760"/>
+          <p:cNvPr id="33" name="Text 31"/>
+          <p:cNvSpPr/>
+          <p:nvPr/>
+        </p:nvSpPr>
+        <p:spPr>
+          <a:xfrm>
+            <a:off x="685800" y="3986784"/>
             <a:ext cx="5303520" cy="420624"/>
           </a:xfrm>
           <a:prstGeom prst="rect">
@@ -4707,10 +4521,10 @@
             <a:r>
               <a:rPr lang="en-US" sz="950" dirty="0">
                 <a:solidFill>
-                  <a:srgbClr val="E2E8F0"/>
-                </a:solidFill>
-              </a:rPr>
-              <a:t>AI-powered SaaS HR platform reaching 5,000 active users within 6 months of launch</a:t>
+                  <a:srgbClr val="FFFFFF"/>
+                </a:solidFill>
+              </a:rPr>
+              <a:t>ISO 27001 certification programmes completed in under 9 months</a:t>
             </a:r>
             <a:endParaRPr lang="en-US" sz="950" dirty="0"/>
           </a:p>
@@ -4718,22 +4532,20 @@
       </p:sp>
       <p:sp>
         <p:nvSpPr>
-          <p:cNvPr id="39" name="Shape 37"/>
-          <p:cNvSpPr/>
-          <p:nvPr/>
-        </p:nvSpPr>
-        <p:spPr>
-          <a:xfrm>
-            <a:off x="0" y="6565392"/>
-            <a:ext cx="12192000" cy="292608"/>
-          </a:xfrm>
-          <a:prstGeom prst="rect">
-            <a:avLst/>
-          </a:prstGeom>
-          <a:solidFill>
-            <a:srgbClr val="3B0764">
-              <a:alpha val="60000"/>
-            </a:srgbClr>
+          <p:cNvPr id="34" name="Shape 32"/>
+          <p:cNvSpPr/>
+          <p:nvPr/>
+        </p:nvSpPr>
+        <p:spPr>
+          <a:xfrm>
+            <a:off x="6185916" y="4050792"/>
+            <a:ext cx="91440" cy="91440"/>
+          </a:xfrm>
+          <a:prstGeom prst="ellipse">
+            <a:avLst/>
+          </a:prstGeom>
+          <a:solidFill>
+            <a:srgbClr val="38BDF8"/>
           </a:solidFill>
           <a:ln w="12700">
             <a:solidFill>
@@ -4747,7 +4559,295 @@
       </p:sp>
       <p:sp>
         <p:nvSpPr>
-          <p:cNvPr id="40" name="Text 38"/>
+          <p:cNvPr id="35" name="Text 33"/>
+          <p:cNvSpPr/>
+          <p:nvPr/>
+        </p:nvSpPr>
+        <p:spPr>
+          <a:xfrm>
+            <a:off x="6368796" y="3986784"/>
+            <a:ext cx="5303520" cy="420624"/>
+          </a:xfrm>
+          <a:prstGeom prst="rect">
+            <a:avLst/>
+          </a:prstGeom>
+          <a:noFill/>
+          <a:ln/>
+        </p:spPr>
+        <p:txBody>
+          <a:bodyPr wrap="square" rtlCol="0" anchor="ctr"/>
+          <a:lstStyle/>
+          <a:p>
+            <a:pPr indent="0" marL="0">
+              <a:buNone/>
+            </a:pPr>
+            <a:r>
+              <a:rPr lang="en-US" sz="950" dirty="0">
+                <a:solidFill>
+                  <a:srgbClr val="FFFFFF"/>
+                </a:solidFill>
+              </a:rPr>
+              <a:t>Zero-downtime cloud migrations delivered across financial sector clients</a:t>
+            </a:r>
+            <a:endParaRPr lang="en-US" sz="950" dirty="0"/>
+          </a:p>
+        </p:txBody>
+      </p:sp>
+      <p:sp>
+        <p:nvSpPr>
+          <p:cNvPr id="36" name="Shape 34"/>
+          <p:cNvSpPr/>
+          <p:nvPr/>
+        </p:nvSpPr>
+        <p:spPr>
+          <a:xfrm>
+            <a:off x="502920" y="4526280"/>
+            <a:ext cx="91440" cy="91440"/>
+          </a:xfrm>
+          <a:prstGeom prst="ellipse">
+            <a:avLst/>
+          </a:prstGeom>
+          <a:solidFill>
+            <a:srgbClr val="34D399"/>
+          </a:solidFill>
+          <a:ln w="12700">
+            <a:solidFill>
+              <a:srgbClr val="333333">
+                <a:alpha val="0"/>
+              </a:srgbClr>
+            </a:solidFill>
+            <a:prstDash val="solid"/>
+          </a:ln>
+        </p:spPr>
+      </p:sp>
+      <p:sp>
+        <p:nvSpPr>
+          <p:cNvPr id="37" name="Text 35"/>
+          <p:cNvSpPr/>
+          <p:nvPr/>
+        </p:nvSpPr>
+        <p:spPr>
+          <a:xfrm>
+            <a:off x="685800" y="4462272"/>
+            <a:ext cx="5303520" cy="420624"/>
+          </a:xfrm>
+          <a:prstGeom prst="rect">
+            <a:avLst/>
+          </a:prstGeom>
+          <a:noFill/>
+          <a:ln/>
+        </p:spPr>
+        <p:txBody>
+          <a:bodyPr wrap="square" rtlCol="0" anchor="ctr"/>
+          <a:lstStyle/>
+          <a:p>
+            <a:pPr indent="0" marL="0">
+              <a:buNone/>
+            </a:pPr>
+            <a:r>
+              <a:rPr lang="en-US" sz="950" dirty="0">
+                <a:solidFill>
+                  <a:srgbClr val="FFFFFF"/>
+                </a:solidFill>
+              </a:rPr>
+              <a:t>Trusted technology partner for UAE Federal and Emirate Government entities</a:t>
+            </a:r>
+            <a:endParaRPr lang="en-US" sz="950" dirty="0"/>
+          </a:p>
+        </p:txBody>
+      </p:sp>
+      <p:sp>
+        <p:nvSpPr>
+          <p:cNvPr id="38" name="Shape 36"/>
+          <p:cNvSpPr/>
+          <p:nvPr/>
+        </p:nvSpPr>
+        <p:spPr>
+          <a:xfrm>
+            <a:off x="6185916" y="4526280"/>
+            <a:ext cx="91440" cy="91440"/>
+          </a:xfrm>
+          <a:prstGeom prst="ellipse">
+            <a:avLst/>
+          </a:prstGeom>
+          <a:solidFill>
+            <a:srgbClr val="FBBF24"/>
+          </a:solidFill>
+          <a:ln w="12700">
+            <a:solidFill>
+              <a:srgbClr val="333333">
+                <a:alpha val="0"/>
+              </a:srgbClr>
+            </a:solidFill>
+            <a:prstDash val="solid"/>
+          </a:ln>
+        </p:spPr>
+      </p:sp>
+      <p:sp>
+        <p:nvSpPr>
+          <p:cNvPr id="39" name="Text 37"/>
+          <p:cNvSpPr/>
+          <p:nvPr/>
+        </p:nvSpPr>
+        <p:spPr>
+          <a:xfrm>
+            <a:off x="6368796" y="4462272"/>
+            <a:ext cx="5303520" cy="420624"/>
+          </a:xfrm>
+          <a:prstGeom prst="rect">
+            <a:avLst/>
+          </a:prstGeom>
+          <a:noFill/>
+          <a:ln/>
+        </p:spPr>
+        <p:txBody>
+          <a:bodyPr wrap="square" rtlCol="0" anchor="ctr"/>
+          <a:lstStyle/>
+          <a:p>
+            <a:pPr indent="0" marL="0">
+              <a:buNone/>
+            </a:pPr>
+            <a:r>
+              <a:rPr lang="en-US" sz="950" dirty="0">
+                <a:solidFill>
+                  <a:srgbClr val="FFFFFF"/>
+                </a:solidFill>
+              </a:rPr>
+              <a:t>Custom platforms serving 18,000+ daily active users across UAE university campuses</a:t>
+            </a:r>
+            <a:endParaRPr lang="en-US" sz="950" dirty="0"/>
+          </a:p>
+        </p:txBody>
+      </p:sp>
+      <p:sp>
+        <p:nvSpPr>
+          <p:cNvPr id="40" name="Shape 38"/>
+          <p:cNvSpPr/>
+          <p:nvPr/>
+        </p:nvSpPr>
+        <p:spPr>
+          <a:xfrm>
+            <a:off x="502920" y="5001768"/>
+            <a:ext cx="91440" cy="91440"/>
+          </a:xfrm>
+          <a:prstGeom prst="ellipse">
+            <a:avLst/>
+          </a:prstGeom>
+          <a:solidFill>
+            <a:srgbClr val="818CF8"/>
+          </a:solidFill>
+          <a:ln w="12700">
+            <a:solidFill>
+              <a:srgbClr val="333333">
+                <a:alpha val="0"/>
+              </a:srgbClr>
+            </a:solidFill>
+            <a:prstDash val="solid"/>
+          </a:ln>
+        </p:spPr>
+      </p:sp>
+      <p:sp>
+        <p:nvSpPr>
+          <p:cNvPr id="41" name="Text 39"/>
+          <p:cNvSpPr/>
+          <p:nvPr/>
+        </p:nvSpPr>
+        <p:spPr>
+          <a:xfrm>
+            <a:off x="685800" y="4937760"/>
+            <a:ext cx="5303520" cy="420624"/>
+          </a:xfrm>
+          <a:prstGeom prst="rect">
+            <a:avLst/>
+          </a:prstGeom>
+          <a:noFill/>
+          <a:ln/>
+        </p:spPr>
+        <p:txBody>
+          <a:bodyPr wrap="square" rtlCol="0" anchor="ctr"/>
+          <a:lstStyle/>
+          <a:p>
+            <a:pPr indent="0" marL="0">
+              <a:buNone/>
+            </a:pPr>
+            <a:r>
+              <a:rPr lang="en-US" sz="950" dirty="0">
+                <a:solidFill>
+                  <a:srgbClr val="FFFFFF"/>
+                </a:solidFill>
+              </a:rPr>
+              <a:t>Real-time BI platforms deployed across 80+ retail locations in the Gulf region</a:t>
+            </a:r>
+            <a:endParaRPr lang="en-US" sz="950" dirty="0"/>
+          </a:p>
+        </p:txBody>
+      </p:sp>
+      <p:sp>
+        <p:nvSpPr>
+          <p:cNvPr id="42" name="Shape 40"/>
+          <p:cNvSpPr/>
+          <p:nvPr/>
+        </p:nvSpPr>
+        <p:spPr>
+          <a:xfrm>
+            <a:off x="6185916" y="5001768"/>
+            <a:ext cx="91440" cy="91440"/>
+          </a:xfrm>
+          <a:prstGeom prst="ellipse">
+            <a:avLst/>
+          </a:prstGeom>
+          <a:solidFill>
+            <a:srgbClr val="F87171"/>
+          </a:solidFill>
+          <a:ln w="12700">
+            <a:solidFill>
+              <a:srgbClr val="333333">
+                <a:alpha val="0"/>
+              </a:srgbClr>
+            </a:solidFill>
+            <a:prstDash val="solid"/>
+          </a:ln>
+        </p:spPr>
+      </p:sp>
+      <p:sp>
+        <p:nvSpPr>
+          <p:cNvPr id="43" name="Text 41"/>
+          <p:cNvSpPr/>
+          <p:nvPr/>
+        </p:nvSpPr>
+        <p:spPr>
+          <a:xfrm>
+            <a:off x="6368796" y="4937760"/>
+            <a:ext cx="5303520" cy="420624"/>
+          </a:xfrm>
+          <a:prstGeom prst="rect">
+            <a:avLst/>
+          </a:prstGeom>
+          <a:noFill/>
+          <a:ln/>
+        </p:spPr>
+        <p:txBody>
+          <a:bodyPr wrap="square" rtlCol="0" anchor="ctr"/>
+          <a:lstStyle/>
+          <a:p>
+            <a:pPr indent="0" marL="0">
+              <a:buNone/>
+            </a:pPr>
+            <a:r>
+              <a:rPr lang="en-US" sz="950" dirty="0">
+                <a:solidFill>
+                  <a:srgbClr val="FFFFFF"/>
+                </a:solidFill>
+              </a:rPr>
+              <a:t>AI-powered SaaS HR platform reaching 5,000 active users within 6 months of launch</a:t>
+            </a:r>
+            <a:endParaRPr lang="en-US" sz="950" dirty="0"/>
+          </a:p>
+        </p:txBody>
+      </p:sp>
+      <p:sp>
+        <p:nvSpPr>
+          <p:cNvPr id="44" name="Shape 42"/>
           <p:cNvSpPr/>
           <p:nvPr/>
         </p:nvSpPr>
@@ -4759,6 +4859,33 @@
           <a:prstGeom prst="rect">
             <a:avLst/>
           </a:prstGeom>
+          <a:solidFill>
+            <a:srgbClr val="1E1040"/>
+          </a:solidFill>
+          <a:ln w="12700">
+            <a:solidFill>
+              <a:srgbClr val="333333">
+                <a:alpha val="0"/>
+              </a:srgbClr>
+            </a:solidFill>
+            <a:prstDash val="solid"/>
+          </a:ln>
+        </p:spPr>
+      </p:sp>
+      <p:sp>
+        <p:nvSpPr>
+          <p:cNvPr id="45" name="Text 43"/>
+          <p:cNvSpPr/>
+          <p:nvPr/>
+        </p:nvSpPr>
+        <p:spPr>
+          <a:xfrm>
+            <a:off x="0" y="6565392"/>
+            <a:ext cx="12192000" cy="292608"/>
+          </a:xfrm>
+          <a:prstGeom prst="rect">
+            <a:avLst/>
+          </a:prstGeom>
           <a:noFill/>
           <a:ln/>
         </p:spPr>
@@ -4772,7 +4899,7 @@
             <a:r>
               <a:rPr lang="en-US" sz="750" dirty="0">
                 <a:solidFill>
-                  <a:srgbClr val="C4B5FD"/>
+                  <a:srgbClr val="E9D5FF"/>
                 </a:solidFill>
               </a:rPr>
               <a:t>WeThink Technology Consulting  ·  Abu Dhabi, UAE  ·  wethink.ae  ·  © 2025</a:t>
@@ -4820,6 +4947,9 @@
           <a:prstGeom prst="rect">
             <a:avLst/>
           </a:prstGeom>
+          <a:solidFill>
+            <a:srgbClr val="0C0818"/>
+          </a:solidFill>
           <a:ln/>
         </p:spPr>
       </p:sp>
@@ -5041,7 +5171,7 @@
             <a:r>
               <a:rPr lang="en-US" sz="1000" dirty="0">
                 <a:solidFill>
-                  <a:srgbClr val="D8B4FE"/>
+                  <a:srgbClr val="E9D5FF"/>
                 </a:solidFill>
               </a:rPr>
               <a:t>Reach out and let's start a conversation.</a:t>
@@ -5113,7 +5243,7 @@
             <a:r>
               <a:rPr lang="en-US" sz="1300" b="1" dirty="0">
                 <a:solidFill>
-                  <a:srgbClr val="C4B5FD"/>
+                  <a:srgbClr val="E9D5FF"/>
                 </a:solidFill>
               </a:rPr>
               <a:t>WeThink Technology Consulting</a:t>
@@ -5139,14 +5269,12 @@
             </a:avLst>
           </a:prstGeom>
           <a:solidFill>
-            <a:srgbClr val="FFFFFF">
-              <a:alpha val="12000"/>
-            </a:srgbClr>
+            <a:srgbClr val="1E1040"/>
           </a:solidFill>
           <a:ln w="12700">
             <a:solidFill>
-              <a:srgbClr val="A78BFA">
-                <a:alpha val="45000"/>
+              <a:srgbClr val="7C3AED">
+                <a:alpha val="70000"/>
               </a:srgbClr>
             </a:solidFill>
             <a:prstDash val="solid"/>
@@ -5207,7 +5335,7 @@
             <a:r>
               <a:rPr lang="en-US" sz="750" b="1" spc="150" kern="0" dirty="0">
                 <a:solidFill>
-                  <a:srgbClr val="D8B4FE"/>
+                  <a:srgbClr val="E9D5FF"/>
                 </a:solidFill>
               </a:rPr>
               <a:t>WEBSITE</a:t>
@@ -5269,14 +5397,12 @@
             </a:avLst>
           </a:prstGeom>
           <a:solidFill>
-            <a:srgbClr val="FFFFFF">
-              <a:alpha val="12000"/>
-            </a:srgbClr>
+            <a:srgbClr val="1E1040"/>
           </a:solidFill>
           <a:ln w="12700">
             <a:solidFill>
-              <a:srgbClr val="A78BFA">
-                <a:alpha val="45000"/>
+              <a:srgbClr val="7C3AED">
+                <a:alpha val="70000"/>
               </a:srgbClr>
             </a:solidFill>
             <a:prstDash val="solid"/>
@@ -5337,7 +5463,7 @@
             <a:r>
               <a:rPr lang="en-US" sz="750" b="1" spc="150" kern="0" dirty="0">
                 <a:solidFill>
-                  <a:srgbClr val="D8B4FE"/>
+                  <a:srgbClr val="E9D5FF"/>
                 </a:solidFill>
               </a:rPr>
               <a:t>EMAIL</a:t>
@@ -5399,14 +5525,12 @@
             </a:avLst>
           </a:prstGeom>
           <a:solidFill>
-            <a:srgbClr val="FFFFFF">
-              <a:alpha val="12000"/>
-            </a:srgbClr>
+            <a:srgbClr val="1E1040"/>
           </a:solidFill>
           <a:ln w="12700">
             <a:solidFill>
-              <a:srgbClr val="A78BFA">
-                <a:alpha val="45000"/>
+              <a:srgbClr val="7C3AED">
+                <a:alpha val="70000"/>
               </a:srgbClr>
             </a:solidFill>
             <a:prstDash val="solid"/>
@@ -5467,7 +5591,7 @@
             <a:r>
               <a:rPr lang="en-US" sz="750" b="1" spc="150" kern="0" dirty="0">
                 <a:solidFill>
-                  <a:srgbClr val="D8B4FE"/>
+                  <a:srgbClr val="E9D5FF"/>
                 </a:solidFill>
               </a:rPr>
               <a:t>LOCATION</a:t>
@@ -5529,14 +5653,12 @@
             </a:avLst>
           </a:prstGeom>
           <a:solidFill>
-            <a:srgbClr val="FFFFFF">
-              <a:alpha val="12000"/>
-            </a:srgbClr>
+            <a:srgbClr val="1E1040"/>
           </a:solidFill>
           <a:ln w="12700">
             <a:solidFill>
-              <a:srgbClr val="A78BFA">
-                <a:alpha val="45000"/>
+              <a:srgbClr val="7C3AED">
+                <a:alpha val="70000"/>
               </a:srgbClr>
             </a:solidFill>
             <a:prstDash val="solid"/>
@@ -5597,7 +5719,7 @@
             <a:r>
               <a:rPr lang="en-US" sz="750" b="1" spc="150" kern="0" dirty="0">
                 <a:solidFill>
-                  <a:srgbClr val="D8B4FE"/>
+                  <a:srgbClr val="E9D5FF"/>
                 </a:solidFill>
               </a:rPr>
               <a:t>ESTABLISHED</a:t>
@@ -5669,7 +5791,7 @@
             <a:r>
               <a:rPr lang="en-US" sz="750" b="1" spc="150" kern="0" dirty="0">
                 <a:solidFill>
-                  <a:srgbClr val="A78BFA"/>
+                  <a:srgbClr val="E9D5FF"/>
                 </a:solidFill>
               </a:rPr>
               <a:t>SERVICES</a:t>
@@ -5705,7 +5827,7 @@
             <a:r>
               <a:rPr lang="en-US" sz="850" dirty="0">
                 <a:solidFill>
-                  <a:srgbClr val="CBD5E1"/>
+                  <a:srgbClr val="E2E8F0"/>
                 </a:solidFill>
               </a:rPr>
               <a:t>IT Consulting  ·  Cloud Strategy  ·  Cybersecurity  ·  Custom Software  ·  Data Analytics  ·  Digital Transformation</a:t>
@@ -5791,9 +5913,7 @@
             <a:avLst/>
           </a:prstGeom>
           <a:solidFill>
-            <a:srgbClr val="3B0764">
-              <a:alpha val="60000"/>
-            </a:srgbClr>
+            <a:srgbClr val="1E1040"/>
           </a:solidFill>
           <a:ln w="12700">
             <a:solidFill>
@@ -5832,7 +5952,7 @@
             <a:r>
               <a:rPr lang="en-US" sz="750" dirty="0">
                 <a:solidFill>
-                  <a:srgbClr val="C4B5FD"/>
+                  <a:srgbClr val="E9D5FF"/>
                 </a:solidFill>
               </a:rPr>
               <a:t>WeThink Technology Consulting  ·  Abu Dhabi, UAE  ·  wethink.ae  ·  © 2025</a:t>
